--- a/Презентация_защита_курсовой.pptx
+++ b/Презентация_защита_курсовой.pptx
@@ -3091,14 +3091,6 @@
 <file path=ppt/slides/slide1.xml><?xml version="1.0" encoding="utf-8"?>
 <p:sld xmlns:a="http://schemas.openxmlformats.org/drawingml/2006/main" xmlns:p="http://schemas.openxmlformats.org/presentationml/2006/main" xmlns:r="http://schemas.openxmlformats.org/officeDocument/2006/relationships">
   <p:cSld>
-    <p:bg>
-      <p:bgPr>
-        <a:solidFill>
-          <a:srgbClr val="1B2A4A"/>
-        </a:solidFill>
-        <a:effectLst/>
-      </p:bgPr>
-    </p:bg>
     <p:spTree>
       <p:nvGrpSpPr>
         <p:cNvPr id="1" name=""/>
@@ -3108,14 +3100,57 @@
       <p:grpSpPr/>
       <p:sp>
         <p:nvSpPr>
-          <p:cNvPr id="2" name="TextBox 1"/>
+          <p:cNvPr id="2" name="Rectangle 1"/>
+          <p:cNvSpPr/>
+          <p:nvPr/>
+        </p:nvSpPr>
+        <p:spPr>
+          <a:xfrm>
+            <a:off x="0" y="0"/>
+            <a:ext cx="12191695" cy="2103120"/>
+          </a:xfrm>
+          <a:prstGeom prst="rect">
+            <a:avLst/>
+          </a:prstGeom>
+          <a:solidFill>
+            <a:srgbClr val="1A478A"/>
+          </a:solidFill>
+          <a:ln>
+            <a:noFill/>
+          </a:ln>
+        </p:spPr>
+        <p:style>
+          <a:lnRef idx="1">
+            <a:schemeClr val="accent1"/>
+          </a:lnRef>
+          <a:fillRef idx="3">
+            <a:schemeClr val="accent1"/>
+          </a:fillRef>
+          <a:effectRef idx="2">
+            <a:schemeClr val="accent1"/>
+          </a:effectRef>
+          <a:fontRef idx="minor">
+            <a:schemeClr val="lt1"/>
+          </a:fontRef>
+        </p:style>
+        <p:txBody>
+          <a:bodyPr rtlCol="0" anchor="ctr"/>
+          <a:lstStyle/>
+          <a:p>
+            <a:pPr algn="ctr"/>
+          </a:p>
+        </p:txBody>
+      </p:sp>
+      <p:sp>
+        <p:nvSpPr>
+          <p:cNvPr id="3" name="TextBox 2"/>
           <p:cNvSpPr txBox="1"/>
           <p:nvPr/>
         </p:nvSpPr>
         <p:spPr>
           <a:xfrm>
-            <a:off x="914400" y="731520"/>
-            <a:ext cx="10332720" cy="548640"/>
+            <a:off x="731520" y="274320"/>
+            <a:ext cx="10698480" cy="457200"/>
           </a:xfrm>
           <a:prstGeom prst="rect">
             <a:avLst/>
@@ -3129,9 +3164,9 @@
           <a:lstStyle/>
           <a:p>
             <a:pPr algn="ctr">
-              <a:defRPr sz="1600" b="0">
-                <a:solidFill>
-                  <a:srgbClr val="99AACC"/>
+              <a:defRPr sz="1500" b="0">
+                <a:solidFill>
+                  <a:srgbClr val="BBCCDD"/>
                 </a:solidFill>
                 <a:latin typeface="Calibri"/>
               </a:defRPr>
@@ -3144,14 +3179,14 @@
       </p:sp>
       <p:sp>
         <p:nvSpPr>
-          <p:cNvPr id="3" name="TextBox 2"/>
+          <p:cNvPr id="4" name="TextBox 3"/>
           <p:cNvSpPr txBox="1"/>
           <p:nvPr/>
         </p:nvSpPr>
         <p:spPr>
           <a:xfrm>
-            <a:off x="914400" y="1188720"/>
-            <a:ext cx="10332720" cy="365760"/>
+            <a:off x="731520" y="685800"/>
+            <a:ext cx="10698480" cy="365760"/>
           </a:xfrm>
           <a:prstGeom prst="rect">
             <a:avLst/>
@@ -3165,9 +3200,9 @@
           <a:lstStyle/>
           <a:p>
             <a:pPr algn="ctr">
-              <a:defRPr sz="1400" b="0">
-                <a:solidFill>
-                  <a:srgbClr val="99AACC"/>
+              <a:defRPr sz="1300" b="0">
+                <a:solidFill>
+                  <a:srgbClr val="BBCCDD"/>
                 </a:solidFill>
                 <a:latin typeface="Calibri"/>
               </a:defRPr>
@@ -3180,14 +3215,14 @@
       </p:sp>
       <p:sp>
         <p:nvSpPr>
-          <p:cNvPr id="4" name="TextBox 3"/>
+          <p:cNvPr id="5" name="TextBox 4"/>
           <p:cNvSpPr txBox="1"/>
           <p:nvPr/>
         </p:nvSpPr>
         <p:spPr>
           <a:xfrm>
-            <a:off x="914400" y="1828800"/>
-            <a:ext cx="10332720" cy="457200"/>
+            <a:off x="731520" y="1234440"/>
+            <a:ext cx="10698480" cy="457200"/>
           </a:xfrm>
           <a:prstGeom prst="rect">
             <a:avLst/>
@@ -3201,29 +3236,29 @@
           <a:lstStyle/>
           <a:p>
             <a:pPr algn="ctr">
-              <a:defRPr sz="2400" b="1">
-                <a:solidFill>
-                  <a:srgbClr val="4EC9B0"/>
+              <a:defRPr sz="2200" b="1">
+                <a:solidFill>
+                  <a:srgbClr val="FFFFFF"/>
                 </a:solidFill>
                 <a:latin typeface="Calibri"/>
               </a:defRPr>
             </a:pPr>
             <a:r>
-              <a:t>КУРСОВАЯ РАБОТА</a:t>
-            </a:r>
-          </a:p>
-        </p:txBody>
-      </p:sp>
-      <p:sp>
-        <p:nvSpPr>
-          <p:cNvPr id="5" name="TextBox 4"/>
+              <a:t>Курсовая работа</a:t>
+            </a:r>
+          </a:p>
+        </p:txBody>
+      </p:sp>
+      <p:sp>
+        <p:nvSpPr>
+          <p:cNvPr id="6" name="TextBox 5"/>
           <p:cNvSpPr txBox="1"/>
           <p:nvPr/>
         </p:nvSpPr>
         <p:spPr>
           <a:xfrm>
-            <a:off x="1371600" y="2743200"/>
-            <a:ext cx="9418320" cy="1645920"/>
+            <a:off x="1097280" y="2560320"/>
+            <a:ext cx="9966960" cy="1463040"/>
           </a:xfrm>
           <a:prstGeom prst="rect">
             <a:avLst/>
@@ -3237,40 +3272,36 @@
           <a:lstStyle/>
           <a:p>
             <a:pPr algn="ctr">
-              <a:defRPr sz="3000" b="1">
-                <a:solidFill>
-                  <a:srgbClr val="FFFFFF"/>
+              <a:defRPr sz="2800" b="1">
+                <a:solidFill>
+                  <a:srgbClr val="1A478A"/>
                 </a:solidFill>
                 <a:latin typeface="Calibri"/>
               </a:defRPr>
             </a:pPr>
             <a:r>
-              <a:t>Современные протоколы динамической</a:t>
+              <a:t>Современные протоколы динамической маршрутизации</a:t>
             </a:r>
             <a:br/>
             <a:r>
-              <a:t>маршрутизации для обеспечения</a:t>
+              <a:t>для обеспечения киберустойчивости</a:t>
             </a:r>
             <a:br/>
             <a:r>
-              <a:t>киберустойчивости беспроводных</a:t>
-            </a:r>
-            <a:br/>
-            <a:r>
-              <a:t>сенсорных сетей</a:t>
-            </a:r>
-          </a:p>
-        </p:txBody>
-      </p:sp>
-      <p:sp>
-        <p:nvSpPr>
-          <p:cNvPr id="6" name="TextBox 5"/>
+              <a:t>беспроводных сенсорных сетей</a:t>
+            </a:r>
+          </a:p>
+        </p:txBody>
+      </p:sp>
+      <p:sp>
+        <p:nvSpPr>
+          <p:cNvPr id="7" name="TextBox 6"/>
           <p:cNvSpPr txBox="1"/>
           <p:nvPr/>
         </p:nvSpPr>
         <p:spPr>
           <a:xfrm>
-            <a:off x="5943600" y="5029200"/>
+            <a:off x="6400800" y="4572000"/>
             <a:ext cx="5029200" cy="1097280"/>
           </a:xfrm>
           <a:prstGeom prst="rect">
@@ -3285,9 +3316,9 @@
           <a:lstStyle/>
           <a:p>
             <a:pPr algn="l">
-              <a:defRPr sz="1600" b="0">
-                <a:solidFill>
-                  <a:srgbClr val="E8E8E8"/>
+              <a:defRPr sz="1500" b="0">
+                <a:solidFill>
+                  <a:srgbClr val="2D2D2D"/>
                 </a:solidFill>
                 <a:latin typeface="Calibri"/>
               </a:defRPr>
@@ -3304,13 +3335,13 @@
       </p:sp>
       <p:sp>
         <p:nvSpPr>
-          <p:cNvPr id="7" name="TextBox 6"/>
+          <p:cNvPr id="8" name="TextBox 7"/>
           <p:cNvSpPr txBox="1"/>
           <p:nvPr/>
         </p:nvSpPr>
         <p:spPr>
           <a:xfrm>
-            <a:off x="4572000" y="6217920"/>
+            <a:off x="4572000" y="6126480"/>
             <a:ext cx="3017520" cy="457200"/>
           </a:xfrm>
           <a:prstGeom prst="rect">
@@ -3325,15 +3356,15 @@
           <a:lstStyle/>
           <a:p>
             <a:pPr algn="ctr">
-              <a:defRPr sz="1600" b="0">
-                <a:solidFill>
-                  <a:srgbClr val="99AACC"/>
+              <a:defRPr sz="1400" b="0">
+                <a:solidFill>
+                  <a:srgbClr val="666666"/>
                 </a:solidFill>
                 <a:latin typeface="Calibri"/>
               </a:defRPr>
             </a:pPr>
             <a:r>
-              <a:t>Минск 2025</a:t>
+              <a:t>Минск, 2025</a:t>
             </a:r>
           </a:p>
         </p:txBody>
@@ -3349,14 +3380,6 @@
 <file path=ppt/slides/slide10.xml><?xml version="1.0" encoding="utf-8"?>
 <p:sld xmlns:a="http://schemas.openxmlformats.org/drawingml/2006/main" xmlns:p="http://schemas.openxmlformats.org/presentationml/2006/main" xmlns:r="http://schemas.openxmlformats.org/officeDocument/2006/relationships">
   <p:cSld>
-    <p:bg>
-      <p:bgPr>
-        <a:solidFill>
-          <a:srgbClr val="1B2A4A"/>
-        </a:solidFill>
-        <a:effectLst/>
-      </p:bgPr>
-    </p:bg>
     <p:spTree>
       <p:nvGrpSpPr>
         <p:cNvPr id="1" name=""/>
@@ -3366,56 +3389,20 @@
       <p:grpSpPr/>
       <p:sp>
         <p:nvSpPr>
-          <p:cNvPr id="2" name="TextBox 1"/>
-          <p:cNvSpPr txBox="1"/>
-          <p:nvPr/>
-        </p:nvSpPr>
-        <p:spPr>
-          <a:xfrm>
-            <a:off x="731520" y="365760"/>
-            <a:ext cx="10698480" cy="640080"/>
+          <p:cNvPr id="2" name="Rectangle 1"/>
+          <p:cNvSpPr/>
+          <p:nvPr/>
+        </p:nvSpPr>
+        <p:spPr>
+          <a:xfrm>
+            <a:off x="0" y="0"/>
+            <a:ext cx="12191695" cy="76200"/>
           </a:xfrm>
           <a:prstGeom prst="rect">
             <a:avLst/>
           </a:prstGeom>
-          <a:noFill/>
-        </p:spPr>
-        <p:txBody>
-          <a:bodyPr wrap="square">
-            <a:spAutoFit/>
-          </a:bodyPr>
-          <a:lstStyle/>
-          <a:p>
-            <a:pPr algn="l">
-              <a:defRPr sz="3200" b="1">
-                <a:solidFill>
-                  <a:srgbClr val="FFFFFF"/>
-                </a:solidFill>
-                <a:latin typeface="Calibri"/>
-              </a:defRPr>
-            </a:pPr>
-            <a:r>
-              <a:t>Заключение</a:t>
-            </a:r>
-          </a:p>
-        </p:txBody>
-      </p:sp>
-      <p:sp>
-        <p:nvSpPr>
-          <p:cNvPr id="3" name="Rectangle 2"/>
-          <p:cNvSpPr/>
-          <p:nvPr/>
-        </p:nvSpPr>
-        <p:spPr>
-          <a:xfrm>
-            <a:off x="731520" y="1005840"/>
-            <a:ext cx="1828800" cy="50800"/>
-          </a:xfrm>
-          <a:prstGeom prst="rect">
-            <a:avLst/>
-          </a:prstGeom>
           <a:solidFill>
-            <a:srgbClr val="4EC9B0"/>
+            <a:srgbClr val="1A478A"/>
           </a:solidFill>
           <a:ln>
             <a:noFill/>
@@ -3445,14 +3432,14 @@
       </p:sp>
       <p:sp>
         <p:nvSpPr>
-          <p:cNvPr id="4" name="TextBox 3"/>
+          <p:cNvPr id="3" name="TextBox 2"/>
           <p:cNvSpPr txBox="1"/>
           <p:nvPr/>
         </p:nvSpPr>
         <p:spPr>
           <a:xfrm>
-            <a:off x="731520" y="1371600"/>
-            <a:ext cx="10698480" cy="5029200"/>
+            <a:off x="731520" y="274320"/>
+            <a:ext cx="10698480" cy="731520"/>
           </a:xfrm>
           <a:prstGeom prst="rect">
             <a:avLst/>
@@ -3466,117 +3453,59 @@
           <a:lstStyle/>
           <a:p>
             <a:pPr algn="l">
-              <a:defRPr sz="1900" b="0">
-                <a:solidFill>
-                  <a:srgbClr val="E8E8E8"/>
+              <a:defRPr sz="2800" b="1">
+                <a:solidFill>
+                  <a:srgbClr val="1A478A"/>
                 </a:solidFill>
                 <a:latin typeface="Calibri"/>
               </a:defRPr>
             </a:pPr>
-          </a:p>
-          <a:p>
-            <a:pPr algn="l">
-              <a:spcBef>
-                <a:spcPts val="1400"/>
-              </a:spcBef>
-              <a:defRPr sz="1900" b="0">
-                <a:solidFill>
-                  <a:srgbClr val="E8E8E8"/>
-                </a:solidFill>
-                <a:latin typeface="Calibri"/>
-              </a:defRPr>
-            </a:pPr>
-            <a:r>
-              <a:t>1. Время жизни маршрута — критический параметр, определяемый</a:t>
-            </a:r>
-            <a:br/>
-            <a:r>
-              <a:t>   остаточной энергией узлов и типом трафика</a:t>
-            </a:r>
-          </a:p>
-          <a:p>
-            <a:pPr algn="l">
-              <a:spcBef>
-                <a:spcPts val="1400"/>
-              </a:spcBef>
-              <a:defRPr sz="1900" b="0">
-                <a:solidFill>
-                  <a:srgbClr val="E8E8E8"/>
-                </a:solidFill>
-                <a:latin typeface="Calibri"/>
-              </a:defRPr>
-            </a:pPr>
-            <a:r>
-              <a:t>2. Для мультимедийных приложений необходим одновременный учёт</a:t>
-            </a:r>
-            <a:br/>
-            <a:r>
-              <a:t>   QoS и времени жизни → многокритериальная оптимизация</a:t>
-            </a:r>
-          </a:p>
-          <a:p>
-            <a:pPr algn="l">
-              <a:spcBef>
-                <a:spcPts val="1400"/>
-              </a:spcBef>
-              <a:defRPr sz="1900" b="0">
-                <a:solidFill>
-                  <a:srgbClr val="E8E8E8"/>
-                </a:solidFill>
-                <a:latin typeface="Calibri"/>
-              </a:defRPr>
-            </a:pPr>
-            <a:r>
-              <a:t>3. Обнаружение аномалий на основе анализа поведения — наиболее</a:t>
-            </a:r>
-            <a:br/>
-            <a:r>
-              <a:t>   перспективный подход к безопасности БСС</a:t>
-            </a:r>
-          </a:p>
-          <a:p>
-            <a:pPr algn="l">
-              <a:spcBef>
-                <a:spcPts val="1400"/>
-              </a:spcBef>
-              <a:defRPr sz="1900" b="0">
-                <a:solidFill>
-                  <a:srgbClr val="E8E8E8"/>
-                </a:solidFill>
-                <a:latin typeface="Calibri"/>
-              </a:defRPr>
-            </a:pPr>
-            <a:r>
-              <a:t>4. Ни один протокол не обеспечивает высокие показатели по всем</a:t>
-            </a:r>
-            <a:br/>
-            <a:r>
-              <a:t>   критериям одновременно</a:t>
-            </a:r>
-          </a:p>
-          <a:p>
-            <a:pPr algn="l">
-              <a:spcBef>
-                <a:spcPts val="1400"/>
-              </a:spcBef>
-              <a:defRPr sz="1900" b="0">
-                <a:solidFill>
-                  <a:srgbClr val="E8E8E8"/>
-                </a:solidFill>
-                <a:latin typeface="Calibri"/>
-              </a:defRPr>
-            </a:pPr>
-            <a:r>
-              <a:t>5. Перспективное направление — гибридные протоколы,</a:t>
-            </a:r>
-            <a:br/>
-            <a:r>
-              <a:t>   интегрирующие иерархическую организацию, многокритериальную</a:t>
-            </a:r>
-            <a:br/>
-            <a:r>
-              <a:t>   оптимизацию, механизмы доверия и облегчённые IDS</a:t>
-            </a:r>
+            <a:r>
+              <a:t>Заключение</a:t>
+            </a:r>
+          </a:p>
+        </p:txBody>
+      </p:sp>
+      <p:sp>
+        <p:nvSpPr>
+          <p:cNvPr id="4" name="Rectangle 3"/>
+          <p:cNvSpPr/>
+          <p:nvPr/>
+        </p:nvSpPr>
+        <p:spPr>
+          <a:xfrm>
+            <a:off x="731520" y="6446520"/>
+            <a:ext cx="10698480" cy="12700"/>
+          </a:xfrm>
+          <a:prstGeom prst="rect">
+            <a:avLst/>
+          </a:prstGeom>
+          <a:solidFill>
+            <a:srgbClr val="CCCCCC"/>
+          </a:solidFill>
+          <a:ln>
+            <a:noFill/>
+          </a:ln>
+        </p:spPr>
+        <p:style>
+          <a:lnRef idx="1">
+            <a:schemeClr val="accent1"/>
+          </a:lnRef>
+          <a:fillRef idx="3">
+            <a:schemeClr val="accent1"/>
+          </a:fillRef>
+          <a:effectRef idx="2">
+            <a:schemeClr val="accent1"/>
+          </a:effectRef>
+          <a:fontRef idx="minor">
+            <a:schemeClr val="lt1"/>
+          </a:fontRef>
+        </p:style>
+        <p:txBody>
+          <a:bodyPr rtlCol="0" anchor="ctr"/>
+          <a:lstStyle/>
+          <a:p>
+            <a:pPr algn="ctr"/>
           </a:p>
         </p:txBody>
       </p:sp>
@@ -3588,8 +3517,8 @@
         </p:nvSpPr>
         <p:spPr>
           <a:xfrm>
-            <a:off x="11430000" y="6400800"/>
-            <a:ext cx="640080" cy="365760"/>
+            <a:off x="11155680" y="6446520"/>
+            <a:ext cx="731520" cy="320040"/>
           </a:xfrm>
           <a:prstGeom prst="rect">
             <a:avLst/>
@@ -3597,21 +3526,461 @@
           <a:noFill/>
         </p:spPr>
         <p:txBody>
-          <a:bodyPr wrap="none">
+          <a:bodyPr wrap="square">
             <a:spAutoFit/>
           </a:bodyPr>
           <a:lstStyle/>
           <a:p>
             <a:pPr algn="r">
-              <a:defRPr sz="1200">
-                <a:solidFill>
-                  <a:srgbClr val="8888AA"/>
+              <a:defRPr sz="1100" b="0">
+                <a:solidFill>
+                  <a:srgbClr val="666666"/>
                 </a:solidFill>
                 <a:latin typeface="Calibri"/>
               </a:defRPr>
             </a:pPr>
             <a:r>
               <a:t>10</a:t>
+            </a:r>
+          </a:p>
+        </p:txBody>
+      </p:sp>
+      <p:sp>
+        <p:nvSpPr>
+          <p:cNvPr id="6" name="Oval 5"/>
+          <p:cNvSpPr/>
+          <p:nvPr/>
+        </p:nvSpPr>
+        <p:spPr>
+          <a:xfrm>
+            <a:off x="731520" y="1188720"/>
+            <a:ext cx="365760" cy="365760"/>
+          </a:xfrm>
+          <a:prstGeom prst="ellipse">
+            <a:avLst/>
+          </a:prstGeom>
+          <a:solidFill>
+            <a:srgbClr val="167F72"/>
+          </a:solidFill>
+          <a:ln>
+            <a:noFill/>
+          </a:ln>
+        </p:spPr>
+        <p:style>
+          <a:lnRef idx="1">
+            <a:schemeClr val="accent1"/>
+          </a:lnRef>
+          <a:fillRef idx="3">
+            <a:schemeClr val="accent1"/>
+          </a:fillRef>
+          <a:effectRef idx="2">
+            <a:schemeClr val="accent1"/>
+          </a:effectRef>
+          <a:fontRef idx="minor">
+            <a:schemeClr val="lt1"/>
+          </a:fontRef>
+        </p:style>
+        <p:txBody>
+          <a:bodyPr rtlCol="0" anchor="ctr"/>
+          <a:lstStyle/>
+          <a:p>
+            <a:pPr algn="ctr">
+              <a:defRPr sz="1500" b="1">
+                <a:solidFill>
+                  <a:srgbClr val="FFFFFF"/>
+                </a:solidFill>
+              </a:defRPr>
+            </a:pPr>
+            <a:r>
+              <a:t>1</a:t>
+            </a:r>
+          </a:p>
+        </p:txBody>
+      </p:sp>
+      <p:sp>
+        <p:nvSpPr>
+          <p:cNvPr id="7" name="TextBox 6"/>
+          <p:cNvSpPr txBox="1"/>
+          <p:nvPr/>
+        </p:nvSpPr>
+        <p:spPr>
+          <a:xfrm>
+            <a:off x="1280160" y="1188720"/>
+            <a:ext cx="10058400" cy="548640"/>
+          </a:xfrm>
+          <a:prstGeom prst="rect">
+            <a:avLst/>
+          </a:prstGeom>
+          <a:noFill/>
+        </p:spPr>
+        <p:txBody>
+          <a:bodyPr wrap="square">
+            <a:spAutoFit/>
+          </a:bodyPr>
+          <a:lstStyle/>
+          <a:p>
+            <a:pPr algn="l">
+              <a:defRPr sz="1700" b="0">
+                <a:solidFill>
+                  <a:srgbClr val="2D2D2D"/>
+                </a:solidFill>
+                <a:latin typeface="Calibri"/>
+              </a:defRPr>
+            </a:pPr>
+            <a:r>
+              <a:t>Время жизни маршрута — критический параметр, определяемый остаточной энергией узлов и типом передаваемого трафика.</a:t>
+            </a:r>
+          </a:p>
+        </p:txBody>
+      </p:sp>
+      <p:sp>
+        <p:nvSpPr>
+          <p:cNvPr id="8" name="Oval 7"/>
+          <p:cNvSpPr/>
+          <p:nvPr/>
+        </p:nvSpPr>
+        <p:spPr>
+          <a:xfrm>
+            <a:off x="731520" y="2194560"/>
+            <a:ext cx="365760" cy="365760"/>
+          </a:xfrm>
+          <a:prstGeom prst="ellipse">
+            <a:avLst/>
+          </a:prstGeom>
+          <a:solidFill>
+            <a:srgbClr val="167F72"/>
+          </a:solidFill>
+          <a:ln>
+            <a:noFill/>
+          </a:ln>
+        </p:spPr>
+        <p:style>
+          <a:lnRef idx="1">
+            <a:schemeClr val="accent1"/>
+          </a:lnRef>
+          <a:fillRef idx="3">
+            <a:schemeClr val="accent1"/>
+          </a:fillRef>
+          <a:effectRef idx="2">
+            <a:schemeClr val="accent1"/>
+          </a:effectRef>
+          <a:fontRef idx="minor">
+            <a:schemeClr val="lt1"/>
+          </a:fontRef>
+        </p:style>
+        <p:txBody>
+          <a:bodyPr rtlCol="0" anchor="ctr"/>
+          <a:lstStyle/>
+          <a:p>
+            <a:pPr algn="ctr">
+              <a:defRPr sz="1500" b="1">
+                <a:solidFill>
+                  <a:srgbClr val="FFFFFF"/>
+                </a:solidFill>
+              </a:defRPr>
+            </a:pPr>
+            <a:r>
+              <a:t>2</a:t>
+            </a:r>
+          </a:p>
+        </p:txBody>
+      </p:sp>
+      <p:sp>
+        <p:nvSpPr>
+          <p:cNvPr id="9" name="TextBox 8"/>
+          <p:cNvSpPr txBox="1"/>
+          <p:nvPr/>
+        </p:nvSpPr>
+        <p:spPr>
+          <a:xfrm>
+            <a:off x="1280160" y="2194560"/>
+            <a:ext cx="10058400" cy="548640"/>
+          </a:xfrm>
+          <a:prstGeom prst="rect">
+            <a:avLst/>
+          </a:prstGeom>
+          <a:noFill/>
+        </p:spPr>
+        <p:txBody>
+          <a:bodyPr wrap="square">
+            <a:spAutoFit/>
+          </a:bodyPr>
+          <a:lstStyle/>
+          <a:p>
+            <a:pPr algn="l">
+              <a:defRPr sz="1700" b="0">
+                <a:solidFill>
+                  <a:srgbClr val="2D2D2D"/>
+                </a:solidFill>
+                <a:latin typeface="Calibri"/>
+              </a:defRPr>
+            </a:pPr>
+            <a:r>
+              <a:t>Для мультимедийных приложений необходим одновременный учёт QoS и времени жизни сети, что формирует задачу многокритериальной оптимизации.</a:t>
+            </a:r>
+          </a:p>
+        </p:txBody>
+      </p:sp>
+      <p:sp>
+        <p:nvSpPr>
+          <p:cNvPr id="10" name="Oval 9"/>
+          <p:cNvSpPr/>
+          <p:nvPr/>
+        </p:nvSpPr>
+        <p:spPr>
+          <a:xfrm>
+            <a:off x="731520" y="3200400"/>
+            <a:ext cx="365760" cy="365760"/>
+          </a:xfrm>
+          <a:prstGeom prst="ellipse">
+            <a:avLst/>
+          </a:prstGeom>
+          <a:solidFill>
+            <a:srgbClr val="167F72"/>
+          </a:solidFill>
+          <a:ln>
+            <a:noFill/>
+          </a:ln>
+        </p:spPr>
+        <p:style>
+          <a:lnRef idx="1">
+            <a:schemeClr val="accent1"/>
+          </a:lnRef>
+          <a:fillRef idx="3">
+            <a:schemeClr val="accent1"/>
+          </a:fillRef>
+          <a:effectRef idx="2">
+            <a:schemeClr val="accent1"/>
+          </a:effectRef>
+          <a:fontRef idx="minor">
+            <a:schemeClr val="lt1"/>
+          </a:fontRef>
+        </p:style>
+        <p:txBody>
+          <a:bodyPr rtlCol="0" anchor="ctr"/>
+          <a:lstStyle/>
+          <a:p>
+            <a:pPr algn="ctr">
+              <a:defRPr sz="1500" b="1">
+                <a:solidFill>
+                  <a:srgbClr val="FFFFFF"/>
+                </a:solidFill>
+              </a:defRPr>
+            </a:pPr>
+            <a:r>
+              <a:t>3</a:t>
+            </a:r>
+          </a:p>
+        </p:txBody>
+      </p:sp>
+      <p:sp>
+        <p:nvSpPr>
+          <p:cNvPr id="11" name="TextBox 10"/>
+          <p:cNvSpPr txBox="1"/>
+          <p:nvPr/>
+        </p:nvSpPr>
+        <p:spPr>
+          <a:xfrm>
+            <a:off x="1280160" y="3200400"/>
+            <a:ext cx="10058400" cy="548640"/>
+          </a:xfrm>
+          <a:prstGeom prst="rect">
+            <a:avLst/>
+          </a:prstGeom>
+          <a:noFill/>
+        </p:spPr>
+        <p:txBody>
+          <a:bodyPr wrap="square">
+            <a:spAutoFit/>
+          </a:bodyPr>
+          <a:lstStyle/>
+          <a:p>
+            <a:pPr algn="l">
+              <a:defRPr sz="1700" b="0">
+                <a:solidFill>
+                  <a:srgbClr val="2D2D2D"/>
+                </a:solidFill>
+                <a:latin typeface="Calibri"/>
+              </a:defRPr>
+            </a:pPr>
+            <a:r>
+              <a:t>Обнаружение аномалий на основе анализа поведения — наиболее перспективный подход к обеспечению безопасности БСС.</a:t>
+            </a:r>
+          </a:p>
+        </p:txBody>
+      </p:sp>
+      <p:sp>
+        <p:nvSpPr>
+          <p:cNvPr id="12" name="Oval 11"/>
+          <p:cNvSpPr/>
+          <p:nvPr/>
+        </p:nvSpPr>
+        <p:spPr>
+          <a:xfrm>
+            <a:off x="731520" y="4206240"/>
+            <a:ext cx="365760" cy="365760"/>
+          </a:xfrm>
+          <a:prstGeom prst="ellipse">
+            <a:avLst/>
+          </a:prstGeom>
+          <a:solidFill>
+            <a:srgbClr val="167F72"/>
+          </a:solidFill>
+          <a:ln>
+            <a:noFill/>
+          </a:ln>
+        </p:spPr>
+        <p:style>
+          <a:lnRef idx="1">
+            <a:schemeClr val="accent1"/>
+          </a:lnRef>
+          <a:fillRef idx="3">
+            <a:schemeClr val="accent1"/>
+          </a:fillRef>
+          <a:effectRef idx="2">
+            <a:schemeClr val="accent1"/>
+          </a:effectRef>
+          <a:fontRef idx="minor">
+            <a:schemeClr val="lt1"/>
+          </a:fontRef>
+        </p:style>
+        <p:txBody>
+          <a:bodyPr rtlCol="0" anchor="ctr"/>
+          <a:lstStyle/>
+          <a:p>
+            <a:pPr algn="ctr">
+              <a:defRPr sz="1500" b="1">
+                <a:solidFill>
+                  <a:srgbClr val="FFFFFF"/>
+                </a:solidFill>
+              </a:defRPr>
+            </a:pPr>
+            <a:r>
+              <a:t>4</a:t>
+            </a:r>
+          </a:p>
+        </p:txBody>
+      </p:sp>
+      <p:sp>
+        <p:nvSpPr>
+          <p:cNvPr id="13" name="TextBox 12"/>
+          <p:cNvSpPr txBox="1"/>
+          <p:nvPr/>
+        </p:nvSpPr>
+        <p:spPr>
+          <a:xfrm>
+            <a:off x="1280160" y="4206240"/>
+            <a:ext cx="10058400" cy="548640"/>
+          </a:xfrm>
+          <a:prstGeom prst="rect">
+            <a:avLst/>
+          </a:prstGeom>
+          <a:noFill/>
+        </p:spPr>
+        <p:txBody>
+          <a:bodyPr wrap="square">
+            <a:spAutoFit/>
+          </a:bodyPr>
+          <a:lstStyle/>
+          <a:p>
+            <a:pPr algn="l">
+              <a:defRPr sz="1700" b="0">
+                <a:solidFill>
+                  <a:srgbClr val="2D2D2D"/>
+                </a:solidFill>
+                <a:latin typeface="Calibri"/>
+              </a:defRPr>
+            </a:pPr>
+            <a:r>
+              <a:t>Ни один из существующих протоколов не обеспечивает высокие показатели по всем критериям одновременно.</a:t>
+            </a:r>
+          </a:p>
+        </p:txBody>
+      </p:sp>
+      <p:sp>
+        <p:nvSpPr>
+          <p:cNvPr id="14" name="Oval 13"/>
+          <p:cNvSpPr/>
+          <p:nvPr/>
+        </p:nvSpPr>
+        <p:spPr>
+          <a:xfrm>
+            <a:off x="731520" y="5212080"/>
+            <a:ext cx="365760" cy="365760"/>
+          </a:xfrm>
+          <a:prstGeom prst="ellipse">
+            <a:avLst/>
+          </a:prstGeom>
+          <a:solidFill>
+            <a:srgbClr val="167F72"/>
+          </a:solidFill>
+          <a:ln>
+            <a:noFill/>
+          </a:ln>
+        </p:spPr>
+        <p:style>
+          <a:lnRef idx="1">
+            <a:schemeClr val="accent1"/>
+          </a:lnRef>
+          <a:fillRef idx="3">
+            <a:schemeClr val="accent1"/>
+          </a:fillRef>
+          <a:effectRef idx="2">
+            <a:schemeClr val="accent1"/>
+          </a:effectRef>
+          <a:fontRef idx="minor">
+            <a:schemeClr val="lt1"/>
+          </a:fontRef>
+        </p:style>
+        <p:txBody>
+          <a:bodyPr rtlCol="0" anchor="ctr"/>
+          <a:lstStyle/>
+          <a:p>
+            <a:pPr algn="ctr">
+              <a:defRPr sz="1500" b="1">
+                <a:solidFill>
+                  <a:srgbClr val="FFFFFF"/>
+                </a:solidFill>
+              </a:defRPr>
+            </a:pPr>
+            <a:r>
+              <a:t>5</a:t>
+            </a:r>
+          </a:p>
+        </p:txBody>
+      </p:sp>
+      <p:sp>
+        <p:nvSpPr>
+          <p:cNvPr id="15" name="TextBox 14"/>
+          <p:cNvSpPr txBox="1"/>
+          <p:nvPr/>
+        </p:nvSpPr>
+        <p:spPr>
+          <a:xfrm>
+            <a:off x="1280160" y="5212080"/>
+            <a:ext cx="10058400" cy="548640"/>
+          </a:xfrm>
+          <a:prstGeom prst="rect">
+            <a:avLst/>
+          </a:prstGeom>
+          <a:noFill/>
+        </p:spPr>
+        <p:txBody>
+          <a:bodyPr wrap="square">
+            <a:spAutoFit/>
+          </a:bodyPr>
+          <a:lstStyle/>
+          <a:p>
+            <a:pPr algn="l">
+              <a:defRPr sz="1700" b="0">
+                <a:solidFill>
+                  <a:srgbClr val="2D2D2D"/>
+                </a:solidFill>
+                <a:latin typeface="Calibri"/>
+              </a:defRPr>
+            </a:pPr>
+            <a:r>
+              <a:t>Перспективное направление — гибридные протоколы, интегрирующие иерархическую организацию, многокритериальную оптимизацию, механизмы доверия и облегчённые IDS.</a:t>
             </a:r>
           </a:p>
         </p:txBody>
@@ -3627,14 +3996,6 @@
 <file path=ppt/slides/slide11.xml><?xml version="1.0" encoding="utf-8"?>
 <p:sld xmlns:a="http://schemas.openxmlformats.org/drawingml/2006/main" xmlns:p="http://schemas.openxmlformats.org/presentationml/2006/main" xmlns:r="http://schemas.openxmlformats.org/officeDocument/2006/relationships">
   <p:cSld>
-    <p:bg>
-      <p:bgPr>
-        <a:solidFill>
-          <a:srgbClr val="1B2A4A"/>
-        </a:solidFill>
-        <a:effectLst/>
-      </p:bgPr>
-    </p:bg>
     <p:spTree>
       <p:nvGrpSpPr>
         <p:cNvPr id="1" name=""/>
@@ -3644,56 +4005,20 @@
       <p:grpSpPr/>
       <p:sp>
         <p:nvSpPr>
-          <p:cNvPr id="2" name="TextBox 1"/>
-          <p:cNvSpPr txBox="1"/>
-          <p:nvPr/>
-        </p:nvSpPr>
-        <p:spPr>
-          <a:xfrm>
-            <a:off x="914400" y="2286000"/>
-            <a:ext cx="10332720" cy="1371600"/>
+          <p:cNvPr id="2" name="Rectangle 1"/>
+          <p:cNvSpPr/>
+          <p:nvPr/>
+        </p:nvSpPr>
+        <p:spPr>
+          <a:xfrm>
+            <a:off x="0" y="0"/>
+            <a:ext cx="12191695" cy="1828800"/>
           </a:xfrm>
           <a:prstGeom prst="rect">
             <a:avLst/>
           </a:prstGeom>
-          <a:noFill/>
-        </p:spPr>
-        <p:txBody>
-          <a:bodyPr wrap="square">
-            <a:spAutoFit/>
-          </a:bodyPr>
-          <a:lstStyle/>
-          <a:p>
-            <a:pPr algn="ctr">
-              <a:defRPr sz="4400" b="1">
-                <a:solidFill>
-                  <a:srgbClr val="FFFFFF"/>
-                </a:solidFill>
-                <a:latin typeface="Calibri"/>
-              </a:defRPr>
-            </a:pPr>
-            <a:r>
-              <a:t>Спасибо за внимание!</a:t>
-            </a:r>
-          </a:p>
-        </p:txBody>
-      </p:sp>
-      <p:sp>
-        <p:nvSpPr>
-          <p:cNvPr id="3" name="Rectangle 2"/>
-          <p:cNvSpPr/>
-          <p:nvPr/>
-        </p:nvSpPr>
-        <p:spPr>
-          <a:xfrm>
-            <a:off x="4572000" y="3657600"/>
-            <a:ext cx="3017520" cy="50800"/>
-          </a:xfrm>
-          <a:prstGeom prst="rect">
-            <a:avLst/>
-          </a:prstGeom>
           <a:solidFill>
-            <a:srgbClr val="4EC9B0"/>
+            <a:srgbClr val="1A478A"/>
           </a:solidFill>
           <a:ln>
             <a:noFill/>
@@ -3723,14 +4048,14 @@
       </p:sp>
       <p:sp>
         <p:nvSpPr>
-          <p:cNvPr id="4" name="TextBox 3"/>
+          <p:cNvPr id="3" name="TextBox 2"/>
           <p:cNvSpPr txBox="1"/>
           <p:nvPr/>
         </p:nvSpPr>
         <p:spPr>
           <a:xfrm>
-            <a:off x="914400" y="4114800"/>
-            <a:ext cx="10332720" cy="731520"/>
+            <a:off x="914400" y="457200"/>
+            <a:ext cx="10332720" cy="914400"/>
           </a:xfrm>
           <a:prstGeom prst="rect">
             <a:avLst/>
@@ -3744,29 +4069,29 @@
           <a:lstStyle/>
           <a:p>
             <a:pPr algn="ctr">
-              <a:defRPr sz="2400" b="0">
-                <a:solidFill>
-                  <a:srgbClr val="E8E8E8"/>
+              <a:defRPr sz="4000" b="1">
+                <a:solidFill>
+                  <a:srgbClr val="FFFFFF"/>
                 </a:solidFill>
                 <a:latin typeface="Calibri"/>
               </a:defRPr>
             </a:pPr>
             <a:r>
-              <a:t>Готов ответить на ваши вопросы</a:t>
-            </a:r>
-          </a:p>
-        </p:txBody>
-      </p:sp>
-      <p:sp>
-        <p:nvSpPr>
-          <p:cNvPr id="5" name="TextBox 4"/>
+              <a:t>Спасибо за внимание!</a:t>
+            </a:r>
+          </a:p>
+        </p:txBody>
+      </p:sp>
+      <p:sp>
+        <p:nvSpPr>
+          <p:cNvPr id="4" name="TextBox 3"/>
           <p:cNvSpPr txBox="1"/>
           <p:nvPr/>
         </p:nvSpPr>
         <p:spPr>
           <a:xfrm>
-            <a:off x="11430000" y="6400800"/>
-            <a:ext cx="640080" cy="365760"/>
+            <a:off x="914400" y="2743200"/>
+            <a:ext cx="10332720" cy="731520"/>
           </a:xfrm>
           <a:prstGeom prst="rect">
             <a:avLst/>
@@ -3774,21 +4099,21 @@
           <a:noFill/>
         </p:spPr>
         <p:txBody>
-          <a:bodyPr wrap="none">
+          <a:bodyPr wrap="square">
             <a:spAutoFit/>
           </a:bodyPr>
           <a:lstStyle/>
           <a:p>
-            <a:pPr algn="r">
-              <a:defRPr sz="1200">
-                <a:solidFill>
-                  <a:srgbClr val="8888AA"/>
+            <a:pPr algn="ctr">
+              <a:defRPr sz="2200" b="0">
+                <a:solidFill>
+                  <a:srgbClr val="666666"/>
                 </a:solidFill>
                 <a:latin typeface="Calibri"/>
               </a:defRPr>
             </a:pPr>
             <a:r>
-              <a:t>11</a:t>
+              <a:t>Готов ответить на ваши вопросы</a:t>
             </a:r>
           </a:p>
         </p:txBody>
@@ -3804,14 +4129,6 @@
 <file path=ppt/slides/slide2.xml><?xml version="1.0" encoding="utf-8"?>
 <p:sld xmlns:a="http://schemas.openxmlformats.org/drawingml/2006/main" xmlns:p="http://schemas.openxmlformats.org/presentationml/2006/main" xmlns:r="http://schemas.openxmlformats.org/officeDocument/2006/relationships">
   <p:cSld>
-    <p:bg>
-      <p:bgPr>
-        <a:solidFill>
-          <a:srgbClr val="1B2A4A"/>
-        </a:solidFill>
-        <a:effectLst/>
-      </p:bgPr>
-    </p:bg>
     <p:spTree>
       <p:nvGrpSpPr>
         <p:cNvPr id="1" name=""/>
@@ -3821,56 +4138,20 @@
       <p:grpSpPr/>
       <p:sp>
         <p:nvSpPr>
-          <p:cNvPr id="2" name="TextBox 1"/>
-          <p:cNvSpPr txBox="1"/>
-          <p:nvPr/>
-        </p:nvSpPr>
-        <p:spPr>
-          <a:xfrm>
-            <a:off x="731520" y="365760"/>
-            <a:ext cx="10698480" cy="640080"/>
+          <p:cNvPr id="2" name="Rectangle 1"/>
+          <p:cNvSpPr/>
+          <p:nvPr/>
+        </p:nvSpPr>
+        <p:spPr>
+          <a:xfrm>
+            <a:off x="0" y="0"/>
+            <a:ext cx="12191695" cy="76200"/>
           </a:xfrm>
           <a:prstGeom prst="rect">
             <a:avLst/>
           </a:prstGeom>
-          <a:noFill/>
-        </p:spPr>
-        <p:txBody>
-          <a:bodyPr wrap="square">
-            <a:spAutoFit/>
-          </a:bodyPr>
-          <a:lstStyle/>
-          <a:p>
-            <a:pPr algn="l">
-              <a:defRPr sz="3200" b="1">
-                <a:solidFill>
-                  <a:srgbClr val="FFFFFF"/>
-                </a:solidFill>
-                <a:latin typeface="Calibri"/>
-              </a:defRPr>
-            </a:pPr>
-            <a:r>
-              <a:t>Актуальность и цель работы</a:t>
-            </a:r>
-          </a:p>
-        </p:txBody>
-      </p:sp>
-      <p:sp>
-        <p:nvSpPr>
-          <p:cNvPr id="3" name="Rectangle 2"/>
-          <p:cNvSpPr/>
-          <p:nvPr/>
-        </p:nvSpPr>
-        <p:spPr>
-          <a:xfrm>
-            <a:off x="731520" y="1005840"/>
-            <a:ext cx="1828800" cy="50800"/>
-          </a:xfrm>
-          <a:prstGeom prst="rect">
-            <a:avLst/>
-          </a:prstGeom>
           <a:solidFill>
-            <a:srgbClr val="4EC9B0"/>
+            <a:srgbClr val="1A478A"/>
           </a:solidFill>
           <a:ln>
             <a:noFill/>
@@ -3900,14 +4181,14 @@
       </p:sp>
       <p:sp>
         <p:nvSpPr>
-          <p:cNvPr id="4" name="TextBox 3"/>
+          <p:cNvPr id="3" name="TextBox 2"/>
           <p:cNvSpPr txBox="1"/>
           <p:nvPr/>
         </p:nvSpPr>
         <p:spPr>
           <a:xfrm>
-            <a:off x="731520" y="1371600"/>
-            <a:ext cx="10698480" cy="5029200"/>
+            <a:off x="731520" y="274320"/>
+            <a:ext cx="10698480" cy="731520"/>
           </a:xfrm>
           <a:prstGeom prst="rect">
             <a:avLst/>
@@ -3921,28 +4202,175 @@
           <a:lstStyle/>
           <a:p>
             <a:pPr algn="l">
-              <a:defRPr sz="2000" b="0">
-                <a:solidFill>
-                  <a:srgbClr val="E8E8E8"/>
+              <a:defRPr sz="2800" b="1">
+                <a:solidFill>
+                  <a:srgbClr val="1A478A"/>
                 </a:solidFill>
                 <a:latin typeface="Calibri"/>
               </a:defRPr>
             </a:pPr>
+            <a:r>
+              <a:t>Актуальность и цель работы</a:t>
+            </a:r>
+          </a:p>
+        </p:txBody>
+      </p:sp>
+      <p:sp>
+        <p:nvSpPr>
+          <p:cNvPr id="4" name="Rectangle 3"/>
+          <p:cNvSpPr/>
+          <p:nvPr/>
+        </p:nvSpPr>
+        <p:spPr>
+          <a:xfrm>
+            <a:off x="731520" y="6446520"/>
+            <a:ext cx="10698480" cy="12700"/>
+          </a:xfrm>
+          <a:prstGeom prst="rect">
+            <a:avLst/>
+          </a:prstGeom>
+          <a:solidFill>
+            <a:srgbClr val="CCCCCC"/>
+          </a:solidFill>
+          <a:ln>
+            <a:noFill/>
+          </a:ln>
+        </p:spPr>
+        <p:style>
+          <a:lnRef idx="1">
+            <a:schemeClr val="accent1"/>
+          </a:lnRef>
+          <a:fillRef idx="3">
+            <a:schemeClr val="accent1"/>
+          </a:fillRef>
+          <a:effectRef idx="2">
+            <a:schemeClr val="accent1"/>
+          </a:effectRef>
+          <a:fontRef idx="minor">
+            <a:schemeClr val="lt1"/>
+          </a:fontRef>
+        </p:style>
+        <p:txBody>
+          <a:bodyPr rtlCol="0" anchor="ctr"/>
+          <a:lstStyle/>
+          <a:p>
+            <a:pPr algn="ctr"/>
+          </a:p>
+        </p:txBody>
+      </p:sp>
+      <p:sp>
+        <p:nvSpPr>
+          <p:cNvPr id="5" name="TextBox 4"/>
+          <p:cNvSpPr txBox="1"/>
+          <p:nvPr/>
+        </p:nvSpPr>
+        <p:spPr>
+          <a:xfrm>
+            <a:off x="11155680" y="6446520"/>
+            <a:ext cx="731520" cy="320040"/>
+          </a:xfrm>
+          <a:prstGeom prst="rect">
+            <a:avLst/>
+          </a:prstGeom>
+          <a:noFill/>
+        </p:spPr>
+        <p:txBody>
+          <a:bodyPr wrap="square">
+            <a:spAutoFit/>
+          </a:bodyPr>
+          <a:lstStyle/>
+          <a:p>
+            <a:pPr algn="r">
+              <a:defRPr sz="1100" b="0">
+                <a:solidFill>
+                  <a:srgbClr val="666666"/>
+                </a:solidFill>
+                <a:latin typeface="Calibri"/>
+              </a:defRPr>
+            </a:pPr>
+            <a:r>
+              <a:t>2</a:t>
+            </a:r>
+          </a:p>
+        </p:txBody>
+      </p:sp>
+      <p:sp>
+        <p:nvSpPr>
+          <p:cNvPr id="6" name="TextBox 5"/>
+          <p:cNvSpPr txBox="1"/>
+          <p:nvPr/>
+        </p:nvSpPr>
+        <p:spPr>
+          <a:xfrm>
+            <a:off x="731520" y="1188720"/>
+            <a:ext cx="10698480" cy="5029200"/>
+          </a:xfrm>
+          <a:prstGeom prst="rect">
+            <a:avLst/>
+          </a:prstGeom>
+          <a:noFill/>
+        </p:spPr>
+        <p:txBody>
+          <a:bodyPr wrap="square">
+            <a:spAutoFit/>
+          </a:bodyPr>
+          <a:lstStyle/>
+          <a:p>
+            <a:pPr algn="l">
+              <a:defRPr sz="1900" b="0">
+                <a:solidFill>
+                  <a:srgbClr val="2D2D2D"/>
+                </a:solidFill>
+                <a:latin typeface="Calibri"/>
+              </a:defRPr>
+            </a:pPr>
+          </a:p>
+          <a:p>
+            <a:pPr algn="l">
+              <a:spcBef>
+                <a:spcPts val="400"/>
+              </a:spcBef>
+              <a:defRPr sz="2100" b="1">
+                <a:solidFill>
+                  <a:srgbClr val="1A478A"/>
+                </a:solidFill>
+                <a:latin typeface="Calibri"/>
+              </a:defRPr>
+            </a:pPr>
+            <a:r>
+              <a:t>Актуальность</a:t>
+            </a:r>
+          </a:p>
+          <a:p>
+            <a:pPr algn="l">
+              <a:spcBef>
+                <a:spcPts val="800"/>
+              </a:spcBef>
+              <a:defRPr sz="1800" b="0">
+                <a:solidFill>
+                  <a:srgbClr val="2D2D2D"/>
+                </a:solidFill>
+                <a:latin typeface="Calibri"/>
+              </a:defRPr>
+            </a:pPr>
+            <a:r>
+              <a:t>- БСС (беспроводные сенсорные сети) — основа технологий IoT, более 29 млрд устройств к 2027 г.</a:t>
+            </a:r>
           </a:p>
           <a:p>
             <a:pPr algn="l">
               <a:spcBef>
                 <a:spcPts val="600"/>
               </a:spcBef>
-              <a:defRPr sz="2000" b="1">
-                <a:solidFill>
-                  <a:srgbClr val="4EC9B0"/>
+              <a:defRPr sz="1800" b="0">
+                <a:solidFill>
+                  <a:srgbClr val="2D2D2D"/>
                 </a:solidFill>
                 <a:latin typeface="Calibri"/>
               </a:defRPr>
             </a:pPr>
             <a:r>
-              <a:t>Актуальность:</a:t>
+              <a:t>- Ограниченные ресурсы узлов: энергия батареи, малая вычислительная мощность, небольшой объём памяти</a:t>
             </a:r>
           </a:p>
           <a:p>
@@ -3950,15 +4378,15 @@
               <a:spcBef>
                 <a:spcPts val="600"/>
               </a:spcBef>
-              <a:defRPr sz="2000" b="0">
-                <a:solidFill>
-                  <a:srgbClr val="E8E8E8"/>
+              <a:defRPr sz="1800" b="0">
+                <a:solidFill>
+                  <a:srgbClr val="2D2D2D"/>
                 </a:solidFill>
                 <a:latin typeface="Calibri"/>
               </a:defRPr>
             </a:pPr>
             <a:r>
-              <a:t>• БСС — одна из ключевых технологий IoT (&gt;29 млрд устройств к 2027 г.)</a:t>
+              <a:t>- Новые применения (видеонаблюдение, промышленный мониторинг) требуют учёта качества обслуживания (QoS)</a:t>
             </a:r>
           </a:p>
           <a:p>
@@ -3966,144 +4394,60 @@
               <a:spcBef>
                 <a:spcPts val="600"/>
               </a:spcBef>
-              <a:defRPr sz="2000" b="0">
-                <a:solidFill>
-                  <a:srgbClr val="E8E8E8"/>
+              <a:defRPr sz="1800" b="0">
+                <a:solidFill>
+                  <a:srgbClr val="2D2D2D"/>
                 </a:solidFill>
                 <a:latin typeface="Calibri"/>
               </a:defRPr>
             </a:pPr>
             <a:r>
-              <a:t>• Ресурсные ограничения узлов: энергия, память, вычислительная мощность</a:t>
+              <a:t>- Растущие киберугрозы, нацеленные именно на протоколы маршрутизации</a:t>
             </a:r>
           </a:p>
           <a:p>
             <a:pPr algn="l">
               <a:spcBef>
-                <a:spcPts val="600"/>
+                <a:spcPts val="1200"/>
               </a:spcBef>
-              <a:defRPr sz="2000" b="0">
-                <a:solidFill>
-                  <a:srgbClr val="E8E8E8"/>
+              <a:defRPr sz="1000" b="0">
+                <a:solidFill>
+                  <a:srgbClr val="2D2D2D"/>
                 </a:solidFill>
                 <a:latin typeface="Calibri"/>
               </a:defRPr>
             </a:pPr>
-            <a:r>
-              <a:t>• Новые требования: мультимедийный трафик (видеонаблюдение) → QoS</a:t>
-            </a:r>
           </a:p>
           <a:p>
             <a:pPr algn="l">
               <a:spcBef>
-                <a:spcPts val="600"/>
+                <a:spcPts val="400"/>
               </a:spcBef>
-              <a:defRPr sz="2000" b="0">
-                <a:solidFill>
-                  <a:srgbClr val="E8E8E8"/>
+              <a:defRPr sz="2100" b="1">
+                <a:solidFill>
+                  <a:srgbClr val="1A478A"/>
                 </a:solidFill>
                 <a:latin typeface="Calibri"/>
               </a:defRPr>
             </a:pPr>
             <a:r>
-              <a:t>• Рост киберугроз, нацеленных на протоколы маршрутизации</a:t>
+              <a:t>Цель работы</a:t>
             </a:r>
           </a:p>
           <a:p>
             <a:pPr algn="l">
               <a:spcBef>
-                <a:spcPts val="600"/>
+                <a:spcPts val="800"/>
               </a:spcBef>
-              <a:defRPr sz="2000" b="0">
-                <a:solidFill>
-                  <a:srgbClr val="E8E8E8"/>
+              <a:defRPr sz="1800" b="0">
+                <a:solidFill>
+                  <a:srgbClr val="2D2D2D"/>
                 </a:solidFill>
                 <a:latin typeface="Calibri"/>
               </a:defRPr>
             </a:pPr>
-          </a:p>
-          <a:p>
-            <a:pPr algn="l">
-              <a:spcBef>
-                <a:spcPts val="600"/>
-              </a:spcBef>
-              <a:defRPr sz="2000" b="1">
-                <a:solidFill>
-                  <a:srgbClr val="4EC9B0"/>
-                </a:solidFill>
-                <a:latin typeface="Calibri"/>
-              </a:defRPr>
-            </a:pPr>
-            <a:r>
-              <a:t>Цель:</a:t>
-            </a:r>
-          </a:p>
-          <a:p>
-            <a:pPr algn="l">
-              <a:spcBef>
-                <a:spcPts val="600"/>
-              </a:spcBef>
-              <a:defRPr sz="2000" b="0">
-                <a:solidFill>
-                  <a:srgbClr val="E8E8E8"/>
-                </a:solidFill>
-                <a:latin typeface="Calibri"/>
-              </a:defRPr>
-            </a:pPr>
-            <a:r>
-              <a:t>Исследование современных протоколов динамической маршрутизации для БСС</a:t>
-            </a:r>
-          </a:p>
-          <a:p>
-            <a:pPr algn="l">
-              <a:spcBef>
-                <a:spcPts val="600"/>
-              </a:spcBef>
-              <a:defRPr sz="2000" b="0">
-                <a:solidFill>
-                  <a:srgbClr val="E8E8E8"/>
-                </a:solidFill>
-                <a:latin typeface="Calibri"/>
-              </a:defRPr>
-            </a:pPr>
-            <a:r>
-              <a:t>с точки зрения обеспечения киберустойчивости</a:t>
-            </a:r>
-          </a:p>
-        </p:txBody>
-      </p:sp>
-      <p:sp>
-        <p:nvSpPr>
-          <p:cNvPr id="5" name="TextBox 4"/>
-          <p:cNvSpPr txBox="1"/>
-          <p:nvPr/>
-        </p:nvSpPr>
-        <p:spPr>
-          <a:xfrm>
-            <a:off x="11430000" y="6400800"/>
-            <a:ext cx="640080" cy="365760"/>
-          </a:xfrm>
-          <a:prstGeom prst="rect">
-            <a:avLst/>
-          </a:prstGeom>
-          <a:noFill/>
-        </p:spPr>
-        <p:txBody>
-          <a:bodyPr wrap="none">
-            <a:spAutoFit/>
-          </a:bodyPr>
-          <a:lstStyle/>
-          <a:p>
-            <a:pPr algn="r">
-              <a:defRPr sz="1200">
-                <a:solidFill>
-                  <a:srgbClr val="8888AA"/>
-                </a:solidFill>
-                <a:latin typeface="Calibri"/>
-              </a:defRPr>
-            </a:pPr>
-            <a:r>
-              <a:t>2</a:t>
+            <a:r>
+              <a:t>Исследование современных протоколов динамической маршрутизации для БСС с точки зрения обеспечения киберустойчивости, анализ подходов к многокритериальной маршрутизации и обнаружению вторжений.</a:t>
             </a:r>
           </a:p>
         </p:txBody>
@@ -4119,14 +4463,6 @@
 <file path=ppt/slides/slide3.xml><?xml version="1.0" encoding="utf-8"?>
 <p:sld xmlns:a="http://schemas.openxmlformats.org/drawingml/2006/main" xmlns:p="http://schemas.openxmlformats.org/presentationml/2006/main" xmlns:r="http://schemas.openxmlformats.org/officeDocument/2006/relationships">
   <p:cSld>
-    <p:bg>
-      <p:bgPr>
-        <a:solidFill>
-          <a:srgbClr val="1B2A4A"/>
-        </a:solidFill>
-        <a:effectLst/>
-      </p:bgPr>
-    </p:bg>
     <p:spTree>
       <p:nvGrpSpPr>
         <p:cNvPr id="1" name=""/>
@@ -4136,56 +4472,20 @@
       <p:grpSpPr/>
       <p:sp>
         <p:nvSpPr>
-          <p:cNvPr id="2" name="TextBox 1"/>
-          <p:cNvSpPr txBox="1"/>
-          <p:nvPr/>
-        </p:nvSpPr>
-        <p:spPr>
-          <a:xfrm>
-            <a:off x="731520" y="365760"/>
-            <a:ext cx="10698480" cy="640080"/>
+          <p:cNvPr id="2" name="Rectangle 1"/>
+          <p:cNvSpPr/>
+          <p:nvPr/>
+        </p:nvSpPr>
+        <p:spPr>
+          <a:xfrm>
+            <a:off x="0" y="0"/>
+            <a:ext cx="12191695" cy="76200"/>
           </a:xfrm>
           <a:prstGeom prst="rect">
             <a:avLst/>
           </a:prstGeom>
-          <a:noFill/>
-        </p:spPr>
-        <p:txBody>
-          <a:bodyPr wrap="square">
-            <a:spAutoFit/>
-          </a:bodyPr>
-          <a:lstStyle/>
-          <a:p>
-            <a:pPr algn="l">
-              <a:defRPr sz="3200" b="1">
-                <a:solidFill>
-                  <a:srgbClr val="FFFFFF"/>
-                </a:solidFill>
-                <a:latin typeface="Calibri"/>
-              </a:defRPr>
-            </a:pPr>
-            <a:r>
-              <a:t>Задачи исследования</a:t>
-            </a:r>
-          </a:p>
-        </p:txBody>
-      </p:sp>
-      <p:sp>
-        <p:nvSpPr>
-          <p:cNvPr id="3" name="Rectangle 2"/>
-          <p:cNvSpPr/>
-          <p:nvPr/>
-        </p:nvSpPr>
-        <p:spPr>
-          <a:xfrm>
-            <a:off x="731520" y="1005840"/>
-            <a:ext cx="1828800" cy="50800"/>
-          </a:xfrm>
-          <a:prstGeom prst="rect">
-            <a:avLst/>
-          </a:prstGeom>
           <a:solidFill>
-            <a:srgbClr val="4EC9B0"/>
+            <a:srgbClr val="1A478A"/>
           </a:solidFill>
           <a:ln>
             <a:noFill/>
@@ -4215,14 +4515,14 @@
       </p:sp>
       <p:sp>
         <p:nvSpPr>
-          <p:cNvPr id="4" name="TextBox 3"/>
+          <p:cNvPr id="3" name="TextBox 2"/>
           <p:cNvSpPr txBox="1"/>
           <p:nvPr/>
         </p:nvSpPr>
         <p:spPr>
           <a:xfrm>
-            <a:off x="731520" y="1371600"/>
-            <a:ext cx="10698480" cy="5029200"/>
+            <a:off x="731520" y="274320"/>
+            <a:ext cx="10698480" cy="731520"/>
           </a:xfrm>
           <a:prstGeom prst="rect">
             <a:avLst/>
@@ -4236,109 +4536,59 @@
           <a:lstStyle/>
           <a:p>
             <a:pPr algn="l">
-              <a:defRPr sz="2000" b="0">
-                <a:solidFill>
-                  <a:srgbClr val="E8E8E8"/>
+              <a:defRPr sz="2800" b="1">
+                <a:solidFill>
+                  <a:srgbClr val="1A478A"/>
                 </a:solidFill>
                 <a:latin typeface="Calibri"/>
               </a:defRPr>
             </a:pPr>
-          </a:p>
-          <a:p>
-            <a:pPr algn="l">
-              <a:spcBef>
-                <a:spcPts val="1200"/>
-              </a:spcBef>
-              <a:defRPr sz="1900" b="0">
-                <a:solidFill>
-                  <a:srgbClr val="E8E8E8"/>
-                </a:solidFill>
-                <a:latin typeface="Calibri"/>
-              </a:defRPr>
-            </a:pPr>
-            <a:r>
-              <a:t>1. Исследовать роль динамической маршрутизации в БСС</a:t>
-            </a:r>
-            <a:br/>
-            <a:r>
-              <a:t>   и специфику реализации в условиях ресурсных ограничений</a:t>
-            </a:r>
-          </a:p>
-          <a:p>
-            <a:pPr algn="l">
-              <a:spcBef>
-                <a:spcPts val="1200"/>
-              </a:spcBef>
-              <a:defRPr sz="1900" b="0">
-                <a:solidFill>
-                  <a:srgbClr val="E8E8E8"/>
-                </a:solidFill>
-                <a:latin typeface="Calibri"/>
-              </a:defRPr>
-            </a:pPr>
-            <a:r>
-              <a:t>2. Проанализировать проблемы безопасности и киберустойчивости:</a:t>
-            </a:r>
-            <a:br/>
-            <a:r>
-              <a:t>   энергетический дефицит, типы трафика, перегрузка узлов</a:t>
-            </a:r>
-          </a:p>
-          <a:p>
-            <a:pPr algn="l">
-              <a:spcBef>
-                <a:spcPts val="1200"/>
-              </a:spcBef>
-              <a:defRPr sz="1900" b="0">
-                <a:solidFill>
-                  <a:srgbClr val="E8E8E8"/>
-                </a:solidFill>
-                <a:latin typeface="Calibri"/>
-              </a:defRPr>
-            </a:pPr>
-            <a:r>
-              <a:t>3. Рассмотреть подходы к многокритериальной маршрутизации</a:t>
-            </a:r>
-            <a:br/>
-            <a:r>
-              <a:t>   (свёртка критериев, эволюционные алгоритмы, машинное обучение)</a:t>
-            </a:r>
-          </a:p>
-          <a:p>
-            <a:pPr algn="l">
-              <a:spcBef>
-                <a:spcPts val="1200"/>
-              </a:spcBef>
-              <a:defRPr sz="1900" b="0">
-                <a:solidFill>
-                  <a:srgbClr val="E8E8E8"/>
-                </a:solidFill>
-                <a:latin typeface="Calibri"/>
-              </a:defRPr>
-            </a:pPr>
-            <a:r>
-              <a:t>4. Исследовать адаптацию IDS/IPS для сенсорных сетей</a:t>
-            </a:r>
-          </a:p>
-          <a:p>
-            <a:pPr algn="l">
-              <a:spcBef>
-                <a:spcPts val="1200"/>
-              </a:spcBef>
-              <a:defRPr sz="1900" b="0">
-                <a:solidFill>
-                  <a:srgbClr val="E8E8E8"/>
-                </a:solidFill>
-                <a:latin typeface="Calibri"/>
-              </a:defRPr>
-            </a:pPr>
-            <a:r>
-              <a:t>5. Провести сравнительный анализ существующих протоколов</a:t>
-            </a:r>
-            <a:br/>
-            <a:r>
-              <a:t>   маршрутизации с точки зрения киберустойчивости</a:t>
-            </a:r>
+            <a:r>
+              <a:t>Задачи исследования</a:t>
+            </a:r>
+          </a:p>
+        </p:txBody>
+      </p:sp>
+      <p:sp>
+        <p:nvSpPr>
+          <p:cNvPr id="4" name="Rectangle 3"/>
+          <p:cNvSpPr/>
+          <p:nvPr/>
+        </p:nvSpPr>
+        <p:spPr>
+          <a:xfrm>
+            <a:off x="731520" y="6446520"/>
+            <a:ext cx="10698480" cy="12700"/>
+          </a:xfrm>
+          <a:prstGeom prst="rect">
+            <a:avLst/>
+          </a:prstGeom>
+          <a:solidFill>
+            <a:srgbClr val="CCCCCC"/>
+          </a:solidFill>
+          <a:ln>
+            <a:noFill/>
+          </a:ln>
+        </p:spPr>
+        <p:style>
+          <a:lnRef idx="1">
+            <a:schemeClr val="accent1"/>
+          </a:lnRef>
+          <a:fillRef idx="3">
+            <a:schemeClr val="accent1"/>
+          </a:fillRef>
+          <a:effectRef idx="2">
+            <a:schemeClr val="accent1"/>
+          </a:effectRef>
+          <a:fontRef idx="minor">
+            <a:schemeClr val="lt1"/>
+          </a:fontRef>
+        </p:style>
+        <p:txBody>
+          <a:bodyPr rtlCol="0" anchor="ctr"/>
+          <a:lstStyle/>
+          <a:p>
+            <a:pPr algn="ctr"/>
           </a:p>
         </p:txBody>
       </p:sp>
@@ -4350,8 +4600,8 @@
         </p:nvSpPr>
         <p:spPr>
           <a:xfrm>
-            <a:off x="11430000" y="6400800"/>
-            <a:ext cx="640080" cy="365760"/>
+            <a:off x="11155680" y="6446520"/>
+            <a:ext cx="731520" cy="320040"/>
           </a:xfrm>
           <a:prstGeom prst="rect">
             <a:avLst/>
@@ -4359,21 +4609,461 @@
           <a:noFill/>
         </p:spPr>
         <p:txBody>
-          <a:bodyPr wrap="none">
+          <a:bodyPr wrap="square">
             <a:spAutoFit/>
           </a:bodyPr>
           <a:lstStyle/>
           <a:p>
             <a:pPr algn="r">
-              <a:defRPr sz="1200">
-                <a:solidFill>
-                  <a:srgbClr val="8888AA"/>
+              <a:defRPr sz="1100" b="0">
+                <a:solidFill>
+                  <a:srgbClr val="666666"/>
                 </a:solidFill>
                 <a:latin typeface="Calibri"/>
               </a:defRPr>
             </a:pPr>
             <a:r>
               <a:t>3</a:t>
+            </a:r>
+          </a:p>
+        </p:txBody>
+      </p:sp>
+      <p:sp>
+        <p:nvSpPr>
+          <p:cNvPr id="6" name="Oval 5"/>
+          <p:cNvSpPr/>
+          <p:nvPr/>
+        </p:nvSpPr>
+        <p:spPr>
+          <a:xfrm>
+            <a:off x="731520" y="1280160"/>
+            <a:ext cx="411480" cy="411480"/>
+          </a:xfrm>
+          <a:prstGeom prst="ellipse">
+            <a:avLst/>
+          </a:prstGeom>
+          <a:solidFill>
+            <a:srgbClr val="1A478A"/>
+          </a:solidFill>
+          <a:ln>
+            <a:noFill/>
+          </a:ln>
+        </p:spPr>
+        <p:style>
+          <a:lnRef idx="1">
+            <a:schemeClr val="accent1"/>
+          </a:lnRef>
+          <a:fillRef idx="3">
+            <a:schemeClr val="accent1"/>
+          </a:fillRef>
+          <a:effectRef idx="2">
+            <a:schemeClr val="accent1"/>
+          </a:effectRef>
+          <a:fontRef idx="minor">
+            <a:schemeClr val="lt1"/>
+          </a:fontRef>
+        </p:style>
+        <p:txBody>
+          <a:bodyPr rtlCol="0" anchor="ctr"/>
+          <a:lstStyle/>
+          <a:p>
+            <a:pPr algn="ctr">
+              <a:defRPr sz="1600" b="1">
+                <a:solidFill>
+                  <a:srgbClr val="FFFFFF"/>
+                </a:solidFill>
+              </a:defRPr>
+            </a:pPr>
+            <a:r>
+              <a:t>1</a:t>
+            </a:r>
+          </a:p>
+        </p:txBody>
+      </p:sp>
+      <p:sp>
+        <p:nvSpPr>
+          <p:cNvPr id="7" name="TextBox 6"/>
+          <p:cNvSpPr txBox="1"/>
+          <p:nvPr/>
+        </p:nvSpPr>
+        <p:spPr>
+          <a:xfrm>
+            <a:off x="1371600" y="1298448"/>
+            <a:ext cx="9601200" cy="457200"/>
+          </a:xfrm>
+          <a:prstGeom prst="rect">
+            <a:avLst/>
+          </a:prstGeom>
+          <a:noFill/>
+        </p:spPr>
+        <p:txBody>
+          <a:bodyPr wrap="square">
+            <a:spAutoFit/>
+          </a:bodyPr>
+          <a:lstStyle/>
+          <a:p>
+            <a:pPr algn="l">
+              <a:defRPr sz="1800" b="0">
+                <a:solidFill>
+                  <a:srgbClr val="2D2D2D"/>
+                </a:solidFill>
+                <a:latin typeface="Calibri"/>
+              </a:defRPr>
+            </a:pPr>
+            <a:r>
+              <a:t>Исследовать роль динамической маршрутизации в БСС и специфику реализации в условиях ресурсных ограничений</a:t>
+            </a:r>
+          </a:p>
+        </p:txBody>
+      </p:sp>
+      <p:sp>
+        <p:nvSpPr>
+          <p:cNvPr id="8" name="Oval 7"/>
+          <p:cNvSpPr/>
+          <p:nvPr/>
+        </p:nvSpPr>
+        <p:spPr>
+          <a:xfrm>
+            <a:off x="731520" y="2286000"/>
+            <a:ext cx="411480" cy="411480"/>
+          </a:xfrm>
+          <a:prstGeom prst="ellipse">
+            <a:avLst/>
+          </a:prstGeom>
+          <a:solidFill>
+            <a:srgbClr val="1A478A"/>
+          </a:solidFill>
+          <a:ln>
+            <a:noFill/>
+          </a:ln>
+        </p:spPr>
+        <p:style>
+          <a:lnRef idx="1">
+            <a:schemeClr val="accent1"/>
+          </a:lnRef>
+          <a:fillRef idx="3">
+            <a:schemeClr val="accent1"/>
+          </a:fillRef>
+          <a:effectRef idx="2">
+            <a:schemeClr val="accent1"/>
+          </a:effectRef>
+          <a:fontRef idx="minor">
+            <a:schemeClr val="lt1"/>
+          </a:fontRef>
+        </p:style>
+        <p:txBody>
+          <a:bodyPr rtlCol="0" anchor="ctr"/>
+          <a:lstStyle/>
+          <a:p>
+            <a:pPr algn="ctr">
+              <a:defRPr sz="1600" b="1">
+                <a:solidFill>
+                  <a:srgbClr val="FFFFFF"/>
+                </a:solidFill>
+              </a:defRPr>
+            </a:pPr>
+            <a:r>
+              <a:t>2</a:t>
+            </a:r>
+          </a:p>
+        </p:txBody>
+      </p:sp>
+      <p:sp>
+        <p:nvSpPr>
+          <p:cNvPr id="9" name="TextBox 8"/>
+          <p:cNvSpPr txBox="1"/>
+          <p:nvPr/>
+        </p:nvSpPr>
+        <p:spPr>
+          <a:xfrm>
+            <a:off x="1371600" y="2304288"/>
+            <a:ext cx="9601200" cy="457200"/>
+          </a:xfrm>
+          <a:prstGeom prst="rect">
+            <a:avLst/>
+          </a:prstGeom>
+          <a:noFill/>
+        </p:spPr>
+        <p:txBody>
+          <a:bodyPr wrap="square">
+            <a:spAutoFit/>
+          </a:bodyPr>
+          <a:lstStyle/>
+          <a:p>
+            <a:pPr algn="l">
+              <a:defRPr sz="1800" b="0">
+                <a:solidFill>
+                  <a:srgbClr val="2D2D2D"/>
+                </a:solidFill>
+                <a:latin typeface="Calibri"/>
+              </a:defRPr>
+            </a:pPr>
+            <a:r>
+              <a:t>Проанализировать проблемы безопасности и киберустойчивости: энергодефицит, типы трафика, перегрузка узлов</a:t>
+            </a:r>
+          </a:p>
+        </p:txBody>
+      </p:sp>
+      <p:sp>
+        <p:nvSpPr>
+          <p:cNvPr id="10" name="Oval 9"/>
+          <p:cNvSpPr/>
+          <p:nvPr/>
+        </p:nvSpPr>
+        <p:spPr>
+          <a:xfrm>
+            <a:off x="731520" y="3291840"/>
+            <a:ext cx="411480" cy="411480"/>
+          </a:xfrm>
+          <a:prstGeom prst="ellipse">
+            <a:avLst/>
+          </a:prstGeom>
+          <a:solidFill>
+            <a:srgbClr val="1A478A"/>
+          </a:solidFill>
+          <a:ln>
+            <a:noFill/>
+          </a:ln>
+        </p:spPr>
+        <p:style>
+          <a:lnRef idx="1">
+            <a:schemeClr val="accent1"/>
+          </a:lnRef>
+          <a:fillRef idx="3">
+            <a:schemeClr val="accent1"/>
+          </a:fillRef>
+          <a:effectRef idx="2">
+            <a:schemeClr val="accent1"/>
+          </a:effectRef>
+          <a:fontRef idx="minor">
+            <a:schemeClr val="lt1"/>
+          </a:fontRef>
+        </p:style>
+        <p:txBody>
+          <a:bodyPr rtlCol="0" anchor="ctr"/>
+          <a:lstStyle/>
+          <a:p>
+            <a:pPr algn="ctr">
+              <a:defRPr sz="1600" b="1">
+                <a:solidFill>
+                  <a:srgbClr val="FFFFFF"/>
+                </a:solidFill>
+              </a:defRPr>
+            </a:pPr>
+            <a:r>
+              <a:t>3</a:t>
+            </a:r>
+          </a:p>
+        </p:txBody>
+      </p:sp>
+      <p:sp>
+        <p:nvSpPr>
+          <p:cNvPr id="11" name="TextBox 10"/>
+          <p:cNvSpPr txBox="1"/>
+          <p:nvPr/>
+        </p:nvSpPr>
+        <p:spPr>
+          <a:xfrm>
+            <a:off x="1371600" y="3310128"/>
+            <a:ext cx="9601200" cy="457200"/>
+          </a:xfrm>
+          <a:prstGeom prst="rect">
+            <a:avLst/>
+          </a:prstGeom>
+          <a:noFill/>
+        </p:spPr>
+        <p:txBody>
+          <a:bodyPr wrap="square">
+            <a:spAutoFit/>
+          </a:bodyPr>
+          <a:lstStyle/>
+          <a:p>
+            <a:pPr algn="l">
+              <a:defRPr sz="1800" b="0">
+                <a:solidFill>
+                  <a:srgbClr val="2D2D2D"/>
+                </a:solidFill>
+                <a:latin typeface="Calibri"/>
+              </a:defRPr>
+            </a:pPr>
+            <a:r>
+              <a:t>Рассмотреть подходы к многокритериальной маршрутизации (свёртка критериев, эволюционные алгоритмы, машинное обучение)</a:t>
+            </a:r>
+          </a:p>
+        </p:txBody>
+      </p:sp>
+      <p:sp>
+        <p:nvSpPr>
+          <p:cNvPr id="12" name="Oval 11"/>
+          <p:cNvSpPr/>
+          <p:nvPr/>
+        </p:nvSpPr>
+        <p:spPr>
+          <a:xfrm>
+            <a:off x="731520" y="4297680"/>
+            <a:ext cx="411480" cy="411480"/>
+          </a:xfrm>
+          <a:prstGeom prst="ellipse">
+            <a:avLst/>
+          </a:prstGeom>
+          <a:solidFill>
+            <a:srgbClr val="1A478A"/>
+          </a:solidFill>
+          <a:ln>
+            <a:noFill/>
+          </a:ln>
+        </p:spPr>
+        <p:style>
+          <a:lnRef idx="1">
+            <a:schemeClr val="accent1"/>
+          </a:lnRef>
+          <a:fillRef idx="3">
+            <a:schemeClr val="accent1"/>
+          </a:fillRef>
+          <a:effectRef idx="2">
+            <a:schemeClr val="accent1"/>
+          </a:effectRef>
+          <a:fontRef idx="minor">
+            <a:schemeClr val="lt1"/>
+          </a:fontRef>
+        </p:style>
+        <p:txBody>
+          <a:bodyPr rtlCol="0" anchor="ctr"/>
+          <a:lstStyle/>
+          <a:p>
+            <a:pPr algn="ctr">
+              <a:defRPr sz="1600" b="1">
+                <a:solidFill>
+                  <a:srgbClr val="FFFFFF"/>
+                </a:solidFill>
+              </a:defRPr>
+            </a:pPr>
+            <a:r>
+              <a:t>4</a:t>
+            </a:r>
+          </a:p>
+        </p:txBody>
+      </p:sp>
+      <p:sp>
+        <p:nvSpPr>
+          <p:cNvPr id="13" name="TextBox 12"/>
+          <p:cNvSpPr txBox="1"/>
+          <p:nvPr/>
+        </p:nvSpPr>
+        <p:spPr>
+          <a:xfrm>
+            <a:off x="1371600" y="4315968"/>
+            <a:ext cx="9601200" cy="457200"/>
+          </a:xfrm>
+          <a:prstGeom prst="rect">
+            <a:avLst/>
+          </a:prstGeom>
+          <a:noFill/>
+        </p:spPr>
+        <p:txBody>
+          <a:bodyPr wrap="square">
+            <a:spAutoFit/>
+          </a:bodyPr>
+          <a:lstStyle/>
+          <a:p>
+            <a:pPr algn="l">
+              <a:defRPr sz="1800" b="0">
+                <a:solidFill>
+                  <a:srgbClr val="2D2D2D"/>
+                </a:solidFill>
+                <a:latin typeface="Calibri"/>
+              </a:defRPr>
+            </a:pPr>
+            <a:r>
+              <a:t>Исследовать адаптацию систем обнаружения вторжений (IDS) для сенсорных сетей</a:t>
+            </a:r>
+          </a:p>
+        </p:txBody>
+      </p:sp>
+      <p:sp>
+        <p:nvSpPr>
+          <p:cNvPr id="14" name="Oval 13"/>
+          <p:cNvSpPr/>
+          <p:nvPr/>
+        </p:nvSpPr>
+        <p:spPr>
+          <a:xfrm>
+            <a:off x="731520" y="5303520"/>
+            <a:ext cx="411480" cy="411480"/>
+          </a:xfrm>
+          <a:prstGeom prst="ellipse">
+            <a:avLst/>
+          </a:prstGeom>
+          <a:solidFill>
+            <a:srgbClr val="1A478A"/>
+          </a:solidFill>
+          <a:ln>
+            <a:noFill/>
+          </a:ln>
+        </p:spPr>
+        <p:style>
+          <a:lnRef idx="1">
+            <a:schemeClr val="accent1"/>
+          </a:lnRef>
+          <a:fillRef idx="3">
+            <a:schemeClr val="accent1"/>
+          </a:fillRef>
+          <a:effectRef idx="2">
+            <a:schemeClr val="accent1"/>
+          </a:effectRef>
+          <a:fontRef idx="minor">
+            <a:schemeClr val="lt1"/>
+          </a:fontRef>
+        </p:style>
+        <p:txBody>
+          <a:bodyPr rtlCol="0" anchor="ctr"/>
+          <a:lstStyle/>
+          <a:p>
+            <a:pPr algn="ctr">
+              <a:defRPr sz="1600" b="1">
+                <a:solidFill>
+                  <a:srgbClr val="FFFFFF"/>
+                </a:solidFill>
+              </a:defRPr>
+            </a:pPr>
+            <a:r>
+              <a:t>5</a:t>
+            </a:r>
+          </a:p>
+        </p:txBody>
+      </p:sp>
+      <p:sp>
+        <p:nvSpPr>
+          <p:cNvPr id="15" name="TextBox 14"/>
+          <p:cNvSpPr txBox="1"/>
+          <p:nvPr/>
+        </p:nvSpPr>
+        <p:spPr>
+          <a:xfrm>
+            <a:off x="1371600" y="5321808"/>
+            <a:ext cx="9601200" cy="457200"/>
+          </a:xfrm>
+          <a:prstGeom prst="rect">
+            <a:avLst/>
+          </a:prstGeom>
+          <a:noFill/>
+        </p:spPr>
+        <p:txBody>
+          <a:bodyPr wrap="square">
+            <a:spAutoFit/>
+          </a:bodyPr>
+          <a:lstStyle/>
+          <a:p>
+            <a:pPr algn="l">
+              <a:defRPr sz="1800" b="0">
+                <a:solidFill>
+                  <a:srgbClr val="2D2D2D"/>
+                </a:solidFill>
+                <a:latin typeface="Calibri"/>
+              </a:defRPr>
+            </a:pPr>
+            <a:r>
+              <a:t>Провести сравнительный анализ существующих протоколов маршрутизации БСС</a:t>
             </a:r>
           </a:p>
         </p:txBody>
@@ -4389,14 +5079,6 @@
 <file path=ppt/slides/slide4.xml><?xml version="1.0" encoding="utf-8"?>
 <p:sld xmlns:a="http://schemas.openxmlformats.org/drawingml/2006/main" xmlns:p="http://schemas.openxmlformats.org/presentationml/2006/main" xmlns:r="http://schemas.openxmlformats.org/officeDocument/2006/relationships">
   <p:cSld>
-    <p:bg>
-      <p:bgPr>
-        <a:solidFill>
-          <a:srgbClr val="1B2A4A"/>
-        </a:solidFill>
-        <a:effectLst/>
-      </p:bgPr>
-    </p:bg>
     <p:spTree>
       <p:nvGrpSpPr>
         <p:cNvPr id="1" name=""/>
@@ -4406,56 +5088,20 @@
       <p:grpSpPr/>
       <p:sp>
         <p:nvSpPr>
-          <p:cNvPr id="2" name="TextBox 1"/>
-          <p:cNvSpPr txBox="1"/>
-          <p:nvPr/>
-        </p:nvSpPr>
-        <p:spPr>
-          <a:xfrm>
-            <a:off x="731520" y="365760"/>
-            <a:ext cx="10698480" cy="640080"/>
+          <p:cNvPr id="2" name="Rectangle 1"/>
+          <p:cNvSpPr/>
+          <p:nvPr/>
+        </p:nvSpPr>
+        <p:spPr>
+          <a:xfrm>
+            <a:off x="0" y="0"/>
+            <a:ext cx="12191695" cy="76200"/>
           </a:xfrm>
           <a:prstGeom prst="rect">
             <a:avLst/>
           </a:prstGeom>
-          <a:noFill/>
-        </p:spPr>
-        <p:txBody>
-          <a:bodyPr wrap="square">
-            <a:spAutoFit/>
-          </a:bodyPr>
-          <a:lstStyle/>
-          <a:p>
-            <a:pPr algn="l">
-              <a:defRPr sz="3200" b="1">
-                <a:solidFill>
-                  <a:srgbClr val="FFFFFF"/>
-                </a:solidFill>
-                <a:latin typeface="Calibri"/>
-              </a:defRPr>
-            </a:pPr>
-            <a:r>
-              <a:t>Архитектура БСС и энергетические ограничения</a:t>
-            </a:r>
-          </a:p>
-        </p:txBody>
-      </p:sp>
-      <p:sp>
-        <p:nvSpPr>
-          <p:cNvPr id="3" name="Rectangle 2"/>
-          <p:cNvSpPr/>
-          <p:nvPr/>
-        </p:nvSpPr>
-        <p:spPr>
-          <a:xfrm>
-            <a:off x="731520" y="1005840"/>
-            <a:ext cx="1828800" cy="50800"/>
-          </a:xfrm>
-          <a:prstGeom prst="rect">
-            <a:avLst/>
-          </a:prstGeom>
           <a:solidFill>
-            <a:srgbClr val="4EC9B0"/>
+            <a:srgbClr val="1A478A"/>
           </a:solidFill>
           <a:ln>
             <a:noFill/>
@@ -4485,14 +5131,14 @@
       </p:sp>
       <p:sp>
         <p:nvSpPr>
-          <p:cNvPr id="4" name="TextBox 3"/>
+          <p:cNvPr id="3" name="TextBox 2"/>
           <p:cNvSpPr txBox="1"/>
           <p:nvPr/>
         </p:nvSpPr>
         <p:spPr>
           <a:xfrm>
-            <a:off x="731520" y="1371600"/>
-            <a:ext cx="5303520" cy="5029200"/>
+            <a:off x="731520" y="274320"/>
+            <a:ext cx="10698480" cy="731520"/>
           </a:xfrm>
           <a:prstGeom prst="rect">
             <a:avLst/>
@@ -4506,167 +5152,383 @@
           <a:lstStyle/>
           <a:p>
             <a:pPr algn="l">
-              <a:defRPr sz="1800" b="0">
-                <a:solidFill>
-                  <a:srgbClr val="E8E8E8"/>
+              <a:defRPr sz="2800" b="1">
+                <a:solidFill>
+                  <a:srgbClr val="1A478A"/>
                 </a:solidFill>
                 <a:latin typeface="Calibri"/>
               </a:defRPr>
             </a:pPr>
+            <a:r>
+              <a:t>Архитектура БСС и энергоограничения</a:t>
+            </a:r>
+          </a:p>
+        </p:txBody>
+      </p:sp>
+      <p:sp>
+        <p:nvSpPr>
+          <p:cNvPr id="4" name="Rectangle 3"/>
+          <p:cNvSpPr/>
+          <p:nvPr/>
+        </p:nvSpPr>
+        <p:spPr>
+          <a:xfrm>
+            <a:off x="731520" y="6446520"/>
+            <a:ext cx="10698480" cy="12700"/>
+          </a:xfrm>
+          <a:prstGeom prst="rect">
+            <a:avLst/>
+          </a:prstGeom>
+          <a:solidFill>
+            <a:srgbClr val="CCCCCC"/>
+          </a:solidFill>
+          <a:ln>
+            <a:noFill/>
+          </a:ln>
+        </p:spPr>
+        <p:style>
+          <a:lnRef idx="1">
+            <a:schemeClr val="accent1"/>
+          </a:lnRef>
+          <a:fillRef idx="3">
+            <a:schemeClr val="accent1"/>
+          </a:fillRef>
+          <a:effectRef idx="2">
+            <a:schemeClr val="accent1"/>
+          </a:effectRef>
+          <a:fontRef idx="minor">
+            <a:schemeClr val="lt1"/>
+          </a:fontRef>
+        </p:style>
+        <p:txBody>
+          <a:bodyPr rtlCol="0" anchor="ctr"/>
+          <a:lstStyle/>
+          <a:p>
+            <a:pPr algn="ctr"/>
+          </a:p>
+        </p:txBody>
+      </p:sp>
+      <p:sp>
+        <p:nvSpPr>
+          <p:cNvPr id="5" name="TextBox 4"/>
+          <p:cNvSpPr txBox="1"/>
+          <p:nvPr/>
+        </p:nvSpPr>
+        <p:spPr>
+          <a:xfrm>
+            <a:off x="11155680" y="6446520"/>
+            <a:ext cx="731520" cy="320040"/>
+          </a:xfrm>
+          <a:prstGeom prst="rect">
+            <a:avLst/>
+          </a:prstGeom>
+          <a:noFill/>
+        </p:spPr>
+        <p:txBody>
+          <a:bodyPr wrap="square">
+            <a:spAutoFit/>
+          </a:bodyPr>
+          <a:lstStyle/>
+          <a:p>
+            <a:pPr algn="r">
+              <a:defRPr sz="1100" b="0">
+                <a:solidFill>
+                  <a:srgbClr val="666666"/>
+                </a:solidFill>
+                <a:latin typeface="Calibri"/>
+              </a:defRPr>
+            </a:pPr>
+            <a:r>
+              <a:t>4</a:t>
+            </a:r>
+          </a:p>
+        </p:txBody>
+      </p:sp>
+      <p:sp>
+        <p:nvSpPr>
+          <p:cNvPr id="6" name="TextBox 5"/>
+          <p:cNvSpPr txBox="1"/>
+          <p:nvPr/>
+        </p:nvSpPr>
+        <p:spPr>
+          <a:xfrm>
+            <a:off x="731520" y="1188720"/>
+            <a:ext cx="5029200" cy="5029200"/>
+          </a:xfrm>
+          <a:prstGeom prst="rect">
+            <a:avLst/>
+          </a:prstGeom>
+          <a:noFill/>
+        </p:spPr>
+        <p:txBody>
+          <a:bodyPr wrap="square">
+            <a:spAutoFit/>
+          </a:bodyPr>
+          <a:lstStyle/>
+          <a:p>
+            <a:pPr algn="l">
+              <a:defRPr sz="1700" b="0">
+                <a:solidFill>
+                  <a:srgbClr val="2D2D2D"/>
+                </a:solidFill>
+                <a:latin typeface="Calibri"/>
+              </a:defRPr>
+            </a:pPr>
+          </a:p>
+          <a:p>
+            <a:pPr algn="l">
+              <a:spcBef>
+                <a:spcPts val="200"/>
+              </a:spcBef>
+              <a:defRPr sz="1800" b="1">
+                <a:solidFill>
+                  <a:srgbClr val="1A478A"/>
+                </a:solidFill>
+                <a:latin typeface="Calibri"/>
+              </a:defRPr>
+            </a:pPr>
+            <a:r>
+              <a:t>Сенсорный узел:</a:t>
+            </a:r>
+          </a:p>
+          <a:p>
+            <a:pPr algn="l">
+              <a:spcBef>
+                <a:spcPts val="400"/>
+              </a:spcBef>
+              <a:defRPr sz="1600" b="0">
+                <a:solidFill>
+                  <a:srgbClr val="2D2D2D"/>
+                </a:solidFill>
+                <a:latin typeface="Calibri"/>
+              </a:defRPr>
+            </a:pPr>
+            <a:r>
+              <a:t>  Датчики + МК + радио + батарея</a:t>
+            </a:r>
+          </a:p>
+          <a:p>
+            <a:pPr algn="l">
+              <a:spcBef>
+                <a:spcPts val="400"/>
+              </a:spcBef>
+              <a:defRPr sz="800" b="0">
+                <a:solidFill>
+                  <a:srgbClr val="2D2D2D"/>
+                </a:solidFill>
+                <a:latin typeface="Calibri"/>
+              </a:defRPr>
+            </a:pPr>
+          </a:p>
+          <a:p>
+            <a:pPr algn="l">
+              <a:spcBef>
+                <a:spcPts val="400"/>
+              </a:spcBef>
+              <a:defRPr sz="1600" b="1">
+                <a:solidFill>
+                  <a:srgbClr val="C0392B"/>
+                </a:solidFill>
+                <a:latin typeface="Calibri"/>
+              </a:defRPr>
+            </a:pPr>
+            <a:r>
+              <a:t>Передача 1 бита = 1000-3000x</a:t>
+            </a:r>
+          </a:p>
+          <a:p>
+            <a:pPr algn="l">
+              <a:spcBef>
+                <a:spcPts val="200"/>
+              </a:spcBef>
+              <a:defRPr sz="1600" b="0">
+                <a:solidFill>
+                  <a:srgbClr val="2D2D2D"/>
+                </a:solidFill>
+                <a:latin typeface="Calibri"/>
+              </a:defRPr>
+            </a:pPr>
+            <a:r>
+              <a:t>энергии по сравнению с 1 операцией CPU</a:t>
+            </a:r>
+          </a:p>
+          <a:p>
+            <a:pPr algn="l">
+              <a:spcBef>
+                <a:spcPts val="800"/>
+              </a:spcBef>
+              <a:defRPr sz="800" b="0">
+                <a:solidFill>
+                  <a:srgbClr val="2D2D2D"/>
+                </a:solidFill>
+                <a:latin typeface="Calibri"/>
+              </a:defRPr>
+            </a:pPr>
+          </a:p>
+          <a:p>
+            <a:pPr algn="l">
+              <a:spcBef>
+                <a:spcPts val="400"/>
+              </a:spcBef>
+              <a:defRPr sz="1800" b="1">
+                <a:solidFill>
+                  <a:srgbClr val="1A478A"/>
+                </a:solidFill>
+                <a:latin typeface="Calibri"/>
+              </a:defRPr>
+            </a:pPr>
+            <a:r>
+              <a:t>Время жизни маршрута:</a:t>
+            </a:r>
           </a:p>
           <a:p>
             <a:pPr algn="l">
               <a:spcBef>
                 <a:spcPts val="600"/>
               </a:spcBef>
-              <a:defRPr sz="1800" b="1">
-                <a:solidFill>
-                  <a:srgbClr val="4EC9B0"/>
+              <a:defRPr sz="1700" b="1">
+                <a:solidFill>
+                  <a:srgbClr val="167F72"/>
                 </a:solidFill>
                 <a:latin typeface="Calibri"/>
               </a:defRPr>
             </a:pPr>
             <a:r>
-              <a:t>Компоненты сенсорного узла:</a:t>
+              <a:t>T = min(Ei / ri),  i = 1..k</a:t>
             </a:r>
           </a:p>
           <a:p>
             <a:pPr algn="l">
               <a:spcBef>
-                <a:spcPts val="600"/>
+                <a:spcPts val="400"/>
               </a:spcBef>
-              <a:defRPr sz="1800" b="0">
-                <a:solidFill>
-                  <a:srgbClr val="E8E8E8"/>
+              <a:defRPr sz="1500" b="0">
+                <a:solidFill>
+                  <a:srgbClr val="666666"/>
                 </a:solidFill>
                 <a:latin typeface="Calibri"/>
               </a:defRPr>
             </a:pPr>
             <a:r>
-              <a:t>• Датчики (температура, влажность, видео)</a:t>
+              <a:t>Ei - остаточная энергия узла</a:t>
             </a:r>
           </a:p>
           <a:p>
             <a:pPr algn="l">
               <a:spcBef>
-                <a:spcPts val="600"/>
+                <a:spcPts val="200"/>
               </a:spcBef>
-              <a:defRPr sz="1800" b="0">
-                <a:solidFill>
-                  <a:srgbClr val="E8E8E8"/>
+              <a:defRPr sz="1500" b="0">
+                <a:solidFill>
+                  <a:srgbClr val="666666"/>
                 </a:solidFill>
                 <a:latin typeface="Calibri"/>
               </a:defRPr>
             </a:pPr>
             <a:r>
-              <a:t>• Микроконтроллер (4–100 МГц)</a:t>
+              <a:t>ri - скорость расхода (зависит от трафика)</a:t>
             </a:r>
           </a:p>
           <a:p>
             <a:pPr algn="l">
               <a:spcBef>
-                <a:spcPts val="600"/>
+                <a:spcPts val="800"/>
               </a:spcBef>
-              <a:defRPr sz="1800" b="0">
-                <a:solidFill>
-                  <a:srgbClr val="E8E8E8"/>
+              <a:defRPr sz="800" b="0">
+                <a:solidFill>
+                  <a:srgbClr val="2D2D2D"/>
                 </a:solidFill>
                 <a:latin typeface="Calibri"/>
               </a:defRPr>
             </a:pPr>
-            <a:r>
-              <a:t>• Приёмопередатчик</a:t>
-            </a:r>
           </a:p>
           <a:p>
             <a:pPr algn="l">
               <a:spcBef>
-                <a:spcPts val="600"/>
+                <a:spcPts val="400"/>
               </a:spcBef>
-              <a:defRPr sz="1800" b="0">
-                <a:solidFill>
-                  <a:srgbClr val="E8E8E8"/>
+              <a:defRPr sz="1600" b="0">
+                <a:solidFill>
+                  <a:srgbClr val="2D2D2D"/>
                 </a:solidFill>
                 <a:latin typeface="Calibri"/>
               </a:defRPr>
             </a:pPr>
             <a:r>
-              <a:t>• Батарея (1000–3000 мА·ч)</a:t>
+              <a:t>Видеопоток потребляет в 50-100 раз</a:t>
             </a:r>
           </a:p>
           <a:p>
             <a:pPr algn="l">
               <a:spcBef>
-                <a:spcPts val="600"/>
+                <a:spcPts val="200"/>
               </a:spcBef>
-              <a:defRPr sz="1800" b="0">
-                <a:solidFill>
-                  <a:srgbClr val="E8E8E8"/>
+              <a:defRPr sz="1600" b="0">
+                <a:solidFill>
+                  <a:srgbClr val="2D2D2D"/>
                 </a:solidFill>
                 <a:latin typeface="Calibri"/>
               </a:defRPr>
             </a:pPr>
-          </a:p>
-          <a:p>
-            <a:pPr algn="l">
-              <a:spcBef>
-                <a:spcPts val="600"/>
-              </a:spcBef>
-              <a:defRPr sz="1800" b="1">
-                <a:solidFill>
-                  <a:srgbClr val="4EC9B0"/>
-                </a:solidFill>
-                <a:latin typeface="Calibri"/>
-              </a:defRPr>
-            </a:pPr>
-            <a:r>
-              <a:t>Ключевой факт:</a:t>
-            </a:r>
-          </a:p>
-          <a:p>
-            <a:pPr algn="l">
-              <a:spcBef>
-                <a:spcPts val="600"/>
-              </a:spcBef>
-              <a:defRPr sz="1800" b="0">
-                <a:solidFill>
-                  <a:srgbClr val="E8E8E8"/>
-                </a:solidFill>
-                <a:latin typeface="Calibri"/>
-              </a:defRPr>
-            </a:pPr>
-            <a:r>
-              <a:t>Передача 1 бита ≈ 1000–3000×</a:t>
-            </a:r>
-          </a:p>
-          <a:p>
-            <a:pPr algn="l">
-              <a:spcBef>
-                <a:spcPts val="600"/>
-              </a:spcBef>
-              <a:defRPr sz="1800" b="0">
-                <a:solidFill>
-                  <a:srgbClr val="E8E8E8"/>
-                </a:solidFill>
-                <a:latin typeface="Calibri"/>
-              </a:defRPr>
-            </a:pPr>
-            <a:r>
-              <a:t>энергии по сравнению с 1 операцией CPU</a:t>
-            </a:r>
-          </a:p>
-        </p:txBody>
-      </p:sp>
-      <p:sp>
-        <p:nvSpPr>
-          <p:cNvPr id="5" name="TextBox 4"/>
+            <a:r>
+              <a:t>больше энергии, чем телеметрия</a:t>
+            </a:r>
+          </a:p>
+        </p:txBody>
+      </p:sp>
+      <p:sp>
+        <p:nvSpPr>
+          <p:cNvPr id="7" name="Rounded Rectangle 6"/>
+          <p:cNvSpPr/>
+          <p:nvPr/>
+        </p:nvSpPr>
+        <p:spPr>
+          <a:xfrm>
+            <a:off x="6217920" y="1188720"/>
+            <a:ext cx="5303520" cy="5029200"/>
+          </a:xfrm>
+          <a:prstGeom prst="roundRect">
+            <a:avLst/>
+          </a:prstGeom>
+          <a:solidFill>
+            <a:srgbClr val="EBF5FB"/>
+          </a:solidFill>
+          <a:ln w="12700">
+            <a:noFill/>
+          </a:ln>
+        </p:spPr>
+        <p:style>
+          <a:lnRef idx="1">
+            <a:schemeClr val="accent1"/>
+          </a:lnRef>
+          <a:fillRef idx="3">
+            <a:schemeClr val="accent1"/>
+          </a:fillRef>
+          <a:effectRef idx="2">
+            <a:schemeClr val="accent1"/>
+          </a:effectRef>
+          <a:fontRef idx="minor">
+            <a:schemeClr val="lt1"/>
+          </a:fontRef>
+        </p:style>
+        <p:txBody>
+          <a:bodyPr rtlCol="0" anchor="ctr"/>
+          <a:lstStyle/>
+          <a:p>
+            <a:pPr algn="ctr"/>
+          </a:p>
+        </p:txBody>
+      </p:sp>
+      <p:sp>
+        <p:nvSpPr>
+          <p:cNvPr id="8" name="TextBox 7"/>
           <p:cNvSpPr txBox="1"/>
           <p:nvPr/>
         </p:nvSpPr>
         <p:spPr>
           <a:xfrm>
-            <a:off x="6400800" y="1371600"/>
-            <a:ext cx="5303520" cy="5029200"/>
+            <a:off x="6400800" y="1280160"/>
+            <a:ext cx="4937760" cy="365760"/>
           </a:xfrm>
           <a:prstGeom prst="rect">
             <a:avLst/>
@@ -4679,165 +5541,1464 @@
           </a:bodyPr>
           <a:lstStyle/>
           <a:p>
-            <a:pPr algn="l">
-              <a:defRPr sz="1800" b="0">
-                <a:solidFill>
-                  <a:srgbClr val="E8E8E8"/>
+            <a:pPr algn="ctr">
+              <a:defRPr sz="1400" b="1">
+                <a:solidFill>
+                  <a:srgbClr val="1A478A"/>
                 </a:solidFill>
                 <a:latin typeface="Calibri"/>
               </a:defRPr>
             </a:pPr>
-          </a:p>
-          <a:p>
-            <a:pPr algn="l">
-              <a:spcBef>
-                <a:spcPts val="600"/>
-              </a:spcBef>
-              <a:defRPr sz="1800" b="1">
-                <a:solidFill>
-                  <a:srgbClr val="4EC9B0"/>
-                </a:solidFill>
-                <a:latin typeface="Calibri"/>
-              </a:defRPr>
-            </a:pPr>
-            <a:r>
-              <a:t>Время жизни маршрута:</a:t>
-            </a:r>
-          </a:p>
-          <a:p>
-            <a:pPr algn="l">
-              <a:spcBef>
-                <a:spcPts val="600"/>
-              </a:spcBef>
-              <a:defRPr sz="1800" b="0">
-                <a:solidFill>
-                  <a:srgbClr val="FFD700"/>
-                </a:solidFill>
-                <a:latin typeface="Calibri"/>
-              </a:defRPr>
-            </a:pPr>
-            <a:r>
-              <a:t>T = min(Eᵢ / rᵢ), i = 1..k</a:t>
-            </a:r>
-          </a:p>
-          <a:p>
-            <a:pPr algn="l">
-              <a:spcBef>
-                <a:spcPts val="600"/>
-              </a:spcBef>
-              <a:defRPr sz="1800" b="0">
-                <a:solidFill>
-                  <a:srgbClr val="E8E8E8"/>
-                </a:solidFill>
-                <a:latin typeface="Calibri"/>
-              </a:defRPr>
-            </a:pPr>
-          </a:p>
-          <a:p>
-            <a:pPr algn="l">
-              <a:spcBef>
-                <a:spcPts val="600"/>
-              </a:spcBef>
-              <a:defRPr sz="1800" b="0">
-                <a:solidFill>
-                  <a:srgbClr val="E8E8E8"/>
-                </a:solidFill>
-                <a:latin typeface="Calibri"/>
-              </a:defRPr>
-            </a:pPr>
-            <a:r>
-              <a:t>где Eᵢ — остаточная энергия узла</a:t>
-            </a:r>
-          </a:p>
-          <a:p>
-            <a:pPr algn="l">
-              <a:spcBef>
-                <a:spcPts val="600"/>
-              </a:spcBef>
-              <a:defRPr sz="1800" b="0">
-                <a:solidFill>
-                  <a:srgbClr val="E8E8E8"/>
-                </a:solidFill>
-                <a:latin typeface="Calibri"/>
-              </a:defRPr>
-            </a:pPr>
-            <a:r>
-              <a:t>      rᵢ — скорость расхода (зависит от трафика)</a:t>
-            </a:r>
-          </a:p>
-          <a:p>
-            <a:pPr algn="l">
-              <a:spcBef>
-                <a:spcPts val="600"/>
-              </a:spcBef>
-              <a:defRPr sz="1800" b="0">
-                <a:solidFill>
-                  <a:srgbClr val="E8E8E8"/>
-                </a:solidFill>
-                <a:latin typeface="Calibri"/>
-              </a:defRPr>
-            </a:pPr>
-          </a:p>
-          <a:p>
-            <a:pPr algn="l">
-              <a:spcBef>
-                <a:spcPts val="600"/>
-              </a:spcBef>
-              <a:defRPr sz="1800" b="1">
-                <a:solidFill>
-                  <a:srgbClr val="4EC9B0"/>
-                </a:solidFill>
-                <a:latin typeface="Calibri"/>
-              </a:defRPr>
-            </a:pPr>
-            <a:r>
-              <a:t>Типы трафика:</a:t>
-            </a:r>
-          </a:p>
-          <a:p>
-            <a:pPr algn="l">
-              <a:spcBef>
-                <a:spcPts val="600"/>
-              </a:spcBef>
-              <a:defRPr sz="1800" b="0">
-                <a:solidFill>
-                  <a:srgbClr val="E8E8E8"/>
-                </a:solidFill>
-                <a:latin typeface="Calibri"/>
-              </a:defRPr>
-            </a:pPr>
-            <a:r>
-              <a:t>• Телеметрия → низкая нагрузка</a:t>
-            </a:r>
-          </a:p>
-          <a:p>
-            <a:pPr algn="l">
-              <a:spcBef>
-                <a:spcPts val="600"/>
-              </a:spcBef>
-              <a:defRPr sz="1800" b="0">
-                <a:solidFill>
-                  <a:srgbClr val="E8E8E8"/>
-                </a:solidFill>
-                <a:latin typeface="Calibri"/>
-              </a:defRPr>
-            </a:pPr>
-            <a:r>
-              <a:t>• Видеопоток → в 50–100× больше энергии</a:t>
-            </a:r>
-          </a:p>
-        </p:txBody>
-      </p:sp>
-      <p:sp>
-        <p:nvSpPr>
-          <p:cNvPr id="6" name="TextBox 5"/>
+            <a:r>
+              <a:t>Топология БСС (кластерная)</a:t>
+            </a:r>
+          </a:p>
+        </p:txBody>
+      </p:sp>
+      <p:sp>
+        <p:nvSpPr>
+          <p:cNvPr id="9" name="Oval 8"/>
+          <p:cNvSpPr/>
+          <p:nvPr/>
+        </p:nvSpPr>
+        <p:spPr>
+          <a:xfrm>
+            <a:off x="8503920" y="1828800"/>
+            <a:ext cx="548640" cy="548640"/>
+          </a:xfrm>
+          <a:prstGeom prst="ellipse">
+            <a:avLst/>
+          </a:prstGeom>
+          <a:solidFill>
+            <a:srgbClr val="C0392B"/>
+          </a:solidFill>
+          <a:ln w="12700">
+            <a:solidFill>
+              <a:srgbClr val="999999"/>
+            </a:solidFill>
+          </a:ln>
+        </p:spPr>
+        <p:style>
+          <a:lnRef idx="1">
+            <a:schemeClr val="accent1"/>
+          </a:lnRef>
+          <a:fillRef idx="3">
+            <a:schemeClr val="accent1"/>
+          </a:fillRef>
+          <a:effectRef idx="2">
+            <a:schemeClr val="accent1"/>
+          </a:effectRef>
+          <a:fontRef idx="minor">
+            <a:schemeClr val="lt1"/>
+          </a:fontRef>
+        </p:style>
+        <p:txBody>
+          <a:bodyPr rtlCol="0" anchor="ctr" wrap="none"/>
+          <a:lstStyle/>
+          <a:p>
+            <a:pPr algn="ctr">
+              <a:defRPr sz="1200" b="1">
+                <a:solidFill>
+                  <a:srgbClr val="FFFFFF"/>
+                </a:solidFill>
+              </a:defRPr>
+            </a:pPr>
+            <a:r>
+              <a:t>БС</a:t>
+            </a:r>
+          </a:p>
+        </p:txBody>
+      </p:sp>
+      <p:sp>
+        <p:nvSpPr>
+          <p:cNvPr id="10" name="Oval 9"/>
+          <p:cNvSpPr/>
+          <p:nvPr/>
+        </p:nvSpPr>
+        <p:spPr>
+          <a:xfrm>
+            <a:off x="6949440" y="3108960"/>
+            <a:ext cx="411480" cy="411480"/>
+          </a:xfrm>
+          <a:prstGeom prst="ellipse">
+            <a:avLst/>
+          </a:prstGeom>
+          <a:solidFill>
+            <a:srgbClr val="E67E22"/>
+          </a:solidFill>
+          <a:ln w="12700">
+            <a:solidFill>
+              <a:srgbClr val="999999"/>
+            </a:solidFill>
+          </a:ln>
+        </p:spPr>
+        <p:style>
+          <a:lnRef idx="1">
+            <a:schemeClr val="accent1"/>
+          </a:lnRef>
+          <a:fillRef idx="3">
+            <a:schemeClr val="accent1"/>
+          </a:fillRef>
+          <a:effectRef idx="2">
+            <a:schemeClr val="accent1"/>
+          </a:effectRef>
+          <a:fontRef idx="minor">
+            <a:schemeClr val="lt1"/>
+          </a:fontRef>
+        </p:style>
+        <p:txBody>
+          <a:bodyPr rtlCol="0" anchor="ctr" wrap="none"/>
+          <a:lstStyle/>
+          <a:p>
+            <a:pPr algn="ctr">
+              <a:defRPr sz="1000" b="1">
+                <a:solidFill>
+                  <a:srgbClr val="FFFFFF"/>
+                </a:solidFill>
+              </a:defRPr>
+            </a:pPr>
+            <a:r>
+              <a:t>КГ</a:t>
+            </a:r>
+          </a:p>
+        </p:txBody>
+      </p:sp>
+      <p:cxnSp>
+        <p:nvCxnSpPr>
+          <p:cNvPr id="11" name="Connector 10"/>
+          <p:cNvCxnSpPr/>
+          <p:nvPr/>
+        </p:nvCxnSpPr>
+        <p:spPr>
+          <a:xfrm flipV="1">
+            <a:off x="7150607" y="2331720"/>
+            <a:ext cx="1627633" cy="777240"/>
+          </a:xfrm>
+          <a:prstGeom prst="line">
+            <a:avLst/>
+          </a:prstGeom>
+          <a:ln w="19050">
+            <a:solidFill>
+              <a:srgbClr val="BBBBBB"/>
+            </a:solidFill>
+          </a:ln>
+        </p:spPr>
+        <p:style>
+          <a:lnRef idx="2">
+            <a:schemeClr val="accent1"/>
+          </a:lnRef>
+          <a:fillRef idx="0">
+            <a:schemeClr val="accent1"/>
+          </a:fillRef>
+          <a:effectRef idx="1">
+            <a:schemeClr val="accent1"/>
+          </a:effectRef>
+          <a:fontRef idx="minor">
+            <a:schemeClr val="tx1"/>
+          </a:fontRef>
+        </p:style>
+      </p:cxnSp>
+      <p:sp>
+        <p:nvSpPr>
+          <p:cNvPr id="12" name="Oval 11"/>
+          <p:cNvSpPr/>
+          <p:nvPr/>
+        </p:nvSpPr>
+        <p:spPr>
+          <a:xfrm>
+            <a:off x="8503920" y="3657600"/>
+            <a:ext cx="411480" cy="411480"/>
+          </a:xfrm>
+          <a:prstGeom prst="ellipse">
+            <a:avLst/>
+          </a:prstGeom>
+          <a:solidFill>
+            <a:srgbClr val="E67E22"/>
+          </a:solidFill>
+          <a:ln w="12700">
+            <a:solidFill>
+              <a:srgbClr val="999999"/>
+            </a:solidFill>
+          </a:ln>
+        </p:spPr>
+        <p:style>
+          <a:lnRef idx="1">
+            <a:schemeClr val="accent1"/>
+          </a:lnRef>
+          <a:fillRef idx="3">
+            <a:schemeClr val="accent1"/>
+          </a:fillRef>
+          <a:effectRef idx="2">
+            <a:schemeClr val="accent1"/>
+          </a:effectRef>
+          <a:fontRef idx="minor">
+            <a:schemeClr val="lt1"/>
+          </a:fontRef>
+        </p:style>
+        <p:txBody>
+          <a:bodyPr rtlCol="0" anchor="ctr" wrap="none"/>
+          <a:lstStyle/>
+          <a:p>
+            <a:pPr algn="ctr">
+              <a:defRPr sz="1000" b="1">
+                <a:solidFill>
+                  <a:srgbClr val="FFFFFF"/>
+                </a:solidFill>
+              </a:defRPr>
+            </a:pPr>
+            <a:r>
+              <a:t>КГ</a:t>
+            </a:r>
+          </a:p>
+        </p:txBody>
+      </p:sp>
+      <p:cxnSp>
+        <p:nvCxnSpPr>
+          <p:cNvPr id="13" name="Connector 12"/>
+          <p:cNvCxnSpPr/>
+          <p:nvPr/>
+        </p:nvCxnSpPr>
+        <p:spPr>
+          <a:xfrm flipV="1">
+            <a:off x="8705088" y="2331720"/>
+            <a:ext cx="73152" cy="1325880"/>
+          </a:xfrm>
+          <a:prstGeom prst="line">
+            <a:avLst/>
+          </a:prstGeom>
+          <a:ln w="19050">
+            <a:solidFill>
+              <a:srgbClr val="BBBBBB"/>
+            </a:solidFill>
+          </a:ln>
+        </p:spPr>
+        <p:style>
+          <a:lnRef idx="2">
+            <a:schemeClr val="accent1"/>
+          </a:lnRef>
+          <a:fillRef idx="0">
+            <a:schemeClr val="accent1"/>
+          </a:fillRef>
+          <a:effectRef idx="1">
+            <a:schemeClr val="accent1"/>
+          </a:effectRef>
+          <a:fontRef idx="minor">
+            <a:schemeClr val="tx1"/>
+          </a:fontRef>
+        </p:style>
+      </p:cxnSp>
+      <p:sp>
+        <p:nvSpPr>
+          <p:cNvPr id="14" name="Oval 13"/>
+          <p:cNvSpPr/>
+          <p:nvPr/>
+        </p:nvSpPr>
+        <p:spPr>
+          <a:xfrm>
+            <a:off x="10058400" y="2926080"/>
+            <a:ext cx="411480" cy="411480"/>
+          </a:xfrm>
+          <a:prstGeom prst="ellipse">
+            <a:avLst/>
+          </a:prstGeom>
+          <a:solidFill>
+            <a:srgbClr val="E67E22"/>
+          </a:solidFill>
+          <a:ln w="12700">
+            <a:solidFill>
+              <a:srgbClr val="999999"/>
+            </a:solidFill>
+          </a:ln>
+        </p:spPr>
+        <p:style>
+          <a:lnRef idx="1">
+            <a:schemeClr val="accent1"/>
+          </a:lnRef>
+          <a:fillRef idx="3">
+            <a:schemeClr val="accent1"/>
+          </a:fillRef>
+          <a:effectRef idx="2">
+            <a:schemeClr val="accent1"/>
+          </a:effectRef>
+          <a:fontRef idx="minor">
+            <a:schemeClr val="lt1"/>
+          </a:fontRef>
+        </p:style>
+        <p:txBody>
+          <a:bodyPr rtlCol="0" anchor="ctr" wrap="none"/>
+          <a:lstStyle/>
+          <a:p>
+            <a:pPr algn="ctr">
+              <a:defRPr sz="1000" b="1">
+                <a:solidFill>
+                  <a:srgbClr val="FFFFFF"/>
+                </a:solidFill>
+              </a:defRPr>
+            </a:pPr>
+            <a:r>
+              <a:t>КГ</a:t>
+            </a:r>
+          </a:p>
+        </p:txBody>
+      </p:sp>
+      <p:cxnSp>
+        <p:nvCxnSpPr>
+          <p:cNvPr id="15" name="Connector 14"/>
+          <p:cNvCxnSpPr/>
+          <p:nvPr/>
+        </p:nvCxnSpPr>
+        <p:spPr>
+          <a:xfrm flipH="1" flipV="1">
+            <a:off x="8778240" y="2331720"/>
+            <a:ext cx="1481328" cy="594360"/>
+          </a:xfrm>
+          <a:prstGeom prst="line">
+            <a:avLst/>
+          </a:prstGeom>
+          <a:ln w="19050">
+            <a:solidFill>
+              <a:srgbClr val="BBBBBB"/>
+            </a:solidFill>
+          </a:ln>
+        </p:spPr>
+        <p:style>
+          <a:lnRef idx="2">
+            <a:schemeClr val="accent1"/>
+          </a:lnRef>
+          <a:fillRef idx="0">
+            <a:schemeClr val="accent1"/>
+          </a:fillRef>
+          <a:effectRef idx="1">
+            <a:schemeClr val="accent1"/>
+          </a:effectRef>
+          <a:fontRef idx="minor">
+            <a:schemeClr val="tx1"/>
+          </a:fontRef>
+        </p:style>
+      </p:cxnSp>
+      <p:sp>
+        <p:nvSpPr>
+          <p:cNvPr id="16" name="Oval 15"/>
+          <p:cNvSpPr/>
+          <p:nvPr/>
+        </p:nvSpPr>
+        <p:spPr>
+          <a:xfrm>
+            <a:off x="6492240" y="3931920"/>
+            <a:ext cx="274320" cy="274320"/>
+          </a:xfrm>
+          <a:prstGeom prst="ellipse">
+            <a:avLst/>
+          </a:prstGeom>
+          <a:solidFill>
+            <a:srgbClr val="27AE60"/>
+          </a:solidFill>
+          <a:ln w="12700">
+            <a:solidFill>
+              <a:srgbClr val="999999"/>
+            </a:solidFill>
+          </a:ln>
+        </p:spPr>
+        <p:style>
+          <a:lnRef idx="1">
+            <a:schemeClr val="accent1"/>
+          </a:lnRef>
+          <a:fillRef idx="3">
+            <a:schemeClr val="accent1"/>
+          </a:fillRef>
+          <a:effectRef idx="2">
+            <a:schemeClr val="accent1"/>
+          </a:effectRef>
+          <a:fontRef idx="minor">
+            <a:schemeClr val="lt1"/>
+          </a:fontRef>
+        </p:style>
+        <p:txBody>
+          <a:bodyPr rtlCol="0" anchor="ctr" wrap="none"/>
+          <a:lstStyle/>
+          <a:p>
+            <a:pPr algn="ctr">
+              <a:defRPr sz="800" b="1">
+                <a:solidFill>
+                  <a:srgbClr val="FFFFFF"/>
+                </a:solidFill>
+              </a:defRPr>
+            </a:pPr>
+            <a:r>
+              <a:t>У</a:t>
+            </a:r>
+          </a:p>
+        </p:txBody>
+      </p:sp>
+      <p:cxnSp>
+        <p:nvCxnSpPr>
+          <p:cNvPr id="17" name="Connector 16"/>
+          <p:cNvCxnSpPr/>
+          <p:nvPr/>
+        </p:nvCxnSpPr>
+        <p:spPr>
+          <a:xfrm flipV="1">
+            <a:off x="6629400" y="3520440"/>
+            <a:ext cx="521207" cy="411480"/>
+          </a:xfrm>
+          <a:prstGeom prst="line">
+            <a:avLst/>
+          </a:prstGeom>
+          <a:ln w="19050">
+            <a:solidFill>
+              <a:srgbClr val="CCCCCC"/>
+            </a:solidFill>
+          </a:ln>
+        </p:spPr>
+        <p:style>
+          <a:lnRef idx="2">
+            <a:schemeClr val="accent1"/>
+          </a:lnRef>
+          <a:fillRef idx="0">
+            <a:schemeClr val="accent1"/>
+          </a:fillRef>
+          <a:effectRef idx="1">
+            <a:schemeClr val="accent1"/>
+          </a:effectRef>
+          <a:fontRef idx="minor">
+            <a:schemeClr val="tx1"/>
+          </a:fontRef>
+        </p:style>
+      </p:cxnSp>
+      <p:sp>
+        <p:nvSpPr>
+          <p:cNvPr id="18" name="Oval 17"/>
+          <p:cNvSpPr/>
+          <p:nvPr/>
+        </p:nvSpPr>
+        <p:spPr>
+          <a:xfrm>
+            <a:off x="7132320" y="4206240"/>
+            <a:ext cx="274320" cy="274320"/>
+          </a:xfrm>
+          <a:prstGeom prst="ellipse">
+            <a:avLst/>
+          </a:prstGeom>
+          <a:solidFill>
+            <a:srgbClr val="27AE60"/>
+          </a:solidFill>
+          <a:ln w="12700">
+            <a:solidFill>
+              <a:srgbClr val="999999"/>
+            </a:solidFill>
+          </a:ln>
+        </p:spPr>
+        <p:style>
+          <a:lnRef idx="1">
+            <a:schemeClr val="accent1"/>
+          </a:lnRef>
+          <a:fillRef idx="3">
+            <a:schemeClr val="accent1"/>
+          </a:fillRef>
+          <a:effectRef idx="2">
+            <a:schemeClr val="accent1"/>
+          </a:effectRef>
+          <a:fontRef idx="minor">
+            <a:schemeClr val="lt1"/>
+          </a:fontRef>
+        </p:style>
+        <p:txBody>
+          <a:bodyPr rtlCol="0" anchor="ctr" wrap="none"/>
+          <a:lstStyle/>
+          <a:p>
+            <a:pPr algn="ctr">
+              <a:defRPr sz="800" b="1">
+                <a:solidFill>
+                  <a:srgbClr val="FFFFFF"/>
+                </a:solidFill>
+              </a:defRPr>
+            </a:pPr>
+            <a:r>
+              <a:t>У</a:t>
+            </a:r>
+          </a:p>
+        </p:txBody>
+      </p:sp>
+      <p:cxnSp>
+        <p:nvCxnSpPr>
+          <p:cNvPr id="19" name="Connector 18"/>
+          <p:cNvCxnSpPr/>
+          <p:nvPr/>
+        </p:nvCxnSpPr>
+        <p:spPr>
+          <a:xfrm flipH="1" flipV="1">
+            <a:off x="7150607" y="3520440"/>
+            <a:ext cx="118873" cy="685800"/>
+          </a:xfrm>
+          <a:prstGeom prst="line">
+            <a:avLst/>
+          </a:prstGeom>
+          <a:ln w="19050">
+            <a:solidFill>
+              <a:srgbClr val="CCCCCC"/>
+            </a:solidFill>
+          </a:ln>
+        </p:spPr>
+        <p:style>
+          <a:lnRef idx="2">
+            <a:schemeClr val="accent1"/>
+          </a:lnRef>
+          <a:fillRef idx="0">
+            <a:schemeClr val="accent1"/>
+          </a:fillRef>
+          <a:effectRef idx="1">
+            <a:schemeClr val="accent1"/>
+          </a:effectRef>
+          <a:fontRef idx="minor">
+            <a:schemeClr val="tx1"/>
+          </a:fontRef>
+        </p:style>
+      </p:cxnSp>
+      <p:sp>
+        <p:nvSpPr>
+          <p:cNvPr id="20" name="Oval 19"/>
+          <p:cNvSpPr/>
+          <p:nvPr/>
+        </p:nvSpPr>
+        <p:spPr>
+          <a:xfrm>
+            <a:off x="6400800" y="4572000"/>
+            <a:ext cx="274320" cy="274320"/>
+          </a:xfrm>
+          <a:prstGeom prst="ellipse">
+            <a:avLst/>
+          </a:prstGeom>
+          <a:solidFill>
+            <a:srgbClr val="27AE60"/>
+          </a:solidFill>
+          <a:ln w="12700">
+            <a:solidFill>
+              <a:srgbClr val="999999"/>
+            </a:solidFill>
+          </a:ln>
+        </p:spPr>
+        <p:style>
+          <a:lnRef idx="1">
+            <a:schemeClr val="accent1"/>
+          </a:lnRef>
+          <a:fillRef idx="3">
+            <a:schemeClr val="accent1"/>
+          </a:fillRef>
+          <a:effectRef idx="2">
+            <a:schemeClr val="accent1"/>
+          </a:effectRef>
+          <a:fontRef idx="minor">
+            <a:schemeClr val="lt1"/>
+          </a:fontRef>
+        </p:style>
+        <p:txBody>
+          <a:bodyPr rtlCol="0" anchor="ctr" wrap="none"/>
+          <a:lstStyle/>
+          <a:p>
+            <a:pPr algn="ctr">
+              <a:defRPr sz="800" b="1">
+                <a:solidFill>
+                  <a:srgbClr val="FFFFFF"/>
+                </a:solidFill>
+              </a:defRPr>
+            </a:pPr>
+            <a:r>
+              <a:t>У</a:t>
+            </a:r>
+          </a:p>
+        </p:txBody>
+      </p:sp>
+      <p:cxnSp>
+        <p:nvCxnSpPr>
+          <p:cNvPr id="21" name="Connector 20"/>
+          <p:cNvCxnSpPr/>
+          <p:nvPr/>
+        </p:nvCxnSpPr>
+        <p:spPr>
+          <a:xfrm flipV="1">
+            <a:off x="6537960" y="3520440"/>
+            <a:ext cx="612647" cy="1051560"/>
+          </a:xfrm>
+          <a:prstGeom prst="line">
+            <a:avLst/>
+          </a:prstGeom>
+          <a:ln w="19050">
+            <a:solidFill>
+              <a:srgbClr val="CCCCCC"/>
+            </a:solidFill>
+          </a:ln>
+        </p:spPr>
+        <p:style>
+          <a:lnRef idx="2">
+            <a:schemeClr val="accent1"/>
+          </a:lnRef>
+          <a:fillRef idx="0">
+            <a:schemeClr val="accent1"/>
+          </a:fillRef>
+          <a:effectRef idx="1">
+            <a:schemeClr val="accent1"/>
+          </a:effectRef>
+          <a:fontRef idx="minor">
+            <a:schemeClr val="tx1"/>
+          </a:fontRef>
+        </p:style>
+      </p:cxnSp>
+      <p:sp>
+        <p:nvSpPr>
+          <p:cNvPr id="22" name="Oval 21"/>
+          <p:cNvSpPr/>
+          <p:nvPr/>
+        </p:nvSpPr>
+        <p:spPr>
+          <a:xfrm>
+            <a:off x="7498079" y="3840480"/>
+            <a:ext cx="274320" cy="274320"/>
+          </a:xfrm>
+          <a:prstGeom prst="ellipse">
+            <a:avLst/>
+          </a:prstGeom>
+          <a:solidFill>
+            <a:srgbClr val="27AE60"/>
+          </a:solidFill>
+          <a:ln w="12700">
+            <a:solidFill>
+              <a:srgbClr val="999999"/>
+            </a:solidFill>
+          </a:ln>
+        </p:spPr>
+        <p:style>
+          <a:lnRef idx="1">
+            <a:schemeClr val="accent1"/>
+          </a:lnRef>
+          <a:fillRef idx="3">
+            <a:schemeClr val="accent1"/>
+          </a:fillRef>
+          <a:effectRef idx="2">
+            <a:schemeClr val="accent1"/>
+          </a:effectRef>
+          <a:fontRef idx="minor">
+            <a:schemeClr val="lt1"/>
+          </a:fontRef>
+        </p:style>
+        <p:txBody>
+          <a:bodyPr rtlCol="0" anchor="ctr" wrap="none"/>
+          <a:lstStyle/>
+          <a:p>
+            <a:pPr algn="ctr">
+              <a:defRPr sz="800" b="1">
+                <a:solidFill>
+                  <a:srgbClr val="FFFFFF"/>
+                </a:solidFill>
+              </a:defRPr>
+            </a:pPr>
+            <a:r>
+              <a:t>У</a:t>
+            </a:r>
+          </a:p>
+        </p:txBody>
+      </p:sp>
+      <p:cxnSp>
+        <p:nvCxnSpPr>
+          <p:cNvPr id="23" name="Connector 22"/>
+          <p:cNvCxnSpPr/>
+          <p:nvPr/>
+        </p:nvCxnSpPr>
+        <p:spPr>
+          <a:xfrm flipH="1" flipV="1">
+            <a:off x="7150607" y="3520440"/>
+            <a:ext cx="484633" cy="320040"/>
+          </a:xfrm>
+          <a:prstGeom prst="line">
+            <a:avLst/>
+          </a:prstGeom>
+          <a:ln w="19050">
+            <a:solidFill>
+              <a:srgbClr val="CCCCCC"/>
+            </a:solidFill>
+          </a:ln>
+        </p:spPr>
+        <p:style>
+          <a:lnRef idx="2">
+            <a:schemeClr val="accent1"/>
+          </a:lnRef>
+          <a:fillRef idx="0">
+            <a:schemeClr val="accent1"/>
+          </a:fillRef>
+          <a:effectRef idx="1">
+            <a:schemeClr val="accent1"/>
+          </a:effectRef>
+          <a:fontRef idx="minor">
+            <a:schemeClr val="tx1"/>
+          </a:fontRef>
+        </p:style>
+      </p:cxnSp>
+      <p:sp>
+        <p:nvSpPr>
+          <p:cNvPr id="24" name="Oval 23"/>
+          <p:cNvSpPr/>
+          <p:nvPr/>
+        </p:nvSpPr>
+        <p:spPr>
+          <a:xfrm>
+            <a:off x="8046720" y="4572000"/>
+            <a:ext cx="274320" cy="274320"/>
+          </a:xfrm>
+          <a:prstGeom prst="ellipse">
+            <a:avLst/>
+          </a:prstGeom>
+          <a:solidFill>
+            <a:srgbClr val="27AE60"/>
+          </a:solidFill>
+          <a:ln w="12700">
+            <a:solidFill>
+              <a:srgbClr val="999999"/>
+            </a:solidFill>
+          </a:ln>
+        </p:spPr>
+        <p:style>
+          <a:lnRef idx="1">
+            <a:schemeClr val="accent1"/>
+          </a:lnRef>
+          <a:fillRef idx="3">
+            <a:schemeClr val="accent1"/>
+          </a:fillRef>
+          <a:effectRef idx="2">
+            <a:schemeClr val="accent1"/>
+          </a:effectRef>
+          <a:fontRef idx="minor">
+            <a:schemeClr val="lt1"/>
+          </a:fontRef>
+        </p:style>
+        <p:txBody>
+          <a:bodyPr rtlCol="0" anchor="ctr" wrap="none"/>
+          <a:lstStyle/>
+          <a:p>
+            <a:pPr algn="ctr">
+              <a:defRPr sz="800" b="1">
+                <a:solidFill>
+                  <a:srgbClr val="FFFFFF"/>
+                </a:solidFill>
+              </a:defRPr>
+            </a:pPr>
+            <a:r>
+              <a:t>У</a:t>
+            </a:r>
+          </a:p>
+        </p:txBody>
+      </p:sp>
+      <p:cxnSp>
+        <p:nvCxnSpPr>
+          <p:cNvPr id="25" name="Connector 24"/>
+          <p:cNvCxnSpPr/>
+          <p:nvPr/>
+        </p:nvCxnSpPr>
+        <p:spPr>
+          <a:xfrm flipV="1">
+            <a:off x="8183880" y="4069080"/>
+            <a:ext cx="521208" cy="502920"/>
+          </a:xfrm>
+          <a:prstGeom prst="line">
+            <a:avLst/>
+          </a:prstGeom>
+          <a:ln w="19050">
+            <a:solidFill>
+              <a:srgbClr val="CCCCCC"/>
+            </a:solidFill>
+          </a:ln>
+        </p:spPr>
+        <p:style>
+          <a:lnRef idx="2">
+            <a:schemeClr val="accent1"/>
+          </a:lnRef>
+          <a:fillRef idx="0">
+            <a:schemeClr val="accent1"/>
+          </a:fillRef>
+          <a:effectRef idx="1">
+            <a:schemeClr val="accent1"/>
+          </a:effectRef>
+          <a:fontRef idx="minor">
+            <a:schemeClr val="tx1"/>
+          </a:fontRef>
+        </p:style>
+      </p:cxnSp>
+      <p:sp>
+        <p:nvSpPr>
+          <p:cNvPr id="26" name="Oval 25"/>
+          <p:cNvSpPr/>
+          <p:nvPr/>
+        </p:nvSpPr>
+        <p:spPr>
+          <a:xfrm>
+            <a:off x="8686800" y="4754880"/>
+            <a:ext cx="274320" cy="274320"/>
+          </a:xfrm>
+          <a:prstGeom prst="ellipse">
+            <a:avLst/>
+          </a:prstGeom>
+          <a:solidFill>
+            <a:srgbClr val="27AE60"/>
+          </a:solidFill>
+          <a:ln w="12700">
+            <a:solidFill>
+              <a:srgbClr val="999999"/>
+            </a:solidFill>
+          </a:ln>
+        </p:spPr>
+        <p:style>
+          <a:lnRef idx="1">
+            <a:schemeClr val="accent1"/>
+          </a:lnRef>
+          <a:fillRef idx="3">
+            <a:schemeClr val="accent1"/>
+          </a:fillRef>
+          <a:effectRef idx="2">
+            <a:schemeClr val="accent1"/>
+          </a:effectRef>
+          <a:fontRef idx="minor">
+            <a:schemeClr val="lt1"/>
+          </a:fontRef>
+        </p:style>
+        <p:txBody>
+          <a:bodyPr rtlCol="0" anchor="ctr" wrap="none"/>
+          <a:lstStyle/>
+          <a:p>
+            <a:pPr algn="ctr">
+              <a:defRPr sz="800" b="1">
+                <a:solidFill>
+                  <a:srgbClr val="FFFFFF"/>
+                </a:solidFill>
+              </a:defRPr>
+            </a:pPr>
+            <a:r>
+              <a:t>У</a:t>
+            </a:r>
+          </a:p>
+        </p:txBody>
+      </p:sp>
+      <p:cxnSp>
+        <p:nvCxnSpPr>
+          <p:cNvPr id="27" name="Connector 26"/>
+          <p:cNvCxnSpPr/>
+          <p:nvPr/>
+        </p:nvCxnSpPr>
+        <p:spPr>
+          <a:xfrm flipH="1" flipV="1">
+            <a:off x="8705088" y="4069080"/>
+            <a:ext cx="118872" cy="685800"/>
+          </a:xfrm>
+          <a:prstGeom prst="line">
+            <a:avLst/>
+          </a:prstGeom>
+          <a:ln w="19050">
+            <a:solidFill>
+              <a:srgbClr val="CCCCCC"/>
+            </a:solidFill>
+          </a:ln>
+        </p:spPr>
+        <p:style>
+          <a:lnRef idx="2">
+            <a:schemeClr val="accent1"/>
+          </a:lnRef>
+          <a:fillRef idx="0">
+            <a:schemeClr val="accent1"/>
+          </a:fillRef>
+          <a:effectRef idx="1">
+            <a:schemeClr val="accent1"/>
+          </a:effectRef>
+          <a:fontRef idx="minor">
+            <a:schemeClr val="tx1"/>
+          </a:fontRef>
+        </p:style>
+      </p:cxnSp>
+      <p:sp>
+        <p:nvSpPr>
+          <p:cNvPr id="28" name="Oval 27"/>
+          <p:cNvSpPr/>
+          <p:nvPr/>
+        </p:nvSpPr>
+        <p:spPr>
+          <a:xfrm>
+            <a:off x="9144000" y="4389120"/>
+            <a:ext cx="274320" cy="274320"/>
+          </a:xfrm>
+          <a:prstGeom prst="ellipse">
+            <a:avLst/>
+          </a:prstGeom>
+          <a:solidFill>
+            <a:srgbClr val="27AE60"/>
+          </a:solidFill>
+          <a:ln w="12700">
+            <a:solidFill>
+              <a:srgbClr val="999999"/>
+            </a:solidFill>
+          </a:ln>
+        </p:spPr>
+        <p:style>
+          <a:lnRef idx="1">
+            <a:schemeClr val="accent1"/>
+          </a:lnRef>
+          <a:fillRef idx="3">
+            <a:schemeClr val="accent1"/>
+          </a:fillRef>
+          <a:effectRef idx="2">
+            <a:schemeClr val="accent1"/>
+          </a:effectRef>
+          <a:fontRef idx="minor">
+            <a:schemeClr val="lt1"/>
+          </a:fontRef>
+        </p:style>
+        <p:txBody>
+          <a:bodyPr rtlCol="0" anchor="ctr" wrap="none"/>
+          <a:lstStyle/>
+          <a:p>
+            <a:pPr algn="ctr">
+              <a:defRPr sz="800" b="1">
+                <a:solidFill>
+                  <a:srgbClr val="FFFFFF"/>
+                </a:solidFill>
+              </a:defRPr>
+            </a:pPr>
+            <a:r>
+              <a:t>У</a:t>
+            </a:r>
+          </a:p>
+        </p:txBody>
+      </p:sp>
+      <p:cxnSp>
+        <p:nvCxnSpPr>
+          <p:cNvPr id="29" name="Connector 28"/>
+          <p:cNvCxnSpPr/>
+          <p:nvPr/>
+        </p:nvCxnSpPr>
+        <p:spPr>
+          <a:xfrm flipH="1" flipV="1">
+            <a:off x="8705088" y="4069080"/>
+            <a:ext cx="576072" cy="320040"/>
+          </a:xfrm>
+          <a:prstGeom prst="line">
+            <a:avLst/>
+          </a:prstGeom>
+          <a:ln w="19050">
+            <a:solidFill>
+              <a:srgbClr val="CCCCCC"/>
+            </a:solidFill>
+          </a:ln>
+        </p:spPr>
+        <p:style>
+          <a:lnRef idx="2">
+            <a:schemeClr val="accent1"/>
+          </a:lnRef>
+          <a:fillRef idx="0">
+            <a:schemeClr val="accent1"/>
+          </a:fillRef>
+          <a:effectRef idx="1">
+            <a:schemeClr val="accent1"/>
+          </a:effectRef>
+          <a:fontRef idx="minor">
+            <a:schemeClr val="tx1"/>
+          </a:fontRef>
+        </p:style>
+      </p:cxnSp>
+      <p:sp>
+        <p:nvSpPr>
+          <p:cNvPr id="30" name="Oval 29"/>
+          <p:cNvSpPr/>
+          <p:nvPr/>
+        </p:nvSpPr>
+        <p:spPr>
+          <a:xfrm>
+            <a:off x="8229600" y="5029200"/>
+            <a:ext cx="274320" cy="274320"/>
+          </a:xfrm>
+          <a:prstGeom prst="ellipse">
+            <a:avLst/>
+          </a:prstGeom>
+          <a:solidFill>
+            <a:srgbClr val="27AE60"/>
+          </a:solidFill>
+          <a:ln w="12700">
+            <a:solidFill>
+              <a:srgbClr val="999999"/>
+            </a:solidFill>
+          </a:ln>
+        </p:spPr>
+        <p:style>
+          <a:lnRef idx="1">
+            <a:schemeClr val="accent1"/>
+          </a:lnRef>
+          <a:fillRef idx="3">
+            <a:schemeClr val="accent1"/>
+          </a:fillRef>
+          <a:effectRef idx="2">
+            <a:schemeClr val="accent1"/>
+          </a:effectRef>
+          <a:fontRef idx="minor">
+            <a:schemeClr val="lt1"/>
+          </a:fontRef>
+        </p:style>
+        <p:txBody>
+          <a:bodyPr rtlCol="0" anchor="ctr" wrap="none"/>
+          <a:lstStyle/>
+          <a:p>
+            <a:pPr algn="ctr">
+              <a:defRPr sz="800" b="1">
+                <a:solidFill>
+                  <a:srgbClr val="FFFFFF"/>
+                </a:solidFill>
+              </a:defRPr>
+            </a:pPr>
+            <a:r>
+              <a:t>У</a:t>
+            </a:r>
+          </a:p>
+        </p:txBody>
+      </p:sp>
+      <p:cxnSp>
+        <p:nvCxnSpPr>
+          <p:cNvPr id="31" name="Connector 30"/>
+          <p:cNvCxnSpPr/>
+          <p:nvPr/>
+        </p:nvCxnSpPr>
+        <p:spPr>
+          <a:xfrm flipV="1">
+            <a:off x="8366760" y="4069080"/>
+            <a:ext cx="338328" cy="960120"/>
+          </a:xfrm>
+          <a:prstGeom prst="line">
+            <a:avLst/>
+          </a:prstGeom>
+          <a:ln w="19050">
+            <a:solidFill>
+              <a:srgbClr val="CCCCCC"/>
+            </a:solidFill>
+          </a:ln>
+        </p:spPr>
+        <p:style>
+          <a:lnRef idx="2">
+            <a:schemeClr val="accent1"/>
+          </a:lnRef>
+          <a:fillRef idx="0">
+            <a:schemeClr val="accent1"/>
+          </a:fillRef>
+          <a:effectRef idx="1">
+            <a:schemeClr val="accent1"/>
+          </a:effectRef>
+          <a:fontRef idx="minor">
+            <a:schemeClr val="tx1"/>
+          </a:fontRef>
+        </p:style>
+      </p:cxnSp>
+      <p:sp>
+        <p:nvSpPr>
+          <p:cNvPr id="32" name="Oval 31"/>
+          <p:cNvSpPr/>
+          <p:nvPr/>
+        </p:nvSpPr>
+        <p:spPr>
+          <a:xfrm>
+            <a:off x="10424160" y="3657600"/>
+            <a:ext cx="274320" cy="274320"/>
+          </a:xfrm>
+          <a:prstGeom prst="ellipse">
+            <a:avLst/>
+          </a:prstGeom>
+          <a:solidFill>
+            <a:srgbClr val="27AE60"/>
+          </a:solidFill>
+          <a:ln w="12700">
+            <a:solidFill>
+              <a:srgbClr val="999999"/>
+            </a:solidFill>
+          </a:ln>
+        </p:spPr>
+        <p:style>
+          <a:lnRef idx="1">
+            <a:schemeClr val="accent1"/>
+          </a:lnRef>
+          <a:fillRef idx="3">
+            <a:schemeClr val="accent1"/>
+          </a:fillRef>
+          <a:effectRef idx="2">
+            <a:schemeClr val="accent1"/>
+          </a:effectRef>
+          <a:fontRef idx="minor">
+            <a:schemeClr val="lt1"/>
+          </a:fontRef>
+        </p:style>
+        <p:txBody>
+          <a:bodyPr rtlCol="0" anchor="ctr" wrap="none"/>
+          <a:lstStyle/>
+          <a:p>
+            <a:pPr algn="ctr">
+              <a:defRPr sz="800" b="1">
+                <a:solidFill>
+                  <a:srgbClr val="FFFFFF"/>
+                </a:solidFill>
+              </a:defRPr>
+            </a:pPr>
+            <a:r>
+              <a:t>У</a:t>
+            </a:r>
+          </a:p>
+        </p:txBody>
+      </p:sp>
+      <p:cxnSp>
+        <p:nvCxnSpPr>
+          <p:cNvPr id="33" name="Connector 32"/>
+          <p:cNvCxnSpPr/>
+          <p:nvPr/>
+        </p:nvCxnSpPr>
+        <p:spPr>
+          <a:xfrm flipH="1" flipV="1">
+            <a:off x="10259568" y="3337560"/>
+            <a:ext cx="301752" cy="320040"/>
+          </a:xfrm>
+          <a:prstGeom prst="line">
+            <a:avLst/>
+          </a:prstGeom>
+          <a:ln w="19050">
+            <a:solidFill>
+              <a:srgbClr val="CCCCCC"/>
+            </a:solidFill>
+          </a:ln>
+        </p:spPr>
+        <p:style>
+          <a:lnRef idx="2">
+            <a:schemeClr val="accent1"/>
+          </a:lnRef>
+          <a:fillRef idx="0">
+            <a:schemeClr val="accent1"/>
+          </a:fillRef>
+          <a:effectRef idx="1">
+            <a:schemeClr val="accent1"/>
+          </a:effectRef>
+          <a:fontRef idx="minor">
+            <a:schemeClr val="tx1"/>
+          </a:fontRef>
+        </p:style>
+      </p:cxnSp>
+      <p:sp>
+        <p:nvSpPr>
+          <p:cNvPr id="34" name="Oval 33"/>
+          <p:cNvSpPr/>
+          <p:nvPr/>
+        </p:nvSpPr>
+        <p:spPr>
+          <a:xfrm>
+            <a:off x="9692640" y="4023360"/>
+            <a:ext cx="274320" cy="274320"/>
+          </a:xfrm>
+          <a:prstGeom prst="ellipse">
+            <a:avLst/>
+          </a:prstGeom>
+          <a:solidFill>
+            <a:srgbClr val="27AE60"/>
+          </a:solidFill>
+          <a:ln w="12700">
+            <a:solidFill>
+              <a:srgbClr val="999999"/>
+            </a:solidFill>
+          </a:ln>
+        </p:spPr>
+        <p:style>
+          <a:lnRef idx="1">
+            <a:schemeClr val="accent1"/>
+          </a:lnRef>
+          <a:fillRef idx="3">
+            <a:schemeClr val="accent1"/>
+          </a:fillRef>
+          <a:effectRef idx="2">
+            <a:schemeClr val="accent1"/>
+          </a:effectRef>
+          <a:fontRef idx="minor">
+            <a:schemeClr val="lt1"/>
+          </a:fontRef>
+        </p:style>
+        <p:txBody>
+          <a:bodyPr rtlCol="0" anchor="ctr" wrap="none"/>
+          <a:lstStyle/>
+          <a:p>
+            <a:pPr algn="ctr">
+              <a:defRPr sz="800" b="1">
+                <a:solidFill>
+                  <a:srgbClr val="FFFFFF"/>
+                </a:solidFill>
+              </a:defRPr>
+            </a:pPr>
+            <a:r>
+              <a:t>У</a:t>
+            </a:r>
+          </a:p>
+        </p:txBody>
+      </p:sp>
+      <p:cxnSp>
+        <p:nvCxnSpPr>
+          <p:cNvPr id="35" name="Connector 34"/>
+          <p:cNvCxnSpPr/>
+          <p:nvPr/>
+        </p:nvCxnSpPr>
+        <p:spPr>
+          <a:xfrm flipV="1">
+            <a:off x="9829800" y="3337560"/>
+            <a:ext cx="429768" cy="685800"/>
+          </a:xfrm>
+          <a:prstGeom prst="line">
+            <a:avLst/>
+          </a:prstGeom>
+          <a:ln w="19050">
+            <a:solidFill>
+              <a:srgbClr val="CCCCCC"/>
+            </a:solidFill>
+          </a:ln>
+        </p:spPr>
+        <p:style>
+          <a:lnRef idx="2">
+            <a:schemeClr val="accent1"/>
+          </a:lnRef>
+          <a:fillRef idx="0">
+            <a:schemeClr val="accent1"/>
+          </a:fillRef>
+          <a:effectRef idx="1">
+            <a:schemeClr val="accent1"/>
+          </a:effectRef>
+          <a:fontRef idx="minor">
+            <a:schemeClr val="tx1"/>
+          </a:fontRef>
+        </p:style>
+      </p:cxnSp>
+      <p:sp>
+        <p:nvSpPr>
+          <p:cNvPr id="36" name="Oval 35"/>
+          <p:cNvSpPr/>
+          <p:nvPr/>
+        </p:nvSpPr>
+        <p:spPr>
+          <a:xfrm>
+            <a:off x="10607040" y="4206240"/>
+            <a:ext cx="274320" cy="274320"/>
+          </a:xfrm>
+          <a:prstGeom prst="ellipse">
+            <a:avLst/>
+          </a:prstGeom>
+          <a:solidFill>
+            <a:srgbClr val="27AE60"/>
+          </a:solidFill>
+          <a:ln w="12700">
+            <a:solidFill>
+              <a:srgbClr val="999999"/>
+            </a:solidFill>
+          </a:ln>
+        </p:spPr>
+        <p:style>
+          <a:lnRef idx="1">
+            <a:schemeClr val="accent1"/>
+          </a:lnRef>
+          <a:fillRef idx="3">
+            <a:schemeClr val="accent1"/>
+          </a:fillRef>
+          <a:effectRef idx="2">
+            <a:schemeClr val="accent1"/>
+          </a:effectRef>
+          <a:fontRef idx="minor">
+            <a:schemeClr val="lt1"/>
+          </a:fontRef>
+        </p:style>
+        <p:txBody>
+          <a:bodyPr rtlCol="0" anchor="ctr" wrap="none"/>
+          <a:lstStyle/>
+          <a:p>
+            <a:pPr algn="ctr">
+              <a:defRPr sz="800" b="1">
+                <a:solidFill>
+                  <a:srgbClr val="FFFFFF"/>
+                </a:solidFill>
+              </a:defRPr>
+            </a:pPr>
+            <a:r>
+              <a:t>У</a:t>
+            </a:r>
+          </a:p>
+        </p:txBody>
+      </p:sp>
+      <p:cxnSp>
+        <p:nvCxnSpPr>
+          <p:cNvPr id="37" name="Connector 36"/>
+          <p:cNvCxnSpPr/>
+          <p:nvPr/>
+        </p:nvCxnSpPr>
+        <p:spPr>
+          <a:xfrm flipH="1" flipV="1">
+            <a:off x="10259568" y="3337560"/>
+            <a:ext cx="484632" cy="868680"/>
+          </a:xfrm>
+          <a:prstGeom prst="line">
+            <a:avLst/>
+          </a:prstGeom>
+          <a:ln w="19050">
+            <a:solidFill>
+              <a:srgbClr val="CCCCCC"/>
+            </a:solidFill>
+          </a:ln>
+        </p:spPr>
+        <p:style>
+          <a:lnRef idx="2">
+            <a:schemeClr val="accent1"/>
+          </a:lnRef>
+          <a:fillRef idx="0">
+            <a:schemeClr val="accent1"/>
+          </a:fillRef>
+          <a:effectRef idx="1">
+            <a:schemeClr val="accent1"/>
+          </a:effectRef>
+          <a:fontRef idx="minor">
+            <a:schemeClr val="tx1"/>
+          </a:fontRef>
+        </p:style>
+      </p:cxnSp>
+      <p:sp>
+        <p:nvSpPr>
+          <p:cNvPr id="38" name="Oval 37"/>
+          <p:cNvSpPr/>
+          <p:nvPr/>
+        </p:nvSpPr>
+        <p:spPr>
+          <a:xfrm>
+            <a:off x="10058400" y="4480560"/>
+            <a:ext cx="274320" cy="274320"/>
+          </a:xfrm>
+          <a:prstGeom prst="ellipse">
+            <a:avLst/>
+          </a:prstGeom>
+          <a:solidFill>
+            <a:srgbClr val="27AE60"/>
+          </a:solidFill>
+          <a:ln w="12700">
+            <a:solidFill>
+              <a:srgbClr val="999999"/>
+            </a:solidFill>
+          </a:ln>
+        </p:spPr>
+        <p:style>
+          <a:lnRef idx="1">
+            <a:schemeClr val="accent1"/>
+          </a:lnRef>
+          <a:fillRef idx="3">
+            <a:schemeClr val="accent1"/>
+          </a:fillRef>
+          <a:effectRef idx="2">
+            <a:schemeClr val="accent1"/>
+          </a:effectRef>
+          <a:fontRef idx="minor">
+            <a:schemeClr val="lt1"/>
+          </a:fontRef>
+        </p:style>
+        <p:txBody>
+          <a:bodyPr rtlCol="0" anchor="ctr" wrap="none"/>
+          <a:lstStyle/>
+          <a:p>
+            <a:pPr algn="ctr">
+              <a:defRPr sz="800" b="1">
+                <a:solidFill>
+                  <a:srgbClr val="FFFFFF"/>
+                </a:solidFill>
+              </a:defRPr>
+            </a:pPr>
+            <a:r>
+              <a:t>У</a:t>
+            </a:r>
+          </a:p>
+        </p:txBody>
+      </p:sp>
+      <p:cxnSp>
+        <p:nvCxnSpPr>
+          <p:cNvPr id="39" name="Connector 38"/>
+          <p:cNvCxnSpPr/>
+          <p:nvPr/>
+        </p:nvCxnSpPr>
+        <p:spPr>
+          <a:xfrm flipV="1">
+            <a:off x="10195560" y="3337560"/>
+            <a:ext cx="64008" cy="1143000"/>
+          </a:xfrm>
+          <a:prstGeom prst="line">
+            <a:avLst/>
+          </a:prstGeom>
+          <a:ln w="19050">
+            <a:solidFill>
+              <a:srgbClr val="CCCCCC"/>
+            </a:solidFill>
+          </a:ln>
+        </p:spPr>
+        <p:style>
+          <a:lnRef idx="2">
+            <a:schemeClr val="accent1"/>
+          </a:lnRef>
+          <a:fillRef idx="0">
+            <a:schemeClr val="accent1"/>
+          </a:fillRef>
+          <a:effectRef idx="1">
+            <a:schemeClr val="accent1"/>
+          </a:effectRef>
+          <a:fontRef idx="minor">
+            <a:schemeClr val="tx1"/>
+          </a:fontRef>
+        </p:style>
+      </p:cxnSp>
+      <p:sp>
+        <p:nvSpPr>
+          <p:cNvPr id="40" name="Oval 39"/>
+          <p:cNvSpPr/>
+          <p:nvPr/>
+        </p:nvSpPr>
+        <p:spPr>
+          <a:xfrm>
+            <a:off x="6583680" y="5577840"/>
+            <a:ext cx="201168" cy="201168"/>
+          </a:xfrm>
+          <a:prstGeom prst="ellipse">
+            <a:avLst/>
+          </a:prstGeom>
+          <a:solidFill>
+            <a:srgbClr val="C0392B"/>
+          </a:solidFill>
+          <a:ln w="12700">
+            <a:solidFill>
+              <a:srgbClr val="999999"/>
+            </a:solidFill>
+          </a:ln>
+        </p:spPr>
+        <p:style>
+          <a:lnRef idx="1">
+            <a:schemeClr val="accent1"/>
+          </a:lnRef>
+          <a:fillRef idx="3">
+            <a:schemeClr val="accent1"/>
+          </a:fillRef>
+          <a:effectRef idx="2">
+            <a:schemeClr val="accent1"/>
+          </a:effectRef>
+          <a:fontRef idx="minor">
+            <a:schemeClr val="lt1"/>
+          </a:fontRef>
+        </p:style>
+        <p:txBody>
+          <a:bodyPr rtlCol="0" anchor="ctr"/>
+          <a:lstStyle/>
+          <a:p>
+            <a:pPr algn="ctr"/>
+          </a:p>
+        </p:txBody>
+      </p:sp>
+      <p:sp>
+        <p:nvSpPr>
+          <p:cNvPr id="41" name="TextBox 40"/>
           <p:cNvSpPr txBox="1"/>
           <p:nvPr/>
         </p:nvSpPr>
         <p:spPr>
           <a:xfrm>
-            <a:off x="11430000" y="6400800"/>
-            <a:ext cx="640080" cy="365760"/>
+            <a:off x="6858000" y="5559552"/>
+            <a:ext cx="1371600" cy="274320"/>
           </a:xfrm>
           <a:prstGeom prst="rect">
             <a:avLst/>
@@ -4845,21 +7006,183 @@
           <a:noFill/>
         </p:spPr>
         <p:txBody>
-          <a:bodyPr wrap="none">
+          <a:bodyPr wrap="square">
             <a:spAutoFit/>
           </a:bodyPr>
           <a:lstStyle/>
           <a:p>
-            <a:pPr algn="r">
-              <a:defRPr sz="1200">
-                <a:solidFill>
-                  <a:srgbClr val="8888AA"/>
+            <a:pPr algn="l">
+              <a:defRPr sz="1100" b="0">
+                <a:solidFill>
+                  <a:srgbClr val="666666"/>
                 </a:solidFill>
                 <a:latin typeface="Calibri"/>
               </a:defRPr>
             </a:pPr>
             <a:r>
-              <a:t>4</a:t>
+              <a:t>Базовая станция</a:t>
+            </a:r>
+          </a:p>
+        </p:txBody>
+      </p:sp>
+      <p:sp>
+        <p:nvSpPr>
+          <p:cNvPr id="42" name="Oval 41"/>
+          <p:cNvSpPr/>
+          <p:nvPr/>
+        </p:nvSpPr>
+        <p:spPr>
+          <a:xfrm>
+            <a:off x="8229600" y="5577840"/>
+            <a:ext cx="201168" cy="201168"/>
+          </a:xfrm>
+          <a:prstGeom prst="ellipse">
+            <a:avLst/>
+          </a:prstGeom>
+          <a:solidFill>
+            <a:srgbClr val="E67E22"/>
+          </a:solidFill>
+          <a:ln w="12700">
+            <a:solidFill>
+              <a:srgbClr val="999999"/>
+            </a:solidFill>
+          </a:ln>
+        </p:spPr>
+        <p:style>
+          <a:lnRef idx="1">
+            <a:schemeClr val="accent1"/>
+          </a:lnRef>
+          <a:fillRef idx="3">
+            <a:schemeClr val="accent1"/>
+          </a:fillRef>
+          <a:effectRef idx="2">
+            <a:schemeClr val="accent1"/>
+          </a:effectRef>
+          <a:fontRef idx="minor">
+            <a:schemeClr val="lt1"/>
+          </a:fontRef>
+        </p:style>
+        <p:txBody>
+          <a:bodyPr rtlCol="0" anchor="ctr"/>
+          <a:lstStyle/>
+          <a:p>
+            <a:pPr algn="ctr"/>
+          </a:p>
+        </p:txBody>
+      </p:sp>
+      <p:sp>
+        <p:nvSpPr>
+          <p:cNvPr id="43" name="TextBox 42"/>
+          <p:cNvSpPr txBox="1"/>
+          <p:nvPr/>
+        </p:nvSpPr>
+        <p:spPr>
+          <a:xfrm>
+            <a:off x="8503920" y="5559552"/>
+            <a:ext cx="1371600" cy="274320"/>
+          </a:xfrm>
+          <a:prstGeom prst="rect">
+            <a:avLst/>
+          </a:prstGeom>
+          <a:noFill/>
+        </p:spPr>
+        <p:txBody>
+          <a:bodyPr wrap="square">
+            <a:spAutoFit/>
+          </a:bodyPr>
+          <a:lstStyle/>
+          <a:p>
+            <a:pPr algn="l">
+              <a:defRPr sz="1100" b="0">
+                <a:solidFill>
+                  <a:srgbClr val="666666"/>
+                </a:solidFill>
+                <a:latin typeface="Calibri"/>
+              </a:defRPr>
+            </a:pPr>
+            <a:r>
+              <a:t>Кластерная голова</a:t>
+            </a:r>
+          </a:p>
+        </p:txBody>
+      </p:sp>
+      <p:sp>
+        <p:nvSpPr>
+          <p:cNvPr id="44" name="Oval 43"/>
+          <p:cNvSpPr/>
+          <p:nvPr/>
+        </p:nvSpPr>
+        <p:spPr>
+          <a:xfrm>
+            <a:off x="9966960" y="5577840"/>
+            <a:ext cx="201168" cy="201168"/>
+          </a:xfrm>
+          <a:prstGeom prst="ellipse">
+            <a:avLst/>
+          </a:prstGeom>
+          <a:solidFill>
+            <a:srgbClr val="27AE60"/>
+          </a:solidFill>
+          <a:ln w="12700">
+            <a:solidFill>
+              <a:srgbClr val="999999"/>
+            </a:solidFill>
+          </a:ln>
+        </p:spPr>
+        <p:style>
+          <a:lnRef idx="1">
+            <a:schemeClr val="accent1"/>
+          </a:lnRef>
+          <a:fillRef idx="3">
+            <a:schemeClr val="accent1"/>
+          </a:fillRef>
+          <a:effectRef idx="2">
+            <a:schemeClr val="accent1"/>
+          </a:effectRef>
+          <a:fontRef idx="minor">
+            <a:schemeClr val="lt1"/>
+          </a:fontRef>
+        </p:style>
+        <p:txBody>
+          <a:bodyPr rtlCol="0" anchor="ctr"/>
+          <a:lstStyle/>
+          <a:p>
+            <a:pPr algn="ctr"/>
+          </a:p>
+        </p:txBody>
+      </p:sp>
+      <p:sp>
+        <p:nvSpPr>
+          <p:cNvPr id="45" name="TextBox 44"/>
+          <p:cNvSpPr txBox="1"/>
+          <p:nvPr/>
+        </p:nvSpPr>
+        <p:spPr>
+          <a:xfrm>
+            <a:off x="10241280" y="5559552"/>
+            <a:ext cx="1371600" cy="274320"/>
+          </a:xfrm>
+          <a:prstGeom prst="rect">
+            <a:avLst/>
+          </a:prstGeom>
+          <a:noFill/>
+        </p:spPr>
+        <p:txBody>
+          <a:bodyPr wrap="square">
+            <a:spAutoFit/>
+          </a:bodyPr>
+          <a:lstStyle/>
+          <a:p>
+            <a:pPr algn="l">
+              <a:defRPr sz="1100" b="0">
+                <a:solidFill>
+                  <a:srgbClr val="666666"/>
+                </a:solidFill>
+                <a:latin typeface="Calibri"/>
+              </a:defRPr>
+            </a:pPr>
+            <a:r>
+              <a:t>Сенсорный узел</a:t>
             </a:r>
           </a:p>
         </p:txBody>
@@ -4875,14 +7198,6 @@
 <file path=ppt/slides/slide5.xml><?xml version="1.0" encoding="utf-8"?>
 <p:sld xmlns:a="http://schemas.openxmlformats.org/drawingml/2006/main" xmlns:p="http://schemas.openxmlformats.org/presentationml/2006/main" xmlns:r="http://schemas.openxmlformats.org/officeDocument/2006/relationships">
   <p:cSld>
-    <p:bg>
-      <p:bgPr>
-        <a:solidFill>
-          <a:srgbClr val="1B2A4A"/>
-        </a:solidFill>
-        <a:effectLst/>
-      </p:bgPr>
-    </p:bg>
     <p:spTree>
       <p:nvGrpSpPr>
         <p:cNvPr id="1" name=""/>
@@ -4892,56 +7207,20 @@
       <p:grpSpPr/>
       <p:sp>
         <p:nvSpPr>
-          <p:cNvPr id="2" name="TextBox 1"/>
-          <p:cNvSpPr txBox="1"/>
-          <p:nvPr/>
-        </p:nvSpPr>
-        <p:spPr>
-          <a:xfrm>
-            <a:off x="731520" y="365760"/>
-            <a:ext cx="10698480" cy="640080"/>
+          <p:cNvPr id="2" name="Rectangle 1"/>
+          <p:cNvSpPr/>
+          <p:nvPr/>
+        </p:nvSpPr>
+        <p:spPr>
+          <a:xfrm>
+            <a:off x="0" y="0"/>
+            <a:ext cx="12191695" cy="76200"/>
           </a:xfrm>
           <a:prstGeom prst="rect">
             <a:avLst/>
           </a:prstGeom>
-          <a:noFill/>
-        </p:spPr>
-        <p:txBody>
-          <a:bodyPr wrap="square">
-            <a:spAutoFit/>
-          </a:bodyPr>
-          <a:lstStyle/>
-          <a:p>
-            <a:pPr algn="l">
-              <a:defRPr sz="3200" b="1">
-                <a:solidFill>
-                  <a:srgbClr val="FFFFFF"/>
-                </a:solidFill>
-                <a:latin typeface="Calibri"/>
-              </a:defRPr>
-            </a:pPr>
-            <a:r>
-              <a:t>Угрозы безопасности БСС</a:t>
-            </a:r>
-          </a:p>
-        </p:txBody>
-      </p:sp>
-      <p:sp>
-        <p:nvSpPr>
-          <p:cNvPr id="3" name="Rectangle 2"/>
-          <p:cNvSpPr/>
-          <p:nvPr/>
-        </p:nvSpPr>
-        <p:spPr>
-          <a:xfrm>
-            <a:off x="731520" y="1005840"/>
-            <a:ext cx="1828800" cy="50800"/>
-          </a:xfrm>
-          <a:prstGeom prst="rect">
-            <a:avLst/>
-          </a:prstGeom>
           <a:solidFill>
-            <a:srgbClr val="4EC9B0"/>
+            <a:srgbClr val="1A478A"/>
           </a:solidFill>
           <a:ln>
             <a:noFill/>
@@ -4971,14 +7250,14 @@
       </p:sp>
       <p:sp>
         <p:nvSpPr>
-          <p:cNvPr id="4" name="TextBox 3"/>
+          <p:cNvPr id="3" name="TextBox 2"/>
           <p:cNvSpPr txBox="1"/>
           <p:nvPr/>
         </p:nvSpPr>
         <p:spPr>
           <a:xfrm>
-            <a:off x="731520" y="1371600"/>
-            <a:ext cx="5303520" cy="5029200"/>
+            <a:off x="731520" y="274320"/>
+            <a:ext cx="10698480" cy="731520"/>
           </a:xfrm>
           <a:prstGeom prst="rect">
             <a:avLst/>
@@ -4992,170 +7271,59 @@
           <a:lstStyle/>
           <a:p>
             <a:pPr algn="l">
-              <a:defRPr sz="1800" b="0">
-                <a:solidFill>
-                  <a:srgbClr val="E8E8E8"/>
+              <a:defRPr sz="2800" b="1">
+                <a:solidFill>
+                  <a:srgbClr val="1A478A"/>
                 </a:solidFill>
                 <a:latin typeface="Calibri"/>
               </a:defRPr>
             </a:pPr>
-          </a:p>
-          <a:p>
-            <a:pPr algn="l">
-              <a:spcBef>
-                <a:spcPts val="300"/>
-              </a:spcBef>
-              <a:defRPr sz="1800" b="1">
-                <a:solidFill>
-                  <a:srgbClr val="4EC9B0"/>
-                </a:solidFill>
-                <a:latin typeface="Calibri"/>
-              </a:defRPr>
-            </a:pPr>
-            <a:r>
-              <a:t>Атаки на маршрутизацию:</a:t>
-            </a:r>
-          </a:p>
-          <a:p>
-            <a:pPr algn="l">
-              <a:spcBef>
-                <a:spcPts val="300"/>
-              </a:spcBef>
-              <a:defRPr sz="1800" b="0">
-                <a:solidFill>
-                  <a:srgbClr val="E8E8E8"/>
-                </a:solidFill>
-                <a:latin typeface="Calibri"/>
-              </a:defRPr>
-            </a:pPr>
-          </a:p>
-          <a:p>
-            <a:pPr algn="l">
-              <a:spcBef>
-                <a:spcPts val="300"/>
-              </a:spcBef>
-              <a:defRPr sz="1800" b="0">
-                <a:solidFill>
-                  <a:srgbClr val="E8E8E8"/>
-                </a:solidFill>
-                <a:latin typeface="Calibri"/>
-              </a:defRPr>
-            </a:pPr>
-            <a:r>
-              <a:t>⬥ Чёрная дыра — привлечение</a:t>
-            </a:r>
-          </a:p>
-          <a:p>
-            <a:pPr algn="l">
-              <a:spcBef>
-                <a:spcPts val="300"/>
-              </a:spcBef>
-              <a:defRPr sz="1800" b="0">
-                <a:solidFill>
-                  <a:srgbClr val="E8E8E8"/>
-                </a:solidFill>
-                <a:latin typeface="Calibri"/>
-              </a:defRPr>
-            </a:pPr>
-            <a:r>
-              <a:t>  и отбрасывание трафика</a:t>
-            </a:r>
-          </a:p>
-          <a:p>
-            <a:pPr algn="l">
-              <a:spcBef>
-                <a:spcPts val="300"/>
-              </a:spcBef>
-              <a:defRPr sz="1800" b="0">
-                <a:solidFill>
-                  <a:srgbClr val="E8E8E8"/>
-                </a:solidFill>
-                <a:latin typeface="Calibri"/>
-              </a:defRPr>
-            </a:pPr>
-            <a:r>
-              <a:t>⬥ Червоточина — скрытый канал</a:t>
-            </a:r>
-          </a:p>
-          <a:p>
-            <a:pPr algn="l">
-              <a:spcBef>
-                <a:spcPts val="300"/>
-              </a:spcBef>
-              <a:defRPr sz="1800" b="0">
-                <a:solidFill>
-                  <a:srgbClr val="E8E8E8"/>
-                </a:solidFill>
-                <a:latin typeface="Calibri"/>
-              </a:defRPr>
-            </a:pPr>
-            <a:r>
-              <a:t>  между удалёнными узлами</a:t>
-            </a:r>
-          </a:p>
-          <a:p>
-            <a:pPr algn="l">
-              <a:spcBef>
-                <a:spcPts val="300"/>
-              </a:spcBef>
-              <a:defRPr sz="1800" b="0">
-                <a:solidFill>
-                  <a:srgbClr val="E8E8E8"/>
-                </a:solidFill>
-                <a:latin typeface="Calibri"/>
-              </a:defRPr>
-            </a:pPr>
-            <a:r>
-              <a:t>⬥ Sybil — узел выдаёт себя</a:t>
-            </a:r>
-          </a:p>
-          <a:p>
-            <a:pPr algn="l">
-              <a:spcBef>
-                <a:spcPts val="300"/>
-              </a:spcBef>
-              <a:defRPr sz="1800" b="0">
-                <a:solidFill>
-                  <a:srgbClr val="E8E8E8"/>
-                </a:solidFill>
-                <a:latin typeface="Calibri"/>
-              </a:defRPr>
-            </a:pPr>
-            <a:r>
-              <a:t>  за множество узлов</a:t>
-            </a:r>
-          </a:p>
-          <a:p>
-            <a:pPr algn="l">
-              <a:spcBef>
-                <a:spcPts val="300"/>
-              </a:spcBef>
-              <a:defRPr sz="1800" b="0">
-                <a:solidFill>
-                  <a:srgbClr val="E8E8E8"/>
-                </a:solidFill>
-                <a:latin typeface="Calibri"/>
-              </a:defRPr>
-            </a:pPr>
-            <a:r>
-              <a:t>⬥ Sinkhole — создание «воронки»</a:t>
-            </a:r>
-          </a:p>
-          <a:p>
-            <a:pPr algn="l">
-              <a:spcBef>
-                <a:spcPts val="300"/>
-              </a:spcBef>
-              <a:defRPr sz="1800" b="0">
-                <a:solidFill>
-                  <a:srgbClr val="E8E8E8"/>
-                </a:solidFill>
-                <a:latin typeface="Calibri"/>
-              </a:defRPr>
-            </a:pPr>
-            <a:r>
-              <a:t>  для перехвата данных</a:t>
-            </a:r>
+            <a:r>
+              <a:t>Угрозы безопасности маршрутизации в БСС</a:t>
+            </a:r>
+          </a:p>
+        </p:txBody>
+      </p:sp>
+      <p:sp>
+        <p:nvSpPr>
+          <p:cNvPr id="4" name="Rectangle 3"/>
+          <p:cNvSpPr/>
+          <p:nvPr/>
+        </p:nvSpPr>
+        <p:spPr>
+          <a:xfrm>
+            <a:off x="731520" y="6446520"/>
+            <a:ext cx="10698480" cy="12700"/>
+          </a:xfrm>
+          <a:prstGeom prst="rect">
+            <a:avLst/>
+          </a:prstGeom>
+          <a:solidFill>
+            <a:srgbClr val="CCCCCC"/>
+          </a:solidFill>
+          <a:ln>
+            <a:noFill/>
+          </a:ln>
+        </p:spPr>
+        <p:style>
+          <a:lnRef idx="1">
+            <a:schemeClr val="accent1"/>
+          </a:lnRef>
+          <a:fillRef idx="3">
+            <a:schemeClr val="accent1"/>
+          </a:fillRef>
+          <a:effectRef idx="2">
+            <a:schemeClr val="accent1"/>
+          </a:effectRef>
+          <a:fontRef idx="minor">
+            <a:schemeClr val="lt1"/>
+          </a:fontRef>
+        </p:style>
+        <p:txBody>
+          <a:bodyPr rtlCol="0" anchor="ctr"/>
+          <a:lstStyle/>
+          <a:p>
+            <a:pPr algn="ctr"/>
           </a:p>
         </p:txBody>
       </p:sp>
@@ -5167,8 +7335,8 @@
         </p:nvSpPr>
         <p:spPr>
           <a:xfrm>
-            <a:off x="6400800" y="1371600"/>
-            <a:ext cx="5303520" cy="5029200"/>
+            <a:off x="11155680" y="6446520"/>
+            <a:ext cx="731520" cy="320040"/>
           </a:xfrm>
           <a:prstGeom prst="rect">
             <a:avLst/>
@@ -5181,10 +7349,592 @@
           </a:bodyPr>
           <a:lstStyle/>
           <a:p>
+            <a:pPr algn="r">
+              <a:defRPr sz="1100" b="0">
+                <a:solidFill>
+                  <a:srgbClr val="666666"/>
+                </a:solidFill>
+                <a:latin typeface="Calibri"/>
+              </a:defRPr>
+            </a:pPr>
+            <a:r>
+              <a:t>5</a:t>
+            </a:r>
+          </a:p>
+        </p:txBody>
+      </p:sp>
+      <p:sp>
+        <p:nvSpPr>
+          <p:cNvPr id="6" name="TextBox 5"/>
+          <p:cNvSpPr txBox="1"/>
+          <p:nvPr/>
+        </p:nvSpPr>
+        <p:spPr>
+          <a:xfrm>
+            <a:off x="731520" y="1097280"/>
+            <a:ext cx="4572000" cy="411480"/>
+          </a:xfrm>
+          <a:prstGeom prst="rect">
+            <a:avLst/>
+          </a:prstGeom>
+          <a:noFill/>
+        </p:spPr>
+        <p:txBody>
+          <a:bodyPr wrap="square">
+            <a:spAutoFit/>
+          </a:bodyPr>
+          <a:lstStyle/>
+          <a:p>
             <a:pPr algn="l">
-              <a:defRPr sz="1800" b="0">
-                <a:solidFill>
-                  <a:srgbClr val="E8E8E8"/>
+              <a:defRPr sz="1800" b="1">
+                <a:solidFill>
+                  <a:srgbClr val="1A478A"/>
+                </a:solidFill>
+                <a:latin typeface="Calibri"/>
+              </a:defRPr>
+            </a:pPr>
+            <a:r>
+              <a:t>Атаки на маршрутизацию</a:t>
+            </a:r>
+          </a:p>
+        </p:txBody>
+      </p:sp>
+      <p:sp>
+        <p:nvSpPr>
+          <p:cNvPr id="7" name="Rounded Rectangle 6"/>
+          <p:cNvSpPr/>
+          <p:nvPr/>
+        </p:nvSpPr>
+        <p:spPr>
+          <a:xfrm>
+            <a:off x="731520" y="1645920"/>
+            <a:ext cx="2560320" cy="1463040"/>
+          </a:xfrm>
+          <a:prstGeom prst="roundRect">
+            <a:avLst/>
+          </a:prstGeom>
+          <a:solidFill>
+            <a:srgbClr val="FDEDED"/>
+          </a:solidFill>
+          <a:ln w="12700">
+            <a:solidFill>
+              <a:srgbClr val="DDDDDD"/>
+            </a:solidFill>
+          </a:ln>
+        </p:spPr>
+        <p:style>
+          <a:lnRef idx="1">
+            <a:schemeClr val="accent1"/>
+          </a:lnRef>
+          <a:fillRef idx="3">
+            <a:schemeClr val="accent1"/>
+          </a:fillRef>
+          <a:effectRef idx="2">
+            <a:schemeClr val="accent1"/>
+          </a:effectRef>
+          <a:fontRef idx="minor">
+            <a:schemeClr val="lt1"/>
+          </a:fontRef>
+        </p:style>
+        <p:txBody>
+          <a:bodyPr rtlCol="0" anchor="ctr" wrap="square"/>
+          <a:lstStyle/>
+          <a:p>
+            <a:pPr algn="ctr">
+              <a:defRPr sz="1500" b="1">
+                <a:solidFill>
+                  <a:srgbClr val="C0392B"/>
+                </a:solidFill>
+              </a:defRPr>
+            </a:pPr>
+            <a:r>
+              <a:t>Чёрная дыра</a:t>
+            </a:r>
+          </a:p>
+          <a:p>
+            <a:pPr algn="ctr">
+              <a:spcBef>
+                <a:spcPts val="600"/>
+              </a:spcBef>
+              <a:defRPr sz="1200">
+                <a:solidFill>
+                  <a:srgbClr val="2D2D2D"/>
+                </a:solidFill>
+              </a:defRPr>
+            </a:pPr>
+            <a:r>
+              <a:t>Привлечение и</a:t>
+            </a:r>
+            <a:br/>
+            <a:r>
+              <a:t>отбрасывание трафика</a:t>
+            </a:r>
+          </a:p>
+        </p:txBody>
+      </p:sp>
+      <p:sp>
+        <p:nvSpPr>
+          <p:cNvPr id="8" name="Rounded Rectangle 7"/>
+          <p:cNvSpPr/>
+          <p:nvPr/>
+        </p:nvSpPr>
+        <p:spPr>
+          <a:xfrm>
+            <a:off x="3566160" y="1645920"/>
+            <a:ext cx="2560320" cy="1463040"/>
+          </a:xfrm>
+          <a:prstGeom prst="roundRect">
+            <a:avLst/>
+          </a:prstGeom>
+          <a:solidFill>
+            <a:srgbClr val="FDEDED"/>
+          </a:solidFill>
+          <a:ln w="12700">
+            <a:solidFill>
+              <a:srgbClr val="DDDDDD"/>
+            </a:solidFill>
+          </a:ln>
+        </p:spPr>
+        <p:style>
+          <a:lnRef idx="1">
+            <a:schemeClr val="accent1"/>
+          </a:lnRef>
+          <a:fillRef idx="3">
+            <a:schemeClr val="accent1"/>
+          </a:fillRef>
+          <a:effectRef idx="2">
+            <a:schemeClr val="accent1"/>
+          </a:effectRef>
+          <a:fontRef idx="minor">
+            <a:schemeClr val="lt1"/>
+          </a:fontRef>
+        </p:style>
+        <p:txBody>
+          <a:bodyPr rtlCol="0" anchor="ctr" wrap="square"/>
+          <a:lstStyle/>
+          <a:p>
+            <a:pPr algn="ctr">
+              <a:defRPr sz="1500" b="1">
+                <a:solidFill>
+                  <a:srgbClr val="C0392B"/>
+                </a:solidFill>
+              </a:defRPr>
+            </a:pPr>
+            <a:r>
+              <a:t>Червоточина</a:t>
+            </a:r>
+          </a:p>
+          <a:p>
+            <a:pPr algn="ctr">
+              <a:spcBef>
+                <a:spcPts val="600"/>
+              </a:spcBef>
+              <a:defRPr sz="1200">
+                <a:solidFill>
+                  <a:srgbClr val="2D2D2D"/>
+                </a:solidFill>
+              </a:defRPr>
+            </a:pPr>
+            <a:r>
+              <a:t>Скрытый туннель между</a:t>
+            </a:r>
+            <a:br/>
+            <a:r>
+              <a:t>удалёнными узлами</a:t>
+            </a:r>
+          </a:p>
+        </p:txBody>
+      </p:sp>
+      <p:sp>
+        <p:nvSpPr>
+          <p:cNvPr id="9" name="Rounded Rectangle 8"/>
+          <p:cNvSpPr/>
+          <p:nvPr/>
+        </p:nvSpPr>
+        <p:spPr>
+          <a:xfrm>
+            <a:off x="6400800" y="1645920"/>
+            <a:ext cx="2560320" cy="1463040"/>
+          </a:xfrm>
+          <a:prstGeom prst="roundRect">
+            <a:avLst/>
+          </a:prstGeom>
+          <a:solidFill>
+            <a:srgbClr val="FDEDED"/>
+          </a:solidFill>
+          <a:ln w="12700">
+            <a:solidFill>
+              <a:srgbClr val="DDDDDD"/>
+            </a:solidFill>
+          </a:ln>
+        </p:spPr>
+        <p:style>
+          <a:lnRef idx="1">
+            <a:schemeClr val="accent1"/>
+          </a:lnRef>
+          <a:fillRef idx="3">
+            <a:schemeClr val="accent1"/>
+          </a:fillRef>
+          <a:effectRef idx="2">
+            <a:schemeClr val="accent1"/>
+          </a:effectRef>
+          <a:fontRef idx="minor">
+            <a:schemeClr val="lt1"/>
+          </a:fontRef>
+        </p:style>
+        <p:txBody>
+          <a:bodyPr rtlCol="0" anchor="ctr" wrap="square"/>
+          <a:lstStyle/>
+          <a:p>
+            <a:pPr algn="ctr">
+              <a:defRPr sz="1500" b="1">
+                <a:solidFill>
+                  <a:srgbClr val="C0392B"/>
+                </a:solidFill>
+              </a:defRPr>
+            </a:pPr>
+            <a:r>
+              <a:t>Sybil-атака</a:t>
+            </a:r>
+          </a:p>
+          <a:p>
+            <a:pPr algn="ctr">
+              <a:spcBef>
+                <a:spcPts val="600"/>
+              </a:spcBef>
+              <a:defRPr sz="1200">
+                <a:solidFill>
+                  <a:srgbClr val="2D2D2D"/>
+                </a:solidFill>
+              </a:defRPr>
+            </a:pPr>
+            <a:r>
+              <a:t>Один узел выдаёт</a:t>
+            </a:r>
+            <a:br/>
+            <a:r>
+              <a:t>себя за множество</a:t>
+            </a:r>
+          </a:p>
+        </p:txBody>
+      </p:sp>
+      <p:sp>
+        <p:nvSpPr>
+          <p:cNvPr id="10" name="Rounded Rectangle 9"/>
+          <p:cNvSpPr/>
+          <p:nvPr/>
+        </p:nvSpPr>
+        <p:spPr>
+          <a:xfrm>
+            <a:off x="9235440" y="1645920"/>
+            <a:ext cx="2560320" cy="1463040"/>
+          </a:xfrm>
+          <a:prstGeom prst="roundRect">
+            <a:avLst/>
+          </a:prstGeom>
+          <a:solidFill>
+            <a:srgbClr val="FDEDED"/>
+          </a:solidFill>
+          <a:ln w="12700">
+            <a:solidFill>
+              <a:srgbClr val="DDDDDD"/>
+            </a:solidFill>
+          </a:ln>
+        </p:spPr>
+        <p:style>
+          <a:lnRef idx="1">
+            <a:schemeClr val="accent1"/>
+          </a:lnRef>
+          <a:fillRef idx="3">
+            <a:schemeClr val="accent1"/>
+          </a:fillRef>
+          <a:effectRef idx="2">
+            <a:schemeClr val="accent1"/>
+          </a:effectRef>
+          <a:fontRef idx="minor">
+            <a:schemeClr val="lt1"/>
+          </a:fontRef>
+        </p:style>
+        <p:txBody>
+          <a:bodyPr rtlCol="0" anchor="ctr" wrap="square"/>
+          <a:lstStyle/>
+          <a:p>
+            <a:pPr algn="ctr">
+              <a:defRPr sz="1500" b="1">
+                <a:solidFill>
+                  <a:srgbClr val="C0392B"/>
+                </a:solidFill>
+              </a:defRPr>
+            </a:pPr>
+            <a:r>
+              <a:t>Sinkhole</a:t>
+            </a:r>
+          </a:p>
+          <a:p>
+            <a:pPr algn="ctr">
+              <a:spcBef>
+                <a:spcPts val="600"/>
+              </a:spcBef>
+              <a:defRPr sz="1200">
+                <a:solidFill>
+                  <a:srgbClr val="2D2D2D"/>
+                </a:solidFill>
+              </a:defRPr>
+            </a:pPr>
+            <a:r>
+              <a:t>Создание «воронки»</a:t>
+            </a:r>
+            <a:br/>
+            <a:r>
+              <a:t>для перехвата данных</a:t>
+            </a:r>
+          </a:p>
+        </p:txBody>
+      </p:sp>
+      <p:sp>
+        <p:nvSpPr>
+          <p:cNvPr id="11" name="TextBox 10"/>
+          <p:cNvSpPr txBox="1"/>
+          <p:nvPr/>
+        </p:nvSpPr>
+        <p:spPr>
+          <a:xfrm>
+            <a:off x="731520" y="3383280"/>
+            <a:ext cx="4572000" cy="411480"/>
+          </a:xfrm>
+          <a:prstGeom prst="rect">
+            <a:avLst/>
+          </a:prstGeom>
+          <a:noFill/>
+        </p:spPr>
+        <p:txBody>
+          <a:bodyPr wrap="square">
+            <a:spAutoFit/>
+          </a:bodyPr>
+          <a:lstStyle/>
+          <a:p>
+            <a:pPr algn="l">
+              <a:defRPr sz="1800" b="1">
+                <a:solidFill>
+                  <a:srgbClr val="1A478A"/>
+                </a:solidFill>
+                <a:latin typeface="Calibri"/>
+              </a:defRPr>
+            </a:pPr>
+            <a:r>
+              <a:t>Энергетические атаки</a:t>
+            </a:r>
+          </a:p>
+        </p:txBody>
+      </p:sp>
+      <p:sp>
+        <p:nvSpPr>
+          <p:cNvPr id="12" name="Rounded Rectangle 11"/>
+          <p:cNvSpPr/>
+          <p:nvPr/>
+        </p:nvSpPr>
+        <p:spPr>
+          <a:xfrm>
+            <a:off x="731520" y="3931920"/>
+            <a:ext cx="2560320" cy="1463040"/>
+          </a:xfrm>
+          <a:prstGeom prst="roundRect">
+            <a:avLst/>
+          </a:prstGeom>
+          <a:solidFill>
+            <a:srgbClr val="FEF5E7"/>
+          </a:solidFill>
+          <a:ln w="12700">
+            <a:solidFill>
+              <a:srgbClr val="DDDDDD"/>
+            </a:solidFill>
+          </a:ln>
+        </p:spPr>
+        <p:style>
+          <a:lnRef idx="1">
+            <a:schemeClr val="accent1"/>
+          </a:lnRef>
+          <a:fillRef idx="3">
+            <a:schemeClr val="accent1"/>
+          </a:fillRef>
+          <a:effectRef idx="2">
+            <a:schemeClr val="accent1"/>
+          </a:effectRef>
+          <a:fontRef idx="minor">
+            <a:schemeClr val="lt1"/>
+          </a:fontRef>
+        </p:style>
+        <p:txBody>
+          <a:bodyPr rtlCol="0" anchor="ctr" wrap="square"/>
+          <a:lstStyle/>
+          <a:p>
+            <a:pPr algn="ctr">
+              <a:defRPr sz="1500" b="1">
+                <a:solidFill>
+                  <a:srgbClr val="E67E22"/>
+                </a:solidFill>
+              </a:defRPr>
+            </a:pPr>
+            <a:r>
+              <a:t>Vampire attacks</a:t>
+            </a:r>
+          </a:p>
+          <a:p>
+            <a:pPr algn="ctr">
+              <a:spcBef>
+                <a:spcPts val="600"/>
+              </a:spcBef>
+              <a:defRPr sz="1200">
+                <a:solidFill>
+                  <a:srgbClr val="2D2D2D"/>
+                </a:solidFill>
+              </a:defRPr>
+            </a:pPr>
+            <a:r>
+              <a:t>Создание циклических</a:t>
+            </a:r>
+            <a:br/>
+            <a:r>
+              <a:t>маршрутов для истощения</a:t>
+            </a:r>
+          </a:p>
+        </p:txBody>
+      </p:sp>
+      <p:sp>
+        <p:nvSpPr>
+          <p:cNvPr id="13" name="Rounded Rectangle 12"/>
+          <p:cNvSpPr/>
+          <p:nvPr/>
+        </p:nvSpPr>
+        <p:spPr>
+          <a:xfrm>
+            <a:off x="3566160" y="3931920"/>
+            <a:ext cx="2560320" cy="1463040"/>
+          </a:xfrm>
+          <a:prstGeom prst="roundRect">
+            <a:avLst/>
+          </a:prstGeom>
+          <a:solidFill>
+            <a:srgbClr val="FEF5E7"/>
+          </a:solidFill>
+          <a:ln w="12700">
+            <a:solidFill>
+              <a:srgbClr val="DDDDDD"/>
+            </a:solidFill>
+          </a:ln>
+        </p:spPr>
+        <p:style>
+          <a:lnRef idx="1">
+            <a:schemeClr val="accent1"/>
+          </a:lnRef>
+          <a:fillRef idx="3">
+            <a:schemeClr val="accent1"/>
+          </a:fillRef>
+          <a:effectRef idx="2">
+            <a:schemeClr val="accent1"/>
+          </a:effectRef>
+          <a:fontRef idx="minor">
+            <a:schemeClr val="lt1"/>
+          </a:fontRef>
+        </p:style>
+        <p:txBody>
+          <a:bodyPr rtlCol="0" anchor="ctr" wrap="square"/>
+          <a:lstStyle/>
+          <a:p>
+            <a:pPr algn="ctr">
+              <a:defRPr sz="1500" b="1">
+                <a:solidFill>
+                  <a:srgbClr val="E67E22"/>
+                </a:solidFill>
+              </a:defRPr>
+            </a:pPr>
+            <a:r>
+              <a:t>Denial-of-sleep</a:t>
+            </a:r>
+          </a:p>
+          <a:p>
+            <a:pPr algn="ctr">
+              <a:spcBef>
+                <a:spcPts val="600"/>
+              </a:spcBef>
+              <a:defRPr sz="1200">
+                <a:solidFill>
+                  <a:srgbClr val="2D2D2D"/>
+                </a:solidFill>
+              </a:defRPr>
+            </a:pPr>
+            <a:r>
+              <a:t>Не позволяют узлам</a:t>
+            </a:r>
+            <a:br/>
+            <a:r>
+              <a:t>войти в спящий режим</a:t>
+            </a:r>
+          </a:p>
+        </p:txBody>
+      </p:sp>
+      <p:sp>
+        <p:nvSpPr>
+          <p:cNvPr id="14" name="TextBox 13"/>
+          <p:cNvSpPr txBox="1"/>
+          <p:nvPr/>
+        </p:nvSpPr>
+        <p:spPr>
+          <a:xfrm>
+            <a:off x="6858000" y="3383280"/>
+            <a:ext cx="4572000" cy="411480"/>
+          </a:xfrm>
+          <a:prstGeom prst="rect">
+            <a:avLst/>
+          </a:prstGeom>
+          <a:noFill/>
+        </p:spPr>
+        <p:txBody>
+          <a:bodyPr wrap="square">
+            <a:spAutoFit/>
+          </a:bodyPr>
+          <a:lstStyle/>
+          <a:p>
+            <a:pPr algn="l">
+              <a:defRPr sz="1800" b="1">
+                <a:solidFill>
+                  <a:srgbClr val="1A478A"/>
+                </a:solidFill>
+                <a:latin typeface="Calibri"/>
+              </a:defRPr>
+            </a:pPr>
+            <a:r>
+              <a:t>Эволюция угроз</a:t>
+            </a:r>
+          </a:p>
+        </p:txBody>
+      </p:sp>
+      <p:sp>
+        <p:nvSpPr>
+          <p:cNvPr id="15" name="TextBox 14"/>
+          <p:cNvSpPr txBox="1"/>
+          <p:nvPr/>
+        </p:nvSpPr>
+        <p:spPr>
+          <a:xfrm>
+            <a:off x="6858000" y="3931920"/>
+            <a:ext cx="4754880" cy="2286000"/>
+          </a:xfrm>
+          <a:prstGeom prst="rect">
+            <a:avLst/>
+          </a:prstGeom>
+          <a:noFill/>
+        </p:spPr>
+        <p:txBody>
+          <a:bodyPr wrap="square">
+            <a:spAutoFit/>
+          </a:bodyPr>
+          <a:lstStyle/>
+          <a:p>
+            <a:pPr algn="l">
+              <a:defRPr sz="1600" b="0">
+                <a:solidFill>
+                  <a:srgbClr val="2D2D2D"/>
                 </a:solidFill>
                 <a:latin typeface="Calibri"/>
               </a:defRPr>
@@ -5193,207 +7943,65 @@
           <a:p>
             <a:pPr algn="l">
               <a:spcBef>
-                <a:spcPts val="300"/>
+                <a:spcPts val="600"/>
               </a:spcBef>
-              <a:defRPr sz="1800" b="1">
-                <a:solidFill>
-                  <a:srgbClr val="4EC9B0"/>
+              <a:defRPr sz="1600" b="0">
+                <a:solidFill>
+                  <a:srgbClr val="2D2D2D"/>
                 </a:solidFill>
                 <a:latin typeface="Calibri"/>
               </a:defRPr>
             </a:pPr>
             <a:r>
-              <a:t>Энергетические атаки:</a:t>
+              <a:t>- Комбинированные атаки на несколько уровней стека</a:t>
             </a:r>
           </a:p>
           <a:p>
             <a:pPr algn="l">
               <a:spcBef>
-                <a:spcPts val="300"/>
+                <a:spcPts val="600"/>
               </a:spcBef>
-              <a:defRPr sz="1800" b="0">
-                <a:solidFill>
-                  <a:srgbClr val="E8E8E8"/>
+              <a:defRPr sz="1600" b="0">
+                <a:solidFill>
+                  <a:srgbClr val="2D2D2D"/>
                 </a:solidFill>
                 <a:latin typeface="Calibri"/>
               </a:defRPr>
             </a:pPr>
+            <a:r>
+              <a:t>- Атаки с использованием машинного обучения</a:t>
+            </a:r>
           </a:p>
           <a:p>
             <a:pPr algn="l">
               <a:spcBef>
-                <a:spcPts val="300"/>
+                <a:spcPts val="600"/>
               </a:spcBef>
-              <a:defRPr sz="1800" b="0">
-                <a:solidFill>
-                  <a:srgbClr val="E8E8E8"/>
+              <a:defRPr sz="1600" b="0">
+                <a:solidFill>
+                  <a:srgbClr val="2D2D2D"/>
                 </a:solidFill>
                 <a:latin typeface="Calibri"/>
               </a:defRPr>
             </a:pPr>
             <a:r>
-              <a:t>⬥ Vampire attacks — создание</a:t>
+              <a:t>- FOTA-атаки через обновление прошивки</a:t>
             </a:r>
           </a:p>
           <a:p>
             <a:pPr algn="l">
               <a:spcBef>
-                <a:spcPts val="300"/>
+                <a:spcPts val="600"/>
               </a:spcBef>
-              <a:defRPr sz="1800" b="0">
-                <a:solidFill>
-                  <a:srgbClr val="E8E8E8"/>
+              <a:defRPr sz="1600" b="0">
+                <a:solidFill>
+                  <a:srgbClr val="2D2D2D"/>
                 </a:solidFill>
                 <a:latin typeface="Calibri"/>
               </a:defRPr>
             </a:pPr>
             <a:r>
-              <a:t>  циклических маршрутов</a:t>
-            </a:r>
-          </a:p>
-          <a:p>
-            <a:pPr algn="l">
-              <a:spcBef>
-                <a:spcPts val="300"/>
-              </a:spcBef>
-              <a:defRPr sz="1800" b="0">
-                <a:solidFill>
-                  <a:srgbClr val="E8E8E8"/>
-                </a:solidFill>
-                <a:latin typeface="Calibri"/>
-              </a:defRPr>
-            </a:pPr>
-            <a:r>
-              <a:t>⬥ Denial-of-sleep — не дают</a:t>
-            </a:r>
-          </a:p>
-          <a:p>
-            <a:pPr algn="l">
-              <a:spcBef>
-                <a:spcPts val="300"/>
-              </a:spcBef>
-              <a:defRPr sz="1800" b="0">
-                <a:solidFill>
-                  <a:srgbClr val="E8E8E8"/>
-                </a:solidFill>
-                <a:latin typeface="Calibri"/>
-              </a:defRPr>
-            </a:pPr>
-            <a:r>
-              <a:t>  узлам войти в спящий режим</a:t>
-            </a:r>
-          </a:p>
-          <a:p>
-            <a:pPr algn="l">
-              <a:spcBef>
-                <a:spcPts val="300"/>
-              </a:spcBef>
-              <a:defRPr sz="1800" b="0">
-                <a:solidFill>
-                  <a:srgbClr val="E8E8E8"/>
-                </a:solidFill>
-                <a:latin typeface="Calibri"/>
-              </a:defRPr>
-            </a:pPr>
-          </a:p>
-          <a:p>
-            <a:pPr algn="l">
-              <a:spcBef>
-                <a:spcPts val="300"/>
-              </a:spcBef>
-              <a:defRPr sz="1800" b="1">
-                <a:solidFill>
-                  <a:srgbClr val="4EC9B0"/>
-                </a:solidFill>
-                <a:latin typeface="Calibri"/>
-              </a:defRPr>
-            </a:pPr>
-            <a:r>
-              <a:t>Эволюция угроз:</a:t>
-            </a:r>
-          </a:p>
-          <a:p>
-            <a:pPr algn="l">
-              <a:spcBef>
-                <a:spcPts val="300"/>
-              </a:spcBef>
-              <a:defRPr sz="1800" b="0">
-                <a:solidFill>
-                  <a:srgbClr val="E8E8E8"/>
-                </a:solidFill>
-                <a:latin typeface="Calibri"/>
-              </a:defRPr>
-            </a:pPr>
-            <a:r>
-              <a:t>⬥ Комбинированные атаки</a:t>
-            </a:r>
-          </a:p>
-          <a:p>
-            <a:pPr algn="l">
-              <a:spcBef>
-                <a:spcPts val="300"/>
-              </a:spcBef>
-              <a:defRPr sz="1800" b="0">
-                <a:solidFill>
-                  <a:srgbClr val="E8E8E8"/>
-                </a:solidFill>
-                <a:latin typeface="Calibri"/>
-              </a:defRPr>
-            </a:pPr>
-            <a:r>
-              <a:t>⬥ Атаки с использованием ML</a:t>
-            </a:r>
-          </a:p>
-          <a:p>
-            <a:pPr algn="l">
-              <a:spcBef>
-                <a:spcPts val="300"/>
-              </a:spcBef>
-              <a:defRPr sz="1800" b="0">
-                <a:solidFill>
-                  <a:srgbClr val="E8E8E8"/>
-                </a:solidFill>
-                <a:latin typeface="Calibri"/>
-              </a:defRPr>
-            </a:pPr>
-            <a:r>
-              <a:t>⬥ Атаки на цепочку поставок</a:t>
-            </a:r>
-          </a:p>
-        </p:txBody>
-      </p:sp>
-      <p:sp>
-        <p:nvSpPr>
-          <p:cNvPr id="6" name="TextBox 5"/>
-          <p:cNvSpPr txBox="1"/>
-          <p:nvPr/>
-        </p:nvSpPr>
-        <p:spPr>
-          <a:xfrm>
-            <a:off x="11430000" y="6400800"/>
-            <a:ext cx="640080" cy="365760"/>
-          </a:xfrm>
-          <a:prstGeom prst="rect">
-            <a:avLst/>
-          </a:prstGeom>
-          <a:noFill/>
-        </p:spPr>
-        <p:txBody>
-          <a:bodyPr wrap="none">
-            <a:spAutoFit/>
-          </a:bodyPr>
-          <a:lstStyle/>
-          <a:p>
-            <a:pPr algn="r">
-              <a:defRPr sz="1200">
-                <a:solidFill>
-                  <a:srgbClr val="8888AA"/>
-                </a:solidFill>
-                <a:latin typeface="Calibri"/>
-              </a:defRPr>
-            </a:pPr>
-            <a:r>
-              <a:t>5</a:t>
+              <a:t>- Атаки через IoT-инфраструктуру</a:t>
             </a:r>
           </a:p>
         </p:txBody>
@@ -5409,14 +8017,6 @@
 <file path=ppt/slides/slide6.xml><?xml version="1.0" encoding="utf-8"?>
 <p:sld xmlns:a="http://schemas.openxmlformats.org/drawingml/2006/main" xmlns:p="http://schemas.openxmlformats.org/presentationml/2006/main" xmlns:r="http://schemas.openxmlformats.org/officeDocument/2006/relationships">
   <p:cSld>
-    <p:bg>
-      <p:bgPr>
-        <a:solidFill>
-          <a:srgbClr val="1B2A4A"/>
-        </a:solidFill>
-        <a:effectLst/>
-      </p:bgPr>
-    </p:bg>
     <p:spTree>
       <p:nvGrpSpPr>
         <p:cNvPr id="1" name=""/>
@@ -5426,56 +8026,20 @@
       <p:grpSpPr/>
       <p:sp>
         <p:nvSpPr>
-          <p:cNvPr id="2" name="TextBox 1"/>
-          <p:cNvSpPr txBox="1"/>
-          <p:nvPr/>
-        </p:nvSpPr>
-        <p:spPr>
-          <a:xfrm>
-            <a:off x="731520" y="365760"/>
-            <a:ext cx="10698480" cy="640080"/>
+          <p:cNvPr id="2" name="Rectangle 1"/>
+          <p:cNvSpPr/>
+          <p:nvPr/>
+        </p:nvSpPr>
+        <p:spPr>
+          <a:xfrm>
+            <a:off x="0" y="0"/>
+            <a:ext cx="12191695" cy="76200"/>
           </a:xfrm>
           <a:prstGeom prst="rect">
             <a:avLst/>
           </a:prstGeom>
-          <a:noFill/>
-        </p:spPr>
-        <p:txBody>
-          <a:bodyPr wrap="square">
-            <a:spAutoFit/>
-          </a:bodyPr>
-          <a:lstStyle/>
-          <a:p>
-            <a:pPr algn="l">
-              <a:defRPr sz="3200" b="1">
-                <a:solidFill>
-                  <a:srgbClr val="FFFFFF"/>
-                </a:solidFill>
-                <a:latin typeface="Calibri"/>
-              </a:defRPr>
-            </a:pPr>
-            <a:r>
-              <a:t>QoS-маршрутизация и балансировка нагрузки</a:t>
-            </a:r>
-          </a:p>
-        </p:txBody>
-      </p:sp>
-      <p:sp>
-        <p:nvSpPr>
-          <p:cNvPr id="3" name="Rectangle 2"/>
-          <p:cNvSpPr/>
-          <p:nvPr/>
-        </p:nvSpPr>
-        <p:spPr>
-          <a:xfrm>
-            <a:off x="731520" y="1005840"/>
-            <a:ext cx="1828800" cy="50800"/>
-          </a:xfrm>
-          <a:prstGeom prst="rect">
-            <a:avLst/>
-          </a:prstGeom>
           <a:solidFill>
-            <a:srgbClr val="4EC9B0"/>
+            <a:srgbClr val="1A478A"/>
           </a:solidFill>
           <a:ln>
             <a:noFill/>
@@ -5505,14 +8069,14 @@
       </p:sp>
       <p:sp>
         <p:nvSpPr>
-          <p:cNvPr id="4" name="TextBox 3"/>
+          <p:cNvPr id="3" name="TextBox 2"/>
           <p:cNvSpPr txBox="1"/>
           <p:nvPr/>
         </p:nvSpPr>
         <p:spPr>
           <a:xfrm>
-            <a:off x="731520" y="1371600"/>
-            <a:ext cx="5303520" cy="5029200"/>
+            <a:off x="731520" y="274320"/>
+            <a:ext cx="10698480" cy="731520"/>
           </a:xfrm>
           <a:prstGeom prst="rect">
             <a:avLst/>
@@ -5526,154 +8090,59 @@
           <a:lstStyle/>
           <a:p>
             <a:pPr algn="l">
-              <a:defRPr sz="1800" b="0">
-                <a:solidFill>
-                  <a:srgbClr val="E8E8E8"/>
+              <a:defRPr sz="2800" b="1">
+                <a:solidFill>
+                  <a:srgbClr val="1A478A"/>
                 </a:solidFill>
                 <a:latin typeface="Calibri"/>
               </a:defRPr>
             </a:pPr>
-          </a:p>
-          <a:p>
-            <a:pPr algn="l">
-              <a:spcBef>
-                <a:spcPts val="600"/>
-              </a:spcBef>
-              <a:defRPr sz="1800" b="1">
-                <a:solidFill>
-                  <a:srgbClr val="4EC9B0"/>
-                </a:solidFill>
-                <a:latin typeface="Calibri"/>
-              </a:defRPr>
-            </a:pPr>
-            <a:r>
-              <a:t>Параметры QoS:</a:t>
-            </a:r>
-          </a:p>
-          <a:p>
-            <a:pPr algn="l">
-              <a:spcBef>
-                <a:spcPts val="600"/>
-              </a:spcBef>
-              <a:defRPr sz="1800" b="0">
-                <a:solidFill>
-                  <a:srgbClr val="E8E8E8"/>
-                </a:solidFill>
-                <a:latin typeface="Calibri"/>
-              </a:defRPr>
-            </a:pPr>
-            <a:r>
-              <a:t>• Сквозная задержка (delay)</a:t>
-            </a:r>
-          </a:p>
-          <a:p>
-            <a:pPr algn="l">
-              <a:spcBef>
-                <a:spcPts val="600"/>
-              </a:spcBef>
-              <a:defRPr sz="1800" b="0">
-                <a:solidFill>
-                  <a:srgbClr val="E8E8E8"/>
-                </a:solidFill>
-                <a:latin typeface="Calibri"/>
-              </a:defRPr>
-            </a:pPr>
-            <a:r>
-              <a:t>• Джиттер</a:t>
-            </a:r>
-          </a:p>
-          <a:p>
-            <a:pPr algn="l">
-              <a:spcBef>
-                <a:spcPts val="600"/>
-              </a:spcBef>
-              <a:defRPr sz="1800" b="0">
-                <a:solidFill>
-                  <a:srgbClr val="E8E8E8"/>
-                </a:solidFill>
-                <a:latin typeface="Calibri"/>
-              </a:defRPr>
-            </a:pPr>
-            <a:r>
-              <a:t>• Потери пакетов (loss ratio)</a:t>
-            </a:r>
-          </a:p>
-          <a:p>
-            <a:pPr algn="l">
-              <a:spcBef>
-                <a:spcPts val="600"/>
-              </a:spcBef>
-              <a:defRPr sz="1800" b="0">
-                <a:solidFill>
-                  <a:srgbClr val="E8E8E8"/>
-                </a:solidFill>
-                <a:latin typeface="Calibri"/>
-              </a:defRPr>
-            </a:pPr>
-            <a:r>
-              <a:t>• Пропускная способность</a:t>
-            </a:r>
-          </a:p>
-          <a:p>
-            <a:pPr algn="l">
-              <a:spcBef>
-                <a:spcPts val="600"/>
-              </a:spcBef>
-              <a:defRPr sz="1800" b="0">
-                <a:solidFill>
-                  <a:srgbClr val="E8E8E8"/>
-                </a:solidFill>
-                <a:latin typeface="Calibri"/>
-              </a:defRPr>
-            </a:pPr>
-          </a:p>
-          <a:p>
-            <a:pPr algn="l">
-              <a:spcBef>
-                <a:spcPts val="600"/>
-              </a:spcBef>
-              <a:defRPr sz="1800" b="1">
-                <a:solidFill>
-                  <a:srgbClr val="4EC9B0"/>
-                </a:solidFill>
-                <a:latin typeface="Calibri"/>
-              </a:defRPr>
-            </a:pPr>
-            <a:r>
-              <a:t>Конфликт критериев:</a:t>
-            </a:r>
-          </a:p>
-          <a:p>
-            <a:pPr algn="l">
-              <a:spcBef>
-                <a:spcPts val="600"/>
-              </a:spcBef>
-              <a:defRPr sz="1800" b="0">
-                <a:solidFill>
-                  <a:srgbClr val="FFD700"/>
-                </a:solidFill>
-                <a:latin typeface="Calibri"/>
-              </a:defRPr>
-            </a:pPr>
-            <a:r>
-              <a:t>QoS ↔ Время жизни сети</a:t>
-            </a:r>
-          </a:p>
-          <a:p>
-            <a:pPr algn="l">
-              <a:spcBef>
-                <a:spcPts val="600"/>
-              </a:spcBef>
-              <a:defRPr sz="1800" b="0">
-                <a:solidFill>
-                  <a:srgbClr val="E8E8E8"/>
-                </a:solidFill>
-                <a:latin typeface="Calibri"/>
-              </a:defRPr>
-            </a:pPr>
-            <a:r>
-              <a:t>→ Многокритериальная оптимизация</a:t>
-            </a:r>
+            <a:r>
+              <a:t>QoS-маршрутизация и балансировка нагрузки</a:t>
+            </a:r>
+          </a:p>
+        </p:txBody>
+      </p:sp>
+      <p:sp>
+        <p:nvSpPr>
+          <p:cNvPr id="4" name="Rectangle 3"/>
+          <p:cNvSpPr/>
+          <p:nvPr/>
+        </p:nvSpPr>
+        <p:spPr>
+          <a:xfrm>
+            <a:off x="731520" y="6446520"/>
+            <a:ext cx="10698480" cy="12700"/>
+          </a:xfrm>
+          <a:prstGeom prst="rect">
+            <a:avLst/>
+          </a:prstGeom>
+          <a:solidFill>
+            <a:srgbClr val="CCCCCC"/>
+          </a:solidFill>
+          <a:ln>
+            <a:noFill/>
+          </a:ln>
+        </p:spPr>
+        <p:style>
+          <a:lnRef idx="1">
+            <a:schemeClr val="accent1"/>
+          </a:lnRef>
+          <a:fillRef idx="3">
+            <a:schemeClr val="accent1"/>
+          </a:fillRef>
+          <a:effectRef idx="2">
+            <a:schemeClr val="accent1"/>
+          </a:effectRef>
+          <a:fontRef idx="minor">
+            <a:schemeClr val="lt1"/>
+          </a:fontRef>
+        </p:style>
+        <p:txBody>
+          <a:bodyPr rtlCol="0" anchor="ctr"/>
+          <a:lstStyle/>
+          <a:p>
+            <a:pPr algn="ctr"/>
           </a:p>
         </p:txBody>
       </p:sp>
@@ -5685,8 +8154,8 @@
         </p:nvSpPr>
         <p:spPr>
           <a:xfrm>
-            <a:off x="6400800" y="1371600"/>
-            <a:ext cx="5303520" cy="5029200"/>
+            <a:off x="11155680" y="6446520"/>
+            <a:ext cx="731520" cy="320040"/>
           </a:xfrm>
           <a:prstGeom prst="rect">
             <a:avLst/>
@@ -5699,10 +8168,46 @@
           </a:bodyPr>
           <a:lstStyle/>
           <a:p>
+            <a:pPr algn="r">
+              <a:defRPr sz="1100" b="0">
+                <a:solidFill>
+                  <a:srgbClr val="666666"/>
+                </a:solidFill>
+                <a:latin typeface="Calibri"/>
+              </a:defRPr>
+            </a:pPr>
+            <a:r>
+              <a:t>6</a:t>
+            </a:r>
+          </a:p>
+        </p:txBody>
+      </p:sp>
+      <p:sp>
+        <p:nvSpPr>
+          <p:cNvPr id="6" name="TextBox 5"/>
+          <p:cNvSpPr txBox="1"/>
+          <p:nvPr/>
+        </p:nvSpPr>
+        <p:spPr>
+          <a:xfrm>
+            <a:off x="731520" y="1188720"/>
+            <a:ext cx="5303520" cy="2743200"/>
+          </a:xfrm>
+          <a:prstGeom prst="rect">
+            <a:avLst/>
+          </a:prstGeom>
+          <a:noFill/>
+        </p:spPr>
+        <p:txBody>
+          <a:bodyPr wrap="square">
+            <a:spAutoFit/>
+          </a:bodyPr>
+          <a:lstStyle/>
+          <a:p>
             <a:pPr algn="l">
-              <a:defRPr sz="1800" b="0">
-                <a:solidFill>
-                  <a:srgbClr val="E8E8E8"/>
+              <a:defRPr sz="1700" b="0">
+                <a:solidFill>
+                  <a:srgbClr val="2D2D2D"/>
                 </a:solidFill>
                 <a:latin typeface="Calibri"/>
               </a:defRPr>
@@ -5711,178 +8216,263 @@
           <a:p>
             <a:pPr algn="l">
               <a:spcBef>
-                <a:spcPts val="600"/>
+                <a:spcPts val="200"/>
               </a:spcBef>
-              <a:defRPr sz="1800" b="1">
-                <a:solidFill>
-                  <a:srgbClr val="4EC9B0"/>
+              <a:defRPr sz="1900" b="1">
+                <a:solidFill>
+                  <a:srgbClr val="1A478A"/>
                 </a:solidFill>
                 <a:latin typeface="Calibri"/>
               </a:defRPr>
             </a:pPr>
             <a:r>
-              <a:t>Балансировка нагрузки:</a:t>
+              <a:t>Параметры QoS</a:t>
             </a:r>
           </a:p>
           <a:p>
             <a:pPr algn="l">
               <a:spcBef>
-                <a:spcPts val="600"/>
+                <a:spcPts val="800"/>
               </a:spcBef>
-              <a:defRPr sz="1800" b="0">
-                <a:solidFill>
-                  <a:srgbClr val="E8E8E8"/>
+              <a:defRPr sz="1700" b="0">
+                <a:solidFill>
+                  <a:srgbClr val="2D2D2D"/>
                 </a:solidFill>
                 <a:latin typeface="Calibri"/>
               </a:defRPr>
             </a:pPr>
             <a:r>
-              <a:t>• «Эффект воронки» — перегрузка</a:t>
+              <a:t>- Сквозная задержка (end-to-end delay)</a:t>
             </a:r>
           </a:p>
           <a:p>
             <a:pPr algn="l">
               <a:spcBef>
-                <a:spcPts val="600"/>
+                <a:spcPts val="500"/>
               </a:spcBef>
-              <a:defRPr sz="1800" b="0">
-                <a:solidFill>
-                  <a:srgbClr val="E8E8E8"/>
+              <a:defRPr sz="1700" b="0">
+                <a:solidFill>
+                  <a:srgbClr val="2D2D2D"/>
                 </a:solidFill>
                 <a:latin typeface="Calibri"/>
               </a:defRPr>
             </a:pPr>
             <a:r>
-              <a:t>  узлов вблизи базовой станции</a:t>
+              <a:t>- Джиттер (вариация задержки)</a:t>
             </a:r>
           </a:p>
           <a:p>
             <a:pPr algn="l">
               <a:spcBef>
-                <a:spcPts val="600"/>
+                <a:spcPts val="500"/>
               </a:spcBef>
-              <a:defRPr sz="1800" b="0">
-                <a:solidFill>
-                  <a:srgbClr val="E8E8E8"/>
+              <a:defRPr sz="1700" b="0">
+                <a:solidFill>
+                  <a:srgbClr val="2D2D2D"/>
                 </a:solidFill>
                 <a:latin typeface="Calibri"/>
               </a:defRPr>
             </a:pPr>
             <a:r>
-              <a:t>• Многопутевая маршрутизация</a:t>
+              <a:t>- Коэффициент потерь пакетов</a:t>
             </a:r>
           </a:p>
           <a:p>
             <a:pPr algn="l">
               <a:spcBef>
-                <a:spcPts val="600"/>
+                <a:spcPts val="500"/>
               </a:spcBef>
-              <a:defRPr sz="1800" b="0">
-                <a:solidFill>
-                  <a:srgbClr val="E8E8E8"/>
+              <a:defRPr sz="1700" b="0">
+                <a:solidFill>
+                  <a:srgbClr val="2D2D2D"/>
                 </a:solidFill>
                 <a:latin typeface="Calibri"/>
               </a:defRPr>
             </a:pPr>
             <a:r>
-              <a:t>• Избыточные шлюзы</a:t>
-            </a:r>
+              <a:t>- Пропускная способность</a:t>
+            </a:r>
+          </a:p>
+        </p:txBody>
+      </p:sp>
+      <p:sp>
+        <p:nvSpPr>
+          <p:cNvPr id="7" name="TextBox 6"/>
+          <p:cNvSpPr txBox="1"/>
+          <p:nvPr/>
+        </p:nvSpPr>
+        <p:spPr>
+          <a:xfrm>
+            <a:off x="6400800" y="1188720"/>
+            <a:ext cx="5303520" cy="2743200"/>
+          </a:xfrm>
+          <a:prstGeom prst="rect">
+            <a:avLst/>
+          </a:prstGeom>
+          <a:noFill/>
+        </p:spPr>
+        <p:txBody>
+          <a:bodyPr wrap="square">
+            <a:spAutoFit/>
+          </a:bodyPr>
+          <a:lstStyle/>
+          <a:p>
+            <a:pPr algn="l">
+              <a:defRPr sz="1700" b="0">
+                <a:solidFill>
+                  <a:srgbClr val="2D2D2D"/>
+                </a:solidFill>
+                <a:latin typeface="Calibri"/>
+              </a:defRPr>
+            </a:pPr>
           </a:p>
           <a:p>
             <a:pPr algn="l">
               <a:spcBef>
-                <a:spcPts val="600"/>
+                <a:spcPts val="200"/>
               </a:spcBef>
-              <a:defRPr sz="1800" b="0">
-                <a:solidFill>
-                  <a:srgbClr val="E8E8E8"/>
+              <a:defRPr sz="1900" b="1">
+                <a:solidFill>
+                  <a:srgbClr val="1A478A"/>
                 </a:solidFill>
                 <a:latin typeface="Calibri"/>
               </a:defRPr>
             </a:pPr>
             <a:r>
-              <a:t>• Адаптивное перераспределение</a:t>
+              <a:t>Балансировка нагрузки</a:t>
             </a:r>
           </a:p>
           <a:p>
             <a:pPr algn="l">
               <a:spcBef>
-                <a:spcPts val="600"/>
+                <a:spcPts val="800"/>
               </a:spcBef>
-              <a:defRPr sz="1800" b="0">
-                <a:solidFill>
-                  <a:srgbClr val="E8E8E8"/>
+              <a:defRPr sz="1700" b="0">
+                <a:solidFill>
+                  <a:srgbClr val="2D2D2D"/>
                 </a:solidFill>
                 <a:latin typeface="Calibri"/>
               </a:defRPr>
             </a:pPr>
+            <a:r>
+              <a:t>- «Эффект воронки» — перегрузка узлов</a:t>
+            </a:r>
           </a:p>
           <a:p>
             <a:pPr algn="l">
               <a:spcBef>
-                <a:spcPts val="600"/>
+                <a:spcPts val="200"/>
               </a:spcBef>
-              <a:defRPr sz="1800" b="1">
-                <a:solidFill>
-                  <a:srgbClr val="4EC9B0"/>
+              <a:defRPr sz="1700" b="0">
+                <a:solidFill>
+                  <a:srgbClr val="2D2D2D"/>
                 </a:solidFill>
                 <a:latin typeface="Calibri"/>
               </a:defRPr>
             </a:pPr>
             <a:r>
-              <a:t>Протоколы QoS:</a:t>
+              <a:t>   вблизи базовой станции</a:t>
             </a:r>
           </a:p>
           <a:p>
             <a:pPr algn="l">
               <a:spcBef>
-                <a:spcPts val="600"/>
+                <a:spcPts val="500"/>
               </a:spcBef>
-              <a:defRPr sz="1800" b="0">
-                <a:solidFill>
-                  <a:srgbClr val="FFD700"/>
+              <a:defRPr sz="1700" b="0">
+                <a:solidFill>
+                  <a:srgbClr val="2D2D2D"/>
                 </a:solidFill>
                 <a:latin typeface="Calibri"/>
               </a:defRPr>
             </a:pPr>
             <a:r>
-              <a:t>SPEED, MMSPEED, SAR</a:t>
-            </a:r>
-          </a:p>
-        </p:txBody>
-      </p:sp>
-      <p:sp>
-        <p:nvSpPr>
-          <p:cNvPr id="6" name="TextBox 5"/>
-          <p:cNvSpPr txBox="1"/>
-          <p:nvPr/>
-        </p:nvSpPr>
-        <p:spPr>
-          <a:xfrm>
-            <a:off x="11430000" y="6400800"/>
-            <a:ext cx="640080" cy="365760"/>
-          </a:xfrm>
-          <a:prstGeom prst="rect">
-            <a:avLst/>
-          </a:prstGeom>
-          <a:noFill/>
-        </p:spPr>
-        <p:txBody>
-          <a:bodyPr wrap="none">
-            <a:spAutoFit/>
-          </a:bodyPr>
-          <a:lstStyle/>
-          <a:p>
-            <a:pPr algn="r">
-              <a:defRPr sz="1200">
-                <a:solidFill>
-                  <a:srgbClr val="8888AA"/>
+              <a:t>- Многопутевая маршрутизация</a:t>
+            </a:r>
+          </a:p>
+          <a:p>
+            <a:pPr algn="l">
+              <a:spcBef>
+                <a:spcPts val="500"/>
+              </a:spcBef>
+              <a:defRPr sz="1700" b="0">
+                <a:solidFill>
+                  <a:srgbClr val="2D2D2D"/>
                 </a:solidFill>
                 <a:latin typeface="Calibri"/>
               </a:defRPr>
             </a:pPr>
             <a:r>
-              <a:t>6</a:t>
+              <a:t>- Использование избыточных шлюзов</a:t>
+            </a:r>
+          </a:p>
+        </p:txBody>
+      </p:sp>
+      <p:sp>
+        <p:nvSpPr>
+          <p:cNvPr id="8" name="Rounded Rectangle 7"/>
+          <p:cNvSpPr/>
+          <p:nvPr/>
+        </p:nvSpPr>
+        <p:spPr>
+          <a:xfrm>
+            <a:off x="1371600" y="4389120"/>
+            <a:ext cx="9418320" cy="1097280"/>
+          </a:xfrm>
+          <a:prstGeom prst="roundRect">
+            <a:avLst/>
+          </a:prstGeom>
+          <a:solidFill>
+            <a:srgbClr val="EBF5FB"/>
+          </a:solidFill>
+          <a:ln w="19050">
+            <a:solidFill>
+              <a:srgbClr val="1A478A"/>
+            </a:solidFill>
+          </a:ln>
+        </p:spPr>
+        <p:style>
+          <a:lnRef idx="1">
+            <a:schemeClr val="accent1"/>
+          </a:lnRef>
+          <a:fillRef idx="3">
+            <a:schemeClr val="accent1"/>
+          </a:fillRef>
+          <a:effectRef idx="2">
+            <a:schemeClr val="accent1"/>
+          </a:effectRef>
+          <a:fontRef idx="minor">
+            <a:schemeClr val="lt1"/>
+          </a:fontRef>
+        </p:style>
+        <p:txBody>
+          <a:bodyPr rtlCol="0" anchor="ctr" wrap="square"/>
+          <a:lstStyle/>
+          <a:p>
+            <a:pPr algn="ctr">
+              <a:defRPr sz="1700">
+                <a:solidFill>
+                  <a:srgbClr val="1A478A"/>
+                </a:solidFill>
+              </a:defRPr>
+            </a:pPr>
+            <a:r>
+              <a:t>Конфликт: обеспечение QoS требует лучших каналов, но их интенсивное использование ускоряет расход энергии.</a:t>
+            </a:r>
+          </a:p>
+          <a:p>
+            <a:pPr algn="ctr">
+              <a:spcBef>
+                <a:spcPts val="400"/>
+              </a:spcBef>
+              <a:defRPr sz="1600" b="1">
+                <a:solidFill>
+                  <a:srgbClr val="167F72"/>
+                </a:solidFill>
+              </a:defRPr>
+            </a:pPr>
+            <a:r>
+              <a:t>Протоколы: SPEED, MMSPEED, SAR</a:t>
             </a:r>
           </a:p>
         </p:txBody>
@@ -5898,14 +8488,6 @@
 <file path=ppt/slides/slide7.xml><?xml version="1.0" encoding="utf-8"?>
 <p:sld xmlns:a="http://schemas.openxmlformats.org/drawingml/2006/main" xmlns:p="http://schemas.openxmlformats.org/presentationml/2006/main" xmlns:r="http://schemas.openxmlformats.org/officeDocument/2006/relationships">
   <p:cSld>
-    <p:bg>
-      <p:bgPr>
-        <a:solidFill>
-          <a:srgbClr val="1B2A4A"/>
-        </a:solidFill>
-        <a:effectLst/>
-      </p:bgPr>
-    </p:bg>
     <p:spTree>
       <p:nvGrpSpPr>
         <p:cNvPr id="1" name=""/>
@@ -5915,56 +8497,20 @@
       <p:grpSpPr/>
       <p:sp>
         <p:nvSpPr>
-          <p:cNvPr id="2" name="TextBox 1"/>
-          <p:cNvSpPr txBox="1"/>
-          <p:nvPr/>
-        </p:nvSpPr>
-        <p:spPr>
-          <a:xfrm>
-            <a:off x="731520" y="365760"/>
-            <a:ext cx="10698480" cy="640080"/>
+          <p:cNvPr id="2" name="Rectangle 1"/>
+          <p:cNvSpPr/>
+          <p:nvPr/>
+        </p:nvSpPr>
+        <p:spPr>
+          <a:xfrm>
+            <a:off x="0" y="0"/>
+            <a:ext cx="12191695" cy="76200"/>
           </a:xfrm>
           <a:prstGeom prst="rect">
             <a:avLst/>
           </a:prstGeom>
-          <a:noFill/>
-        </p:spPr>
-        <p:txBody>
-          <a:bodyPr wrap="square">
-            <a:spAutoFit/>
-          </a:bodyPr>
-          <a:lstStyle/>
-          <a:p>
-            <a:pPr algn="l">
-              <a:defRPr sz="3200" b="1">
-                <a:solidFill>
-                  <a:srgbClr val="FFFFFF"/>
-                </a:solidFill>
-                <a:latin typeface="Calibri"/>
-              </a:defRPr>
-            </a:pPr>
-            <a:r>
-              <a:t>Подходы к многокритериальной маршрутизации</a:t>
-            </a:r>
-          </a:p>
-        </p:txBody>
-      </p:sp>
-      <p:sp>
-        <p:nvSpPr>
-          <p:cNvPr id="3" name="Rectangle 2"/>
-          <p:cNvSpPr/>
-          <p:nvPr/>
-        </p:nvSpPr>
-        <p:spPr>
-          <a:xfrm>
-            <a:off x="731520" y="1005840"/>
-            <a:ext cx="1828800" cy="50800"/>
-          </a:xfrm>
-          <a:prstGeom prst="rect">
-            <a:avLst/>
-          </a:prstGeom>
           <a:solidFill>
-            <a:srgbClr val="4EC9B0"/>
+            <a:srgbClr val="1A478A"/>
           </a:solidFill>
           <a:ln>
             <a:noFill/>
@@ -5994,14 +8540,14 @@
       </p:sp>
       <p:sp>
         <p:nvSpPr>
-          <p:cNvPr id="4" name="TextBox 3"/>
+          <p:cNvPr id="3" name="TextBox 2"/>
           <p:cNvSpPr txBox="1"/>
           <p:nvPr/>
         </p:nvSpPr>
         <p:spPr>
           <a:xfrm>
-            <a:off x="731520" y="1371600"/>
-            <a:ext cx="3474720" cy="457200"/>
+            <a:off x="731520" y="274320"/>
+            <a:ext cx="10698480" cy="731520"/>
           </a:xfrm>
           <a:prstGeom prst="rect">
             <a:avLst/>
@@ -6014,17 +8560,60 @@
           </a:bodyPr>
           <a:lstStyle/>
           <a:p>
-            <a:pPr algn="ctr">
-              <a:defRPr sz="2200" b="1">
-                <a:solidFill>
-                  <a:srgbClr val="4EC9B0"/>
+            <a:pPr algn="l">
+              <a:defRPr sz="2800" b="1">
+                <a:solidFill>
+                  <a:srgbClr val="1A478A"/>
                 </a:solidFill>
                 <a:latin typeface="Calibri"/>
               </a:defRPr>
             </a:pPr>
             <a:r>
-              <a:t>Свёртка критериев</a:t>
-            </a:r>
+              <a:t>Подходы к многокритериальной маршрутизации</a:t>
+            </a:r>
+          </a:p>
+        </p:txBody>
+      </p:sp>
+      <p:sp>
+        <p:nvSpPr>
+          <p:cNvPr id="4" name="Rectangle 3"/>
+          <p:cNvSpPr/>
+          <p:nvPr/>
+        </p:nvSpPr>
+        <p:spPr>
+          <a:xfrm>
+            <a:off x="731520" y="6446520"/>
+            <a:ext cx="10698480" cy="12700"/>
+          </a:xfrm>
+          <a:prstGeom prst="rect">
+            <a:avLst/>
+          </a:prstGeom>
+          <a:solidFill>
+            <a:srgbClr val="CCCCCC"/>
+          </a:solidFill>
+          <a:ln>
+            <a:noFill/>
+          </a:ln>
+        </p:spPr>
+        <p:style>
+          <a:lnRef idx="1">
+            <a:schemeClr val="accent1"/>
+          </a:lnRef>
+          <a:fillRef idx="3">
+            <a:schemeClr val="accent1"/>
+          </a:fillRef>
+          <a:effectRef idx="2">
+            <a:schemeClr val="accent1"/>
+          </a:effectRef>
+          <a:fontRef idx="minor">
+            <a:schemeClr val="lt1"/>
+          </a:fontRef>
+        </p:style>
+        <p:txBody>
+          <a:bodyPr rtlCol="0" anchor="ctr"/>
+          <a:lstStyle/>
+          <a:p>
+            <a:pPr algn="ctr"/>
           </a:p>
         </p:txBody>
       </p:sp>
@@ -6036,8 +8625,8 @@
         </p:nvSpPr>
         <p:spPr>
           <a:xfrm>
-            <a:off x="731520" y="2011680"/>
-            <a:ext cx="3474720" cy="4114800"/>
+            <a:off x="11155680" y="6446520"/>
+            <a:ext cx="731520" cy="320040"/>
           </a:xfrm>
           <a:prstGeom prst="rect">
             <a:avLst/>
@@ -6050,91 +8639,75 @@
           </a:bodyPr>
           <a:lstStyle/>
           <a:p>
-            <a:pPr algn="l">
-              <a:defRPr sz="1700" b="0">
-                <a:solidFill>
-                  <a:srgbClr val="E8E8E8"/>
+            <a:pPr algn="r">
+              <a:defRPr sz="1100" b="0">
+                <a:solidFill>
+                  <a:srgbClr val="666666"/>
                 </a:solidFill>
                 <a:latin typeface="Calibri"/>
               </a:defRPr>
             </a:pPr>
-          </a:p>
-          <a:p>
-            <a:pPr algn="l">
-              <a:spcBef>
-                <a:spcPts val="800"/>
-              </a:spcBef>
-              <a:defRPr sz="1700" b="0">
-                <a:solidFill>
-                  <a:srgbClr val="E8E8E8"/>
-                </a:solidFill>
-                <a:latin typeface="Calibri"/>
-              </a:defRPr>
-            </a:pPr>
-            <a:r>
-              <a:t>• F(P) = Σ wₖ·fₖ(P)</a:t>
-            </a:r>
-          </a:p>
-          <a:p>
-            <a:pPr algn="l">
-              <a:spcBef>
-                <a:spcPts val="800"/>
-              </a:spcBef>
-              <a:defRPr sz="1700" b="0">
-                <a:solidFill>
-                  <a:srgbClr val="E8E8E8"/>
-                </a:solidFill>
-                <a:latin typeface="Calibri"/>
-              </a:defRPr>
-            </a:pPr>
-            <a:r>
-              <a:t>• Алгоритмы Дейкстры, Флойда</a:t>
-            </a:r>
-          </a:p>
-          <a:p>
-            <a:pPr algn="l">
-              <a:spcBef>
-                <a:spcPts val="800"/>
-              </a:spcBef>
-              <a:defRPr sz="1700" b="0">
-                <a:solidFill>
-                  <a:srgbClr val="E8E8E8"/>
-                </a:solidFill>
-                <a:latin typeface="Calibri"/>
-              </a:defRPr>
-            </a:pPr>
-            <a:r>
-              <a:t>• Метод ε-ограничений</a:t>
-            </a:r>
-          </a:p>
-          <a:p>
-            <a:pPr algn="l">
-              <a:spcBef>
-                <a:spcPts val="800"/>
-              </a:spcBef>
-              <a:defRPr sz="1700" b="0">
-                <a:solidFill>
-                  <a:srgbClr val="E8E8E8"/>
-                </a:solidFill>
-                <a:latin typeface="Calibri"/>
-              </a:defRPr>
-            </a:pPr>
-            <a:r>
-              <a:t>• Анализ иерархий (AHP)</a:t>
-            </a:r>
-          </a:p>
-        </p:txBody>
-      </p:sp>
-      <p:sp>
-        <p:nvSpPr>
-          <p:cNvPr id="6" name="TextBox 5"/>
+            <a:r>
+              <a:t>7</a:t>
+            </a:r>
+          </a:p>
+        </p:txBody>
+      </p:sp>
+      <p:sp>
+        <p:nvSpPr>
+          <p:cNvPr id="6" name="Rounded Rectangle 5"/>
+          <p:cNvSpPr/>
+          <p:nvPr/>
+        </p:nvSpPr>
+        <p:spPr>
+          <a:xfrm>
+            <a:off x="731520" y="1188720"/>
+            <a:ext cx="3383280" cy="4389120"/>
+          </a:xfrm>
+          <a:prstGeom prst="roundRect">
+            <a:avLst/>
+          </a:prstGeom>
+          <a:solidFill>
+            <a:srgbClr val="EBF5FB"/>
+          </a:solidFill>
+          <a:ln w="12700">
+            <a:solidFill>
+              <a:srgbClr val="DDDDDD"/>
+            </a:solidFill>
+          </a:ln>
+        </p:spPr>
+        <p:style>
+          <a:lnRef idx="1">
+            <a:schemeClr val="accent1"/>
+          </a:lnRef>
+          <a:fillRef idx="3">
+            <a:schemeClr val="accent1"/>
+          </a:fillRef>
+          <a:effectRef idx="2">
+            <a:schemeClr val="accent1"/>
+          </a:effectRef>
+          <a:fontRef idx="minor">
+            <a:schemeClr val="lt1"/>
+          </a:fontRef>
+        </p:style>
+        <p:txBody>
+          <a:bodyPr rtlCol="0" anchor="ctr"/>
+          <a:lstStyle/>
+          <a:p>
+            <a:pPr algn="ctr"/>
+          </a:p>
+        </p:txBody>
+      </p:sp>
+      <p:sp>
+        <p:nvSpPr>
+          <p:cNvPr id="7" name="TextBox 6"/>
           <p:cNvSpPr txBox="1"/>
           <p:nvPr/>
         </p:nvSpPr>
         <p:spPr>
           <a:xfrm>
-            <a:off x="4572000" y="1371600"/>
-            <a:ext cx="3474720" cy="457200"/>
+            <a:off x="914400" y="1371600"/>
+            <a:ext cx="3017520" cy="457200"/>
           </a:xfrm>
           <a:prstGeom prst="rect">
             <a:avLst/>
@@ -6148,29 +8721,29 @@
           <a:lstStyle/>
           <a:p>
             <a:pPr algn="ctr">
-              <a:defRPr sz="2200" b="1">
-                <a:solidFill>
-                  <a:srgbClr val="4EC9B0"/>
+              <a:defRPr sz="2000" b="1">
+                <a:solidFill>
+                  <a:srgbClr val="1A478A"/>
                 </a:solidFill>
                 <a:latin typeface="Calibri"/>
               </a:defRPr>
             </a:pPr>
             <a:r>
-              <a:t>Эволюционные методы</a:t>
-            </a:r>
-          </a:p>
-        </p:txBody>
-      </p:sp>
-      <p:sp>
-        <p:nvSpPr>
-          <p:cNvPr id="7" name="TextBox 6"/>
+              <a:t>Свёртка критериев</a:t>
+            </a:r>
+          </a:p>
+        </p:txBody>
+      </p:sp>
+      <p:sp>
+        <p:nvSpPr>
+          <p:cNvPr id="8" name="TextBox 7"/>
           <p:cNvSpPr txBox="1"/>
           <p:nvPr/>
         </p:nvSpPr>
         <p:spPr>
           <a:xfrm>
-            <a:off x="4572000" y="2011680"/>
-            <a:ext cx="3474720" cy="4114800"/>
+            <a:off x="1005840" y="2103120"/>
+            <a:ext cx="2834640" cy="3200400"/>
           </a:xfrm>
           <a:prstGeom prst="rect">
             <a:avLst/>
@@ -6184,9 +8757,9 @@
           <a:lstStyle/>
           <a:p>
             <a:pPr algn="l">
-              <a:defRPr sz="1700" b="0">
-                <a:solidFill>
-                  <a:srgbClr val="E8E8E8"/>
+              <a:defRPr sz="1600" b="0">
+                <a:solidFill>
+                  <a:srgbClr val="2D2D2D"/>
                 </a:solidFill>
                 <a:latin typeface="Calibri"/>
               </a:defRPr>
@@ -6195,79 +8768,108 @@
           <a:p>
             <a:pPr algn="l">
               <a:spcBef>
-                <a:spcPts val="800"/>
+                <a:spcPts val="1000"/>
               </a:spcBef>
-              <a:defRPr sz="1700" b="0">
-                <a:solidFill>
-                  <a:srgbClr val="E8E8E8"/>
+              <a:defRPr sz="1600" b="0">
+                <a:solidFill>
+                  <a:srgbClr val="2D2D2D"/>
                 </a:solidFill>
                 <a:latin typeface="Calibri"/>
               </a:defRPr>
             </a:pPr>
             <a:r>
-              <a:t>• NSGA-II (Парето-фронт)</a:t>
+              <a:t>- F(P) = sum(wk * fk(P))</a:t>
             </a:r>
           </a:p>
           <a:p>
             <a:pPr algn="l">
               <a:spcBef>
-                <a:spcPts val="800"/>
+                <a:spcPts val="1000"/>
               </a:spcBef>
-              <a:defRPr sz="1700" b="0">
-                <a:solidFill>
-                  <a:srgbClr val="E8E8E8"/>
+              <a:defRPr sz="1600" b="0">
+                <a:solidFill>
+                  <a:srgbClr val="2D2D2D"/>
                 </a:solidFill>
                 <a:latin typeface="Calibri"/>
               </a:defRPr>
             </a:pPr>
             <a:r>
-              <a:t>• ACO (муравьиная колония)</a:t>
+              <a:t>- Алгоритмы Дейкстры, Флойда</a:t>
             </a:r>
           </a:p>
           <a:p>
             <a:pPr algn="l">
               <a:spcBef>
-                <a:spcPts val="800"/>
+                <a:spcPts val="1000"/>
               </a:spcBef>
-              <a:defRPr sz="1700" b="0">
-                <a:solidFill>
-                  <a:srgbClr val="E8E8E8"/>
+              <a:defRPr sz="1600" b="0">
+                <a:solidFill>
+                  <a:srgbClr val="2D2D2D"/>
                 </a:solidFill>
                 <a:latin typeface="Calibri"/>
               </a:defRPr>
             </a:pPr>
             <a:r>
-              <a:t>• PSO (рой частиц)</a:t>
-            </a:r>
-          </a:p>
-          <a:p>
-            <a:pPr algn="l">
-              <a:spcBef>
-                <a:spcPts val="800"/>
-              </a:spcBef>
-              <a:defRPr sz="1700" b="0">
-                <a:solidFill>
-                  <a:srgbClr val="E8E8E8"/>
-                </a:solidFill>
-                <a:latin typeface="Calibri"/>
-              </a:defRPr>
-            </a:pPr>
-            <a:r>
-              <a:t>• Распределённое выполнение</a:t>
-            </a:r>
-          </a:p>
-        </p:txBody>
-      </p:sp>
-      <p:sp>
-        <p:nvSpPr>
-          <p:cNvPr id="8" name="TextBox 7"/>
+              <a:t>- Метод анализа иерархий</a:t>
+            </a:r>
+          </a:p>
+        </p:txBody>
+      </p:sp>
+      <p:sp>
+        <p:nvSpPr>
+          <p:cNvPr id="9" name="Rounded Rectangle 8"/>
+          <p:cNvSpPr/>
+          <p:nvPr/>
+        </p:nvSpPr>
+        <p:spPr>
+          <a:xfrm>
+            <a:off x="4480559" y="1188720"/>
+            <a:ext cx="3383280" cy="4389120"/>
+          </a:xfrm>
+          <a:prstGeom prst="roundRect">
+            <a:avLst/>
+          </a:prstGeom>
+          <a:solidFill>
+            <a:srgbClr val="E8F8F5"/>
+          </a:solidFill>
+          <a:ln w="12700">
+            <a:solidFill>
+              <a:srgbClr val="DDDDDD"/>
+            </a:solidFill>
+          </a:ln>
+        </p:spPr>
+        <p:style>
+          <a:lnRef idx="1">
+            <a:schemeClr val="accent1"/>
+          </a:lnRef>
+          <a:fillRef idx="3">
+            <a:schemeClr val="accent1"/>
+          </a:fillRef>
+          <a:effectRef idx="2">
+            <a:schemeClr val="accent1"/>
+          </a:effectRef>
+          <a:fontRef idx="minor">
+            <a:schemeClr val="lt1"/>
+          </a:fontRef>
+        </p:style>
+        <p:txBody>
+          <a:bodyPr rtlCol="0" anchor="ctr"/>
+          <a:lstStyle/>
+          <a:p>
+            <a:pPr algn="ctr"/>
+          </a:p>
+        </p:txBody>
+      </p:sp>
+      <p:sp>
+        <p:nvSpPr>
+          <p:cNvPr id="10" name="TextBox 9"/>
           <p:cNvSpPr txBox="1"/>
           <p:nvPr/>
         </p:nvSpPr>
         <p:spPr>
           <a:xfrm>
-            <a:off x="8412480" y="1371600"/>
-            <a:ext cx="3474720" cy="457200"/>
+            <a:off x="4663440" y="1371600"/>
+            <a:ext cx="3017520" cy="457200"/>
           </a:xfrm>
           <a:prstGeom prst="rect">
             <a:avLst/>
@@ -6281,29 +8883,29 @@
           <a:lstStyle/>
           <a:p>
             <a:pPr algn="ctr">
-              <a:defRPr sz="2200" b="1">
-                <a:solidFill>
-                  <a:srgbClr val="4EC9B0"/>
+              <a:defRPr sz="2000" b="1">
+                <a:solidFill>
+                  <a:srgbClr val="167F72"/>
                 </a:solidFill>
                 <a:latin typeface="Calibri"/>
               </a:defRPr>
             </a:pPr>
             <a:r>
-              <a:t>Машинное обучение</a:t>
-            </a:r>
-          </a:p>
-        </p:txBody>
-      </p:sp>
-      <p:sp>
-        <p:nvSpPr>
-          <p:cNvPr id="9" name="TextBox 8"/>
+              <a:t>Эволюционные методы</a:t>
+            </a:r>
+          </a:p>
+        </p:txBody>
+      </p:sp>
+      <p:sp>
+        <p:nvSpPr>
+          <p:cNvPr id="11" name="TextBox 10"/>
           <p:cNvSpPr txBox="1"/>
           <p:nvPr/>
         </p:nvSpPr>
         <p:spPr>
           <a:xfrm>
-            <a:off x="8412480" y="2011680"/>
-            <a:ext cx="3474720" cy="4114800"/>
+            <a:off x="4754879" y="2103120"/>
+            <a:ext cx="2834640" cy="3200400"/>
           </a:xfrm>
           <a:prstGeom prst="rect">
             <a:avLst/>
@@ -6317,9 +8919,9 @@
           <a:lstStyle/>
           <a:p>
             <a:pPr algn="l">
-              <a:defRPr sz="1700" b="0">
-                <a:solidFill>
-                  <a:srgbClr val="E8E8E8"/>
+              <a:defRPr sz="1600" b="0">
+                <a:solidFill>
+                  <a:srgbClr val="2D2D2D"/>
                 </a:solidFill>
                 <a:latin typeface="Calibri"/>
               </a:defRPr>
@@ -6328,101 +8930,211 @@
           <a:p>
             <a:pPr algn="l">
               <a:spcBef>
-                <a:spcPts val="800"/>
+                <a:spcPts val="1000"/>
               </a:spcBef>
-              <a:defRPr sz="1700" b="0">
-                <a:solidFill>
-                  <a:srgbClr val="E8E8E8"/>
+              <a:defRPr sz="1600" b="0">
+                <a:solidFill>
+                  <a:srgbClr val="2D2D2D"/>
                 </a:solidFill>
                 <a:latin typeface="Calibri"/>
               </a:defRPr>
             </a:pPr>
             <a:r>
-              <a:t>• Q-обучение / DQN</a:t>
+              <a:t>- NSGA-II (Парето-фронт)</a:t>
             </a:r>
           </a:p>
           <a:p>
             <a:pPr algn="l">
               <a:spcBef>
-                <a:spcPts val="800"/>
+                <a:spcPts val="1000"/>
               </a:spcBef>
-              <a:defRPr sz="1700" b="0">
-                <a:solidFill>
-                  <a:srgbClr val="E8E8E8"/>
+              <a:defRPr sz="1600" b="0">
+                <a:solidFill>
+                  <a:srgbClr val="2D2D2D"/>
                 </a:solidFill>
                 <a:latin typeface="Calibri"/>
               </a:defRPr>
             </a:pPr>
             <a:r>
-              <a:t>• Адаптация к динамике</a:t>
+              <a:t>- ACO (муравьиная колония)</a:t>
             </a:r>
           </a:p>
           <a:p>
             <a:pPr algn="l">
               <a:spcBef>
-                <a:spcPts val="800"/>
+                <a:spcPts val="1000"/>
               </a:spcBef>
-              <a:defRPr sz="1700" b="0">
-                <a:solidFill>
-                  <a:srgbClr val="E8E8E8"/>
+              <a:defRPr sz="1600" b="0">
+                <a:solidFill>
+                  <a:srgbClr val="2D2D2D"/>
                 </a:solidFill>
                 <a:latin typeface="Calibri"/>
               </a:defRPr>
             </a:pPr>
             <a:r>
-              <a:t>• Федеративное обучение</a:t>
-            </a:r>
+              <a:t>- PSO (рой частиц)</a:t>
+            </a:r>
+          </a:p>
+        </p:txBody>
+      </p:sp>
+      <p:sp>
+        <p:nvSpPr>
+          <p:cNvPr id="12" name="Rounded Rectangle 11"/>
+          <p:cNvSpPr/>
+          <p:nvPr/>
+        </p:nvSpPr>
+        <p:spPr>
+          <a:xfrm>
+            <a:off x="8229600" y="1188720"/>
+            <a:ext cx="3383280" cy="4389120"/>
+          </a:xfrm>
+          <a:prstGeom prst="roundRect">
+            <a:avLst/>
+          </a:prstGeom>
+          <a:solidFill>
+            <a:srgbClr val="FDEDED"/>
+          </a:solidFill>
+          <a:ln w="12700">
+            <a:solidFill>
+              <a:srgbClr val="DDDDDD"/>
+            </a:solidFill>
+          </a:ln>
+        </p:spPr>
+        <p:style>
+          <a:lnRef idx="1">
+            <a:schemeClr val="accent1"/>
+          </a:lnRef>
+          <a:fillRef idx="3">
+            <a:schemeClr val="accent1"/>
+          </a:fillRef>
+          <a:effectRef idx="2">
+            <a:schemeClr val="accent1"/>
+          </a:effectRef>
+          <a:fontRef idx="minor">
+            <a:schemeClr val="lt1"/>
+          </a:fontRef>
+        </p:style>
+        <p:txBody>
+          <a:bodyPr rtlCol="0" anchor="ctr"/>
+          <a:lstStyle/>
+          <a:p>
+            <a:pPr algn="ctr"/>
+          </a:p>
+        </p:txBody>
+      </p:sp>
+      <p:sp>
+        <p:nvSpPr>
+          <p:cNvPr id="13" name="TextBox 12"/>
+          <p:cNvSpPr txBox="1"/>
+          <p:nvPr/>
+        </p:nvSpPr>
+        <p:spPr>
+          <a:xfrm>
+            <a:off x="8412480" y="1371600"/>
+            <a:ext cx="3017520" cy="457200"/>
+          </a:xfrm>
+          <a:prstGeom prst="rect">
+            <a:avLst/>
+          </a:prstGeom>
+          <a:noFill/>
+        </p:spPr>
+        <p:txBody>
+          <a:bodyPr wrap="square">
+            <a:spAutoFit/>
+          </a:bodyPr>
+          <a:lstStyle/>
+          <a:p>
+            <a:pPr algn="ctr">
+              <a:defRPr sz="2000" b="1">
+                <a:solidFill>
+                  <a:srgbClr val="C0392B"/>
+                </a:solidFill>
+                <a:latin typeface="Calibri"/>
+              </a:defRPr>
+            </a:pPr>
+            <a:r>
+              <a:t>Машинное обучение</a:t>
+            </a:r>
+          </a:p>
+        </p:txBody>
+      </p:sp>
+      <p:sp>
+        <p:nvSpPr>
+          <p:cNvPr id="14" name="TextBox 13"/>
+          <p:cNvSpPr txBox="1"/>
+          <p:nvPr/>
+        </p:nvSpPr>
+        <p:spPr>
+          <a:xfrm>
+            <a:off x="8503920" y="2103120"/>
+            <a:ext cx="2834640" cy="3200400"/>
+          </a:xfrm>
+          <a:prstGeom prst="rect">
+            <a:avLst/>
+          </a:prstGeom>
+          <a:noFill/>
+        </p:spPr>
+        <p:txBody>
+          <a:bodyPr wrap="square">
+            <a:spAutoFit/>
+          </a:bodyPr>
+          <a:lstStyle/>
+          <a:p>
+            <a:pPr algn="l">
+              <a:defRPr sz="1600" b="0">
+                <a:solidFill>
+                  <a:srgbClr val="2D2D2D"/>
+                </a:solidFill>
+                <a:latin typeface="Calibri"/>
+              </a:defRPr>
+            </a:pPr>
           </a:p>
           <a:p>
             <a:pPr algn="l">
               <a:spcBef>
-                <a:spcPts val="800"/>
+                <a:spcPts val="1000"/>
               </a:spcBef>
-              <a:defRPr sz="1700" b="0">
-                <a:solidFill>
-                  <a:srgbClr val="E8E8E8"/>
+              <a:defRPr sz="1600" b="0">
+                <a:solidFill>
+                  <a:srgbClr val="2D2D2D"/>
                 </a:solidFill>
                 <a:latin typeface="Calibri"/>
               </a:defRPr>
             </a:pPr>
             <a:r>
-              <a:t>• Обнаружение аномалий</a:t>
-            </a:r>
-          </a:p>
-        </p:txBody>
-      </p:sp>
-      <p:sp>
-        <p:nvSpPr>
-          <p:cNvPr id="10" name="TextBox 9"/>
-          <p:cNvSpPr txBox="1"/>
-          <p:nvPr/>
-        </p:nvSpPr>
-        <p:spPr>
-          <a:xfrm>
-            <a:off x="11430000" y="6400800"/>
-            <a:ext cx="640080" cy="365760"/>
-          </a:xfrm>
-          <a:prstGeom prst="rect">
-            <a:avLst/>
-          </a:prstGeom>
-          <a:noFill/>
-        </p:spPr>
-        <p:txBody>
-          <a:bodyPr wrap="none">
-            <a:spAutoFit/>
-          </a:bodyPr>
-          <a:lstStyle/>
-          <a:p>
-            <a:pPr algn="r">
-              <a:defRPr sz="1200">
-                <a:solidFill>
-                  <a:srgbClr val="8888AA"/>
+              <a:t>- Q-обучение / DQN</a:t>
+            </a:r>
+          </a:p>
+          <a:p>
+            <a:pPr algn="l">
+              <a:spcBef>
+                <a:spcPts val="1000"/>
+              </a:spcBef>
+              <a:defRPr sz="1600" b="0">
+                <a:solidFill>
+                  <a:srgbClr val="2D2D2D"/>
                 </a:solidFill>
                 <a:latin typeface="Calibri"/>
               </a:defRPr>
             </a:pPr>
             <a:r>
-              <a:t>7</a:t>
+              <a:t>- Федеративное обучение</a:t>
+            </a:r>
+          </a:p>
+          <a:p>
+            <a:pPr algn="l">
+              <a:spcBef>
+                <a:spcPts val="1000"/>
+              </a:spcBef>
+              <a:defRPr sz="1600" b="0">
+                <a:solidFill>
+                  <a:srgbClr val="2D2D2D"/>
+                </a:solidFill>
+                <a:latin typeface="Calibri"/>
+              </a:defRPr>
+            </a:pPr>
+            <a:r>
+              <a:t>- Адаптация в реальном времени</a:t>
             </a:r>
           </a:p>
         </p:txBody>
@@ -6438,14 +9150,6 @@
 <file path=ppt/slides/slide8.xml><?xml version="1.0" encoding="utf-8"?>
 <p:sld xmlns:a="http://schemas.openxmlformats.org/drawingml/2006/main" xmlns:p="http://schemas.openxmlformats.org/presentationml/2006/main" xmlns:r="http://schemas.openxmlformats.org/officeDocument/2006/relationships">
   <p:cSld>
-    <p:bg>
-      <p:bgPr>
-        <a:solidFill>
-          <a:srgbClr val="1B2A4A"/>
-        </a:solidFill>
-        <a:effectLst/>
-      </p:bgPr>
-    </p:bg>
     <p:spTree>
       <p:nvGrpSpPr>
         <p:cNvPr id="1" name=""/>
@@ -6455,56 +9159,20 @@
       <p:grpSpPr/>
       <p:sp>
         <p:nvSpPr>
-          <p:cNvPr id="2" name="TextBox 1"/>
-          <p:cNvSpPr txBox="1"/>
-          <p:nvPr/>
-        </p:nvSpPr>
-        <p:spPr>
-          <a:xfrm>
-            <a:off x="731520" y="365760"/>
-            <a:ext cx="10698480" cy="640080"/>
+          <p:cNvPr id="2" name="Rectangle 1"/>
+          <p:cNvSpPr/>
+          <p:nvPr/>
+        </p:nvSpPr>
+        <p:spPr>
+          <a:xfrm>
+            <a:off x="0" y="0"/>
+            <a:ext cx="12191695" cy="76200"/>
           </a:xfrm>
           <a:prstGeom prst="rect">
             <a:avLst/>
           </a:prstGeom>
-          <a:noFill/>
-        </p:spPr>
-        <p:txBody>
-          <a:bodyPr wrap="square">
-            <a:spAutoFit/>
-          </a:bodyPr>
-          <a:lstStyle/>
-          <a:p>
-            <a:pPr algn="l">
-              <a:defRPr sz="3200" b="1">
-                <a:solidFill>
-                  <a:srgbClr val="FFFFFF"/>
-                </a:solidFill>
-                <a:latin typeface="Calibri"/>
-              </a:defRPr>
-            </a:pPr>
-            <a:r>
-              <a:t>Системы обнаружения вторжений для БСС</a:t>
-            </a:r>
-          </a:p>
-        </p:txBody>
-      </p:sp>
-      <p:sp>
-        <p:nvSpPr>
-          <p:cNvPr id="3" name="Rectangle 2"/>
-          <p:cNvSpPr/>
-          <p:nvPr/>
-        </p:nvSpPr>
-        <p:spPr>
-          <a:xfrm>
-            <a:off x="731520" y="1005840"/>
-            <a:ext cx="1828800" cy="50800"/>
-          </a:xfrm>
-          <a:prstGeom prst="rect">
-            <a:avLst/>
-          </a:prstGeom>
           <a:solidFill>
-            <a:srgbClr val="4EC9B0"/>
+            <a:srgbClr val="1A478A"/>
           </a:solidFill>
           <a:ln>
             <a:noFill/>
@@ -6534,14 +9202,14 @@
       </p:sp>
       <p:sp>
         <p:nvSpPr>
-          <p:cNvPr id="4" name="TextBox 3"/>
+          <p:cNvPr id="3" name="TextBox 2"/>
           <p:cNvSpPr txBox="1"/>
           <p:nvPr/>
         </p:nvSpPr>
         <p:spPr>
           <a:xfrm>
-            <a:off x="731520" y="1371600"/>
-            <a:ext cx="5303520" cy="5029200"/>
+            <a:off x="731520" y="274320"/>
+            <a:ext cx="10698480" cy="731520"/>
           </a:xfrm>
           <a:prstGeom prst="rect">
             <a:avLst/>
@@ -6555,167 +9223,282 @@
           <a:lstStyle/>
           <a:p>
             <a:pPr algn="l">
-              <a:defRPr sz="1800" b="0">
-                <a:solidFill>
-                  <a:srgbClr val="E8E8E8"/>
+              <a:defRPr sz="2800" b="1">
+                <a:solidFill>
+                  <a:srgbClr val="1A478A"/>
                 </a:solidFill>
                 <a:latin typeface="Calibri"/>
               </a:defRPr>
             </a:pPr>
+            <a:r>
+              <a:t>Системы обнаружения вторжений для БСС</a:t>
+            </a:r>
+          </a:p>
+        </p:txBody>
+      </p:sp>
+      <p:sp>
+        <p:nvSpPr>
+          <p:cNvPr id="4" name="Rectangle 3"/>
+          <p:cNvSpPr/>
+          <p:nvPr/>
+        </p:nvSpPr>
+        <p:spPr>
+          <a:xfrm>
+            <a:off x="731520" y="6446520"/>
+            <a:ext cx="10698480" cy="12700"/>
+          </a:xfrm>
+          <a:prstGeom prst="rect">
+            <a:avLst/>
+          </a:prstGeom>
+          <a:solidFill>
+            <a:srgbClr val="CCCCCC"/>
+          </a:solidFill>
+          <a:ln>
+            <a:noFill/>
+          </a:ln>
+        </p:spPr>
+        <p:style>
+          <a:lnRef idx="1">
+            <a:schemeClr val="accent1"/>
+          </a:lnRef>
+          <a:fillRef idx="3">
+            <a:schemeClr val="accent1"/>
+          </a:fillRef>
+          <a:effectRef idx="2">
+            <a:schemeClr val="accent1"/>
+          </a:effectRef>
+          <a:fontRef idx="minor">
+            <a:schemeClr val="lt1"/>
+          </a:fontRef>
+        </p:style>
+        <p:txBody>
+          <a:bodyPr rtlCol="0" anchor="ctr"/>
+          <a:lstStyle/>
+          <a:p>
+            <a:pPr algn="ctr"/>
+          </a:p>
+        </p:txBody>
+      </p:sp>
+      <p:sp>
+        <p:nvSpPr>
+          <p:cNvPr id="5" name="TextBox 4"/>
+          <p:cNvSpPr txBox="1"/>
+          <p:nvPr/>
+        </p:nvSpPr>
+        <p:spPr>
+          <a:xfrm>
+            <a:off x="11155680" y="6446520"/>
+            <a:ext cx="731520" cy="320040"/>
+          </a:xfrm>
+          <a:prstGeom prst="rect">
+            <a:avLst/>
+          </a:prstGeom>
+          <a:noFill/>
+        </p:spPr>
+        <p:txBody>
+          <a:bodyPr wrap="square">
+            <a:spAutoFit/>
+          </a:bodyPr>
+          <a:lstStyle/>
+          <a:p>
+            <a:pPr algn="r">
+              <a:defRPr sz="1100" b="0">
+                <a:solidFill>
+                  <a:srgbClr val="666666"/>
+                </a:solidFill>
+                <a:latin typeface="Calibri"/>
+              </a:defRPr>
+            </a:pPr>
+            <a:r>
+              <a:t>8</a:t>
+            </a:r>
+          </a:p>
+        </p:txBody>
+      </p:sp>
+      <p:sp>
+        <p:nvSpPr>
+          <p:cNvPr id="6" name="TextBox 5"/>
+          <p:cNvSpPr txBox="1"/>
+          <p:nvPr/>
+        </p:nvSpPr>
+        <p:spPr>
+          <a:xfrm>
+            <a:off x="731520" y="1188720"/>
+            <a:ext cx="5303520" cy="2743200"/>
+          </a:xfrm>
+          <a:prstGeom prst="rect">
+            <a:avLst/>
+          </a:prstGeom>
+          <a:noFill/>
+        </p:spPr>
+        <p:txBody>
+          <a:bodyPr wrap="square">
+            <a:spAutoFit/>
+          </a:bodyPr>
+          <a:lstStyle/>
+          <a:p>
+            <a:pPr algn="l">
+              <a:defRPr sz="1700" b="0">
+                <a:solidFill>
+                  <a:srgbClr val="2D2D2D"/>
+                </a:solidFill>
+                <a:latin typeface="Calibri"/>
+              </a:defRPr>
+            </a:pPr>
+          </a:p>
+          <a:p>
+            <a:pPr algn="l">
+              <a:spcBef>
+                <a:spcPts val="200"/>
+              </a:spcBef>
+              <a:defRPr sz="1900" b="1">
+                <a:solidFill>
+                  <a:srgbClr val="1A478A"/>
+                </a:solidFill>
+                <a:latin typeface="Calibri"/>
+              </a:defRPr>
+            </a:pPr>
+            <a:r>
+              <a:t>Архитектуры IDS</a:t>
+            </a:r>
+          </a:p>
+          <a:p>
+            <a:pPr algn="l">
+              <a:spcBef>
+                <a:spcPts val="800"/>
+              </a:spcBef>
+              <a:defRPr sz="1700" b="0">
+                <a:solidFill>
+                  <a:srgbClr val="2D2D2D"/>
+                </a:solidFill>
+                <a:latin typeface="Calibri"/>
+              </a:defRPr>
+            </a:pPr>
+            <a:r>
+              <a:t>- Распределённая — лёгкие агенты на каждом узле</a:t>
+            </a:r>
+          </a:p>
+          <a:p>
+            <a:pPr algn="l">
+              <a:spcBef>
+                <a:spcPts val="500"/>
+              </a:spcBef>
+              <a:defRPr sz="1700" b="0">
+                <a:solidFill>
+                  <a:srgbClr val="2D2D2D"/>
+                </a:solidFill>
+                <a:latin typeface="Calibri"/>
+              </a:defRPr>
+            </a:pPr>
+            <a:r>
+              <a:t>- Иерархическая — анализ на уровне кластерной головы</a:t>
+            </a:r>
+          </a:p>
+          <a:p>
+            <a:pPr algn="l">
+              <a:spcBef>
+                <a:spcPts val="500"/>
+              </a:spcBef>
+              <a:defRPr sz="1700" b="0">
+                <a:solidFill>
+                  <a:srgbClr val="2D2D2D"/>
+                </a:solidFill>
+                <a:latin typeface="Calibri"/>
+              </a:defRPr>
+            </a:pPr>
+            <a:r>
+              <a:t>- Мобильная — перемещающиеся агенты-мониторы</a:t>
+            </a:r>
+          </a:p>
+          <a:p>
+            <a:pPr algn="l">
+              <a:spcBef>
+                <a:spcPts val="800"/>
+              </a:spcBef>
+              <a:defRPr sz="800" b="0">
+                <a:solidFill>
+                  <a:srgbClr val="2D2D2D"/>
+                </a:solidFill>
+                <a:latin typeface="Calibri"/>
+              </a:defRPr>
+            </a:pPr>
+          </a:p>
+          <a:p>
+            <a:pPr algn="l">
+              <a:spcBef>
+                <a:spcPts val="200"/>
+              </a:spcBef>
+              <a:defRPr sz="1900" b="1">
+                <a:solidFill>
+                  <a:srgbClr val="1A478A"/>
+                </a:solidFill>
+                <a:latin typeface="Calibri"/>
+              </a:defRPr>
+            </a:pPr>
+            <a:r>
+              <a:t>Почему обнаружение аномалий?</a:t>
+            </a:r>
           </a:p>
           <a:p>
             <a:pPr algn="l">
               <a:spcBef>
                 <a:spcPts val="600"/>
               </a:spcBef>
-              <a:defRPr sz="1800" b="1">
-                <a:solidFill>
-                  <a:srgbClr val="4EC9B0"/>
+              <a:defRPr sz="1700" b="0">
+                <a:solidFill>
+                  <a:srgbClr val="2D2D2D"/>
                 </a:solidFill>
                 <a:latin typeface="Calibri"/>
               </a:defRPr>
             </a:pPr>
             <a:r>
-              <a:t>Архитектуры IDS для БСС:</a:t>
+              <a:t>- Не требует базы сигнатур (экономия памяти)</a:t>
             </a:r>
           </a:p>
           <a:p>
             <a:pPr algn="l">
               <a:spcBef>
-                <a:spcPts val="600"/>
+                <a:spcPts val="500"/>
               </a:spcBef>
-              <a:defRPr sz="1800" b="0">
-                <a:solidFill>
-                  <a:srgbClr val="E8E8E8"/>
+              <a:defRPr sz="1700" b="0">
+                <a:solidFill>
+                  <a:srgbClr val="2D2D2D"/>
                 </a:solidFill>
                 <a:latin typeface="Calibri"/>
               </a:defRPr>
             </a:pPr>
             <a:r>
-              <a:t>• Распределённая — агенты на узлах</a:t>
+              <a:t>- Способно выявлять zero-day атаки</a:t>
             </a:r>
           </a:p>
           <a:p>
             <a:pPr algn="l">
               <a:spcBef>
-                <a:spcPts val="600"/>
+                <a:spcPts val="500"/>
               </a:spcBef>
-              <a:defRPr sz="1800" b="0">
-                <a:solidFill>
-                  <a:srgbClr val="E8E8E8"/>
+              <a:defRPr sz="1700" b="0">
+                <a:solidFill>
+                  <a:srgbClr val="2D2D2D"/>
                 </a:solidFill>
                 <a:latin typeface="Calibri"/>
               </a:defRPr>
             </a:pPr>
             <a:r>
-              <a:t>• Иерархическая — анализ на кластере</a:t>
-            </a:r>
-          </a:p>
-          <a:p>
-            <a:pPr algn="l">
-              <a:spcBef>
-                <a:spcPts val="600"/>
-              </a:spcBef>
-              <a:defRPr sz="1800" b="0">
-                <a:solidFill>
-                  <a:srgbClr val="E8E8E8"/>
-                </a:solidFill>
-                <a:latin typeface="Calibri"/>
-              </a:defRPr>
-            </a:pPr>
-            <a:r>
-              <a:t>• Мобильная — перемещающиеся агенты</a:t>
-            </a:r>
-          </a:p>
-          <a:p>
-            <a:pPr algn="l">
-              <a:spcBef>
-                <a:spcPts val="600"/>
-              </a:spcBef>
-              <a:defRPr sz="1800" b="0">
-                <a:solidFill>
-                  <a:srgbClr val="E8E8E8"/>
-                </a:solidFill>
-                <a:latin typeface="Calibri"/>
-              </a:defRPr>
-            </a:pPr>
-          </a:p>
-          <a:p>
-            <a:pPr algn="l">
-              <a:spcBef>
-                <a:spcPts val="600"/>
-              </a:spcBef>
-              <a:defRPr sz="1800" b="1">
-                <a:solidFill>
-                  <a:srgbClr val="4EC9B0"/>
-                </a:solidFill>
-                <a:latin typeface="Calibri"/>
-              </a:defRPr>
-            </a:pPr>
-            <a:r>
-              <a:t>Обнаружение аномалий:</a:t>
-            </a:r>
-          </a:p>
-          <a:p>
-            <a:pPr algn="l">
-              <a:spcBef>
-                <a:spcPts val="600"/>
-              </a:spcBef>
-              <a:defRPr sz="1800" b="0">
-                <a:solidFill>
-                  <a:srgbClr val="E8E8E8"/>
-                </a:solidFill>
-                <a:latin typeface="Calibri"/>
-              </a:defRPr>
-            </a:pPr>
-            <a:r>
-              <a:t>• Модель нормального поведения</a:t>
-            </a:r>
-          </a:p>
-          <a:p>
-            <a:pPr algn="l">
-              <a:spcBef>
-                <a:spcPts val="600"/>
-              </a:spcBef>
-              <a:defRPr sz="1800" b="0">
-                <a:solidFill>
-                  <a:srgbClr val="E8E8E8"/>
-                </a:solidFill>
-                <a:latin typeface="Calibri"/>
-              </a:defRPr>
-            </a:pPr>
-            <a:r>
-              <a:t>• Не требует базы сигнатур</a:t>
-            </a:r>
-          </a:p>
-          <a:p>
-            <a:pPr algn="l">
-              <a:spcBef>
-                <a:spcPts val="600"/>
-              </a:spcBef>
-              <a:defRPr sz="1800" b="0">
-                <a:solidFill>
-                  <a:srgbClr val="E8E8E8"/>
-                </a:solidFill>
-                <a:latin typeface="Calibri"/>
-              </a:defRPr>
-            </a:pPr>
-            <a:r>
-              <a:t>• Выявляет zero-day атаки</a:t>
-            </a:r>
-          </a:p>
-        </p:txBody>
-      </p:sp>
-      <p:sp>
-        <p:nvSpPr>
-          <p:cNvPr id="5" name="TextBox 4"/>
+              <a:t>- Использует предсказуемость поведения БСС</a:t>
+            </a:r>
+          </a:p>
+        </p:txBody>
+      </p:sp>
+      <p:sp>
+        <p:nvSpPr>
+          <p:cNvPr id="7" name="TextBox 6"/>
           <p:cNvSpPr txBox="1"/>
           <p:nvPr/>
         </p:nvSpPr>
         <p:spPr>
           <a:xfrm>
-            <a:off x="6400800" y="1371600"/>
-            <a:ext cx="5303520" cy="5029200"/>
+            <a:off x="6583680" y="1188720"/>
+            <a:ext cx="4846320" cy="411480"/>
           </a:xfrm>
           <a:prstGeom prst="rect">
             <a:avLst/>
@@ -6729,151 +9512,305 @@
           <a:lstStyle/>
           <a:p>
             <a:pPr algn="l">
-              <a:defRPr sz="1800" b="0">
-                <a:solidFill>
-                  <a:srgbClr val="E8E8E8"/>
+              <a:defRPr sz="1900" b="1">
+                <a:solidFill>
+                  <a:srgbClr val="1A478A"/>
                 </a:solidFill>
                 <a:latin typeface="Calibri"/>
               </a:defRPr>
             </a:pPr>
+            <a:r>
+              <a:t>Метрики аномальности</a:t>
+            </a:r>
+          </a:p>
+        </p:txBody>
+      </p:sp>
+      <p:sp>
+        <p:nvSpPr>
+          <p:cNvPr id="8" name="Rounded Rectangle 7"/>
+          <p:cNvSpPr/>
+          <p:nvPr/>
+        </p:nvSpPr>
+        <p:spPr>
+          <a:xfrm>
+            <a:off x="6583680" y="1828800"/>
+            <a:ext cx="4846320" cy="868680"/>
+          </a:xfrm>
+          <a:prstGeom prst="roundRect">
+            <a:avLst/>
+          </a:prstGeom>
+          <a:solidFill>
+            <a:srgbClr val="EBF5FB"/>
+          </a:solidFill>
+          <a:ln w="12700">
+            <a:solidFill>
+              <a:srgbClr val="DDDDDD"/>
+            </a:solidFill>
+          </a:ln>
+        </p:spPr>
+        <p:style>
+          <a:lnRef idx="1">
+            <a:schemeClr val="accent1"/>
+          </a:lnRef>
+          <a:fillRef idx="3">
+            <a:schemeClr val="accent1"/>
+          </a:fillRef>
+          <a:effectRef idx="2">
+            <a:schemeClr val="accent1"/>
+          </a:effectRef>
+          <a:fontRef idx="minor">
+            <a:schemeClr val="lt1"/>
+          </a:fontRef>
+        </p:style>
+        <p:txBody>
+          <a:bodyPr rtlCol="0" anchor="ctr" wrap="square"/>
+          <a:lstStyle/>
+          <a:p>
+            <a:pPr algn="l">
+              <a:defRPr sz="1600" b="1">
+                <a:solidFill>
+                  <a:srgbClr val="1A478A"/>
+                </a:solidFill>
+              </a:defRPr>
+            </a:pPr>
+            <a:r>
+              <a:t>Объём трафика</a:t>
+            </a:r>
           </a:p>
           <a:p>
             <a:pPr algn="l">
               <a:spcBef>
-                <a:spcPts val="600"/>
+                <a:spcPts val="200"/>
               </a:spcBef>
-              <a:defRPr sz="1800" b="1">
-                <a:solidFill>
-                  <a:srgbClr val="4EC9B0"/>
-                </a:solidFill>
-                <a:latin typeface="Calibri"/>
-              </a:defRPr>
-            </a:pPr>
-            <a:r>
-              <a:t>Метрики аномальности:</a:t>
+              <a:defRPr sz="1300">
+                <a:solidFill>
+                  <a:srgbClr val="666666"/>
+                </a:solidFill>
+              </a:defRPr>
+            </a:pPr>
+            <a:r>
+              <a:t>Резкий рост — flooding</a:t>
+            </a:r>
+          </a:p>
+        </p:txBody>
+      </p:sp>
+      <p:sp>
+        <p:nvSpPr>
+          <p:cNvPr id="9" name="Rounded Rectangle 8"/>
+          <p:cNvSpPr/>
+          <p:nvPr/>
+        </p:nvSpPr>
+        <p:spPr>
+          <a:xfrm>
+            <a:off x="6583680" y="2880360"/>
+            <a:ext cx="4846320" cy="868680"/>
+          </a:xfrm>
+          <a:prstGeom prst="roundRect">
+            <a:avLst/>
+          </a:prstGeom>
+          <a:solidFill>
+            <a:srgbClr val="EBF5FB"/>
+          </a:solidFill>
+          <a:ln w="12700">
+            <a:solidFill>
+              <a:srgbClr val="DDDDDD"/>
+            </a:solidFill>
+          </a:ln>
+        </p:spPr>
+        <p:style>
+          <a:lnRef idx="1">
+            <a:schemeClr val="accent1"/>
+          </a:lnRef>
+          <a:fillRef idx="3">
+            <a:schemeClr val="accent1"/>
+          </a:fillRef>
+          <a:effectRef idx="2">
+            <a:schemeClr val="accent1"/>
+          </a:effectRef>
+          <a:fontRef idx="minor">
+            <a:schemeClr val="lt1"/>
+          </a:fontRef>
+        </p:style>
+        <p:txBody>
+          <a:bodyPr rtlCol="0" anchor="ctr" wrap="square"/>
+          <a:lstStyle/>
+          <a:p>
+            <a:pPr algn="l">
+              <a:defRPr sz="1600" b="1">
+                <a:solidFill>
+                  <a:srgbClr val="1A478A"/>
+                </a:solidFill>
+              </a:defRPr>
+            </a:pPr>
+            <a:r>
+              <a:t>Паттерн передачи</a:t>
             </a:r>
           </a:p>
           <a:p>
             <a:pPr algn="l">
               <a:spcBef>
-                <a:spcPts val="600"/>
+                <a:spcPts val="200"/>
               </a:spcBef>
-              <a:defRPr sz="1800" b="0">
-                <a:solidFill>
-                  <a:srgbClr val="E8E8E8"/>
-                </a:solidFill>
-                <a:latin typeface="Calibri"/>
-              </a:defRPr>
-            </a:pPr>
-            <a:r>
-              <a:t>• Объём трафика</a:t>
+              <a:defRPr sz="1300">
+                <a:solidFill>
+                  <a:srgbClr val="666666"/>
+                </a:solidFill>
+              </a:defRPr>
+            </a:pPr>
+            <a:r>
+              <a:t>Нетипичная активность</a:t>
+            </a:r>
+          </a:p>
+        </p:txBody>
+      </p:sp>
+      <p:sp>
+        <p:nvSpPr>
+          <p:cNvPr id="10" name="Rounded Rectangle 9"/>
+          <p:cNvSpPr/>
+          <p:nvPr/>
+        </p:nvSpPr>
+        <p:spPr>
+          <a:xfrm>
+            <a:off x="6583680" y="3931920"/>
+            <a:ext cx="4846320" cy="868680"/>
+          </a:xfrm>
+          <a:prstGeom prst="roundRect">
+            <a:avLst/>
+          </a:prstGeom>
+          <a:solidFill>
+            <a:srgbClr val="EBF5FB"/>
+          </a:solidFill>
+          <a:ln w="12700">
+            <a:solidFill>
+              <a:srgbClr val="DDDDDD"/>
+            </a:solidFill>
+          </a:ln>
+        </p:spPr>
+        <p:style>
+          <a:lnRef idx="1">
+            <a:schemeClr val="accent1"/>
+          </a:lnRef>
+          <a:fillRef idx="3">
+            <a:schemeClr val="accent1"/>
+          </a:fillRef>
+          <a:effectRef idx="2">
+            <a:schemeClr val="accent1"/>
+          </a:effectRef>
+          <a:fontRef idx="minor">
+            <a:schemeClr val="lt1"/>
+          </a:fontRef>
+        </p:style>
+        <p:txBody>
+          <a:bodyPr rtlCol="0" anchor="ctr" wrap="square"/>
+          <a:lstStyle/>
+          <a:p>
+            <a:pPr algn="l">
+              <a:defRPr sz="1600" b="1">
+                <a:solidFill>
+                  <a:srgbClr val="1A478A"/>
+                </a:solidFill>
+              </a:defRPr>
+            </a:pPr>
+            <a:r>
+              <a:t>Расход энергии</a:t>
             </a:r>
           </a:p>
           <a:p>
             <a:pPr algn="l">
               <a:spcBef>
-                <a:spcPts val="600"/>
+                <a:spcPts val="200"/>
               </a:spcBef>
-              <a:defRPr sz="1800" b="0">
-                <a:solidFill>
-                  <a:srgbClr val="E8E8E8"/>
-                </a:solidFill>
-                <a:latin typeface="Calibri"/>
-              </a:defRPr>
-            </a:pPr>
-            <a:r>
-              <a:t>• Паттерн передачи</a:t>
+              <a:defRPr sz="1300">
+                <a:solidFill>
+                  <a:srgbClr val="666666"/>
+                </a:solidFill>
+              </a:defRPr>
+            </a:pPr>
+            <a:r>
+              <a:t>Ускоренный — denial-of-sleep</a:t>
+            </a:r>
+          </a:p>
+        </p:txBody>
+      </p:sp>
+      <p:sp>
+        <p:nvSpPr>
+          <p:cNvPr id="11" name="Rounded Rectangle 10"/>
+          <p:cNvSpPr/>
+          <p:nvPr/>
+        </p:nvSpPr>
+        <p:spPr>
+          <a:xfrm>
+            <a:off x="6583680" y="4983479"/>
+            <a:ext cx="4846320" cy="868680"/>
+          </a:xfrm>
+          <a:prstGeom prst="roundRect">
+            <a:avLst/>
+          </a:prstGeom>
+          <a:solidFill>
+            <a:srgbClr val="EBF5FB"/>
+          </a:solidFill>
+          <a:ln w="12700">
+            <a:solidFill>
+              <a:srgbClr val="DDDDDD"/>
+            </a:solidFill>
+          </a:ln>
+        </p:spPr>
+        <p:style>
+          <a:lnRef idx="1">
+            <a:schemeClr val="accent1"/>
+          </a:lnRef>
+          <a:fillRef idx="3">
+            <a:schemeClr val="accent1"/>
+          </a:fillRef>
+          <a:effectRef idx="2">
+            <a:schemeClr val="accent1"/>
+          </a:effectRef>
+          <a:fontRef idx="minor">
+            <a:schemeClr val="lt1"/>
+          </a:fontRef>
+        </p:style>
+        <p:txBody>
+          <a:bodyPr rtlCol="0" anchor="ctr" wrap="square"/>
+          <a:lstStyle/>
+          <a:p>
+            <a:pPr algn="l">
+              <a:defRPr sz="1600" b="1">
+                <a:solidFill>
+                  <a:srgbClr val="1A478A"/>
+                </a:solidFill>
+              </a:defRPr>
+            </a:pPr>
+            <a:r>
+              <a:t>Стабильность маршрутов</a:t>
             </a:r>
           </a:p>
           <a:p>
             <a:pPr algn="l">
               <a:spcBef>
-                <a:spcPts val="600"/>
+                <a:spcPts val="200"/>
               </a:spcBef>
-              <a:defRPr sz="1800" b="0">
-                <a:solidFill>
-                  <a:srgbClr val="E8E8E8"/>
-                </a:solidFill>
-                <a:latin typeface="Calibri"/>
-              </a:defRPr>
-            </a:pPr>
-            <a:r>
-              <a:t>• Скорость расхода энергии</a:t>
-            </a:r>
-          </a:p>
-          <a:p>
-            <a:pPr algn="l">
-              <a:spcBef>
-                <a:spcPts val="600"/>
-              </a:spcBef>
-              <a:defRPr sz="1800" b="0">
-                <a:solidFill>
-                  <a:srgbClr val="E8E8E8"/>
-                </a:solidFill>
-                <a:latin typeface="Calibri"/>
-              </a:defRPr>
-            </a:pPr>
-            <a:r>
-              <a:t>• Стабильность маршрутов</a:t>
-            </a:r>
-          </a:p>
-          <a:p>
-            <a:pPr algn="l">
-              <a:spcBef>
-                <a:spcPts val="600"/>
-              </a:spcBef>
-              <a:defRPr sz="1800" b="0">
-                <a:solidFill>
-                  <a:srgbClr val="E8E8E8"/>
-                </a:solidFill>
-                <a:latin typeface="Calibri"/>
-              </a:defRPr>
-            </a:pPr>
-          </a:p>
-          <a:p>
-            <a:pPr algn="l">
-              <a:spcBef>
-                <a:spcPts val="600"/>
-              </a:spcBef>
-              <a:defRPr sz="1800" b="1">
-                <a:solidFill>
-                  <a:srgbClr val="4EC9B0"/>
-                </a:solidFill>
-                <a:latin typeface="Calibri"/>
-              </a:defRPr>
-            </a:pPr>
-            <a:r>
-              <a:t>Лёгкие алгоритмы:</a:t>
-            </a:r>
-          </a:p>
-          <a:p>
-            <a:pPr algn="l">
-              <a:spcBef>
-                <a:spcPts val="600"/>
-              </a:spcBef>
-              <a:defRPr sz="1800" b="0">
-                <a:solidFill>
-                  <a:srgbClr val="FFD700"/>
-                </a:solidFill>
-                <a:latin typeface="Calibri"/>
-              </a:defRPr>
-            </a:pPr>
-            <a:r>
-              <a:t>CUSUM, EWMA, TinyML</a:t>
-            </a:r>
-          </a:p>
-        </p:txBody>
-      </p:sp>
-      <p:sp>
-        <p:nvSpPr>
-          <p:cNvPr id="6" name="TextBox 5"/>
+              <a:defRPr sz="1300">
+                <a:solidFill>
+                  <a:srgbClr val="666666"/>
+                </a:solidFill>
+              </a:defRPr>
+            </a:pPr>
+            <a:r>
+              <a:t>Частые изменения — sinkhole</a:t>
+            </a:r>
+          </a:p>
+        </p:txBody>
+      </p:sp>
+      <p:sp>
+        <p:nvSpPr>
+          <p:cNvPr id="12" name="TextBox 11"/>
           <p:cNvSpPr txBox="1"/>
           <p:nvPr/>
         </p:nvSpPr>
         <p:spPr>
           <a:xfrm>
-            <a:off x="11430000" y="6400800"/>
-            <a:ext cx="640080" cy="365760"/>
+            <a:off x="6583680" y="5760720"/>
+            <a:ext cx="4846320" cy="411480"/>
           </a:xfrm>
           <a:prstGeom prst="rect">
             <a:avLst/>
@@ -6881,21 +9818,21 @@
           <a:noFill/>
         </p:spPr>
         <p:txBody>
-          <a:bodyPr wrap="none">
+          <a:bodyPr wrap="square">
             <a:spAutoFit/>
           </a:bodyPr>
           <a:lstStyle/>
           <a:p>
-            <a:pPr algn="r">
-              <a:defRPr sz="1200">
-                <a:solidFill>
-                  <a:srgbClr val="8888AA"/>
+            <a:pPr algn="l">
+              <a:defRPr sz="1600" b="1">
+                <a:solidFill>
+                  <a:srgbClr val="167F72"/>
                 </a:solidFill>
                 <a:latin typeface="Calibri"/>
               </a:defRPr>
             </a:pPr>
             <a:r>
-              <a:t>8</a:t>
+              <a:t>Лёгкие алгоритмы: CUSUM, EWMA, TinyML</a:t>
             </a:r>
           </a:p>
         </p:txBody>
@@ -6911,14 +9848,6 @@
 <file path=ppt/slides/slide9.xml><?xml version="1.0" encoding="utf-8"?>
 <p:sld xmlns:a="http://schemas.openxmlformats.org/drawingml/2006/main" xmlns:p="http://schemas.openxmlformats.org/presentationml/2006/main" xmlns:r="http://schemas.openxmlformats.org/officeDocument/2006/relationships">
   <p:cSld>
-    <p:bg>
-      <p:bgPr>
-        <a:solidFill>
-          <a:srgbClr val="1B2A4A"/>
-        </a:solidFill>
-        <a:effectLst/>
-      </p:bgPr>
-    </p:bg>
     <p:spTree>
       <p:nvGrpSpPr>
         <p:cNvPr id="1" name=""/>
@@ -6928,56 +9857,20 @@
       <p:grpSpPr/>
       <p:sp>
         <p:nvSpPr>
-          <p:cNvPr id="2" name="TextBox 1"/>
-          <p:cNvSpPr txBox="1"/>
-          <p:nvPr/>
-        </p:nvSpPr>
-        <p:spPr>
-          <a:xfrm>
-            <a:off x="731520" y="365760"/>
-            <a:ext cx="10698480" cy="640080"/>
+          <p:cNvPr id="2" name="Rectangle 1"/>
+          <p:cNvSpPr/>
+          <p:nvPr/>
+        </p:nvSpPr>
+        <p:spPr>
+          <a:xfrm>
+            <a:off x="0" y="0"/>
+            <a:ext cx="12191695" cy="76200"/>
           </a:xfrm>
           <a:prstGeom prst="rect">
             <a:avLst/>
           </a:prstGeom>
-          <a:noFill/>
-        </p:spPr>
-        <p:txBody>
-          <a:bodyPr wrap="square">
-            <a:spAutoFit/>
-          </a:bodyPr>
-          <a:lstStyle/>
-          <a:p>
-            <a:pPr algn="l">
-              <a:defRPr sz="3200" b="1">
-                <a:solidFill>
-                  <a:srgbClr val="FFFFFF"/>
-                </a:solidFill>
-                <a:latin typeface="Calibri"/>
-              </a:defRPr>
-            </a:pPr>
-            <a:r>
-              <a:t>Сравнительный анализ протоколов</a:t>
-            </a:r>
-          </a:p>
-        </p:txBody>
-      </p:sp>
-      <p:sp>
-        <p:nvSpPr>
-          <p:cNvPr id="3" name="Rectangle 2"/>
-          <p:cNvSpPr/>
-          <p:nvPr/>
-        </p:nvSpPr>
-        <p:spPr>
-          <a:xfrm>
-            <a:off x="731520" y="1005840"/>
-            <a:ext cx="1828800" cy="50800"/>
-          </a:xfrm>
-          <a:prstGeom prst="rect">
-            <a:avLst/>
-          </a:prstGeom>
           <a:solidFill>
-            <a:srgbClr val="4EC9B0"/>
+            <a:srgbClr val="1A478A"/>
           </a:solidFill>
           <a:ln>
             <a:noFill/>
@@ -7005,17 +9898,132 @@
           </a:p>
         </p:txBody>
       </p:sp>
+      <p:sp>
+        <p:nvSpPr>
+          <p:cNvPr id="3" name="TextBox 2"/>
+          <p:cNvSpPr txBox="1"/>
+          <p:nvPr/>
+        </p:nvSpPr>
+        <p:spPr>
+          <a:xfrm>
+            <a:off x="731520" y="274320"/>
+            <a:ext cx="10698480" cy="731520"/>
+          </a:xfrm>
+          <a:prstGeom prst="rect">
+            <a:avLst/>
+          </a:prstGeom>
+          <a:noFill/>
+        </p:spPr>
+        <p:txBody>
+          <a:bodyPr wrap="square">
+            <a:spAutoFit/>
+          </a:bodyPr>
+          <a:lstStyle/>
+          <a:p>
+            <a:pPr algn="l">
+              <a:defRPr sz="2800" b="1">
+                <a:solidFill>
+                  <a:srgbClr val="1A478A"/>
+                </a:solidFill>
+                <a:latin typeface="Calibri"/>
+              </a:defRPr>
+            </a:pPr>
+            <a:r>
+              <a:t>Сравнительный анализ протоколов</a:t>
+            </a:r>
+          </a:p>
+        </p:txBody>
+      </p:sp>
+      <p:sp>
+        <p:nvSpPr>
+          <p:cNvPr id="4" name="Rectangle 3"/>
+          <p:cNvSpPr/>
+          <p:nvPr/>
+        </p:nvSpPr>
+        <p:spPr>
+          <a:xfrm>
+            <a:off x="731520" y="6446520"/>
+            <a:ext cx="10698480" cy="12700"/>
+          </a:xfrm>
+          <a:prstGeom prst="rect">
+            <a:avLst/>
+          </a:prstGeom>
+          <a:solidFill>
+            <a:srgbClr val="CCCCCC"/>
+          </a:solidFill>
+          <a:ln>
+            <a:noFill/>
+          </a:ln>
+        </p:spPr>
+        <p:style>
+          <a:lnRef idx="1">
+            <a:schemeClr val="accent1"/>
+          </a:lnRef>
+          <a:fillRef idx="3">
+            <a:schemeClr val="accent1"/>
+          </a:fillRef>
+          <a:effectRef idx="2">
+            <a:schemeClr val="accent1"/>
+          </a:effectRef>
+          <a:fontRef idx="minor">
+            <a:schemeClr val="lt1"/>
+          </a:fontRef>
+        </p:style>
+        <p:txBody>
+          <a:bodyPr rtlCol="0" anchor="ctr"/>
+          <a:lstStyle/>
+          <a:p>
+            <a:pPr algn="ctr"/>
+          </a:p>
+        </p:txBody>
+      </p:sp>
+      <p:sp>
+        <p:nvSpPr>
+          <p:cNvPr id="5" name="TextBox 4"/>
+          <p:cNvSpPr txBox="1"/>
+          <p:nvPr/>
+        </p:nvSpPr>
+        <p:spPr>
+          <a:xfrm>
+            <a:off x="11155680" y="6446520"/>
+            <a:ext cx="731520" cy="320040"/>
+          </a:xfrm>
+          <a:prstGeom prst="rect">
+            <a:avLst/>
+          </a:prstGeom>
+          <a:noFill/>
+        </p:spPr>
+        <p:txBody>
+          <a:bodyPr wrap="square">
+            <a:spAutoFit/>
+          </a:bodyPr>
+          <a:lstStyle/>
+          <a:p>
+            <a:pPr algn="r">
+              <a:defRPr sz="1100" b="0">
+                <a:solidFill>
+                  <a:srgbClr val="666666"/>
+                </a:solidFill>
+                <a:latin typeface="Calibri"/>
+              </a:defRPr>
+            </a:pPr>
+            <a:r>
+              <a:t>9</a:t>
+            </a:r>
+          </a:p>
+        </p:txBody>
+      </p:sp>
       <p:graphicFrame>
         <p:nvGraphicFramePr>
-          <p:cNvPr id="4" name="Table 3"/>
+          <p:cNvPr id="6" name="Table 5"/>
           <p:cNvGraphicFramePr>
             <a:graphicFrameLocks noGrp="1"/>
           </p:cNvGraphicFramePr>
           <p:nvPr/>
         </p:nvGraphicFramePr>
         <p:xfrm>
-          <a:off x="731520" y="1371600"/>
-          <a:ext cx="10698480" cy="4572000"/>
+          <a:off x="731520" y="1188720"/>
+          <a:ext cx="10698480" cy="4754880"/>
         </p:xfrm>
         <a:graphic>
           <a:graphicData uri="http://schemas.openxmlformats.org/drawingml/2006/table">
@@ -7032,7 +10040,7 @@
                 <a:gridCol w="1528354"/>
                 <a:gridCol w="1528356"/>
               </a:tblGrid>
-              <a:tr h="571500">
+              <a:tr h="594360">
                 <a:tc>
                   <a:txBody>
                     <a:bodyPr/>
@@ -7041,7 +10049,7 @@
                       <a:pPr algn="ctr">
                         <a:defRPr sz="1400" b="1">
                           <a:solidFill>
-                            <a:srgbClr val="1B2A4A"/>
+                            <a:srgbClr val="FFFFFF"/>
                           </a:solidFill>
                           <a:latin typeface="Calibri"/>
                         </a:defRPr>
@@ -7053,7 +10061,7 @@
                   </a:txBody>
                   <a:tcPr>
                     <a:solidFill>
-                      <a:srgbClr val="4EC9B0"/>
+                      <a:srgbClr val="1A478A"/>
                     </a:solidFill>
                   </a:tcPr>
                 </a:tc>
@@ -7065,7 +10073,7 @@
                       <a:pPr algn="ctr">
                         <a:defRPr sz="1400" b="1">
                           <a:solidFill>
-                            <a:srgbClr val="1B2A4A"/>
+                            <a:srgbClr val="FFFFFF"/>
                           </a:solidFill>
                           <a:latin typeface="Calibri"/>
                         </a:defRPr>
@@ -7077,7 +10085,7 @@
                   </a:txBody>
                   <a:tcPr>
                     <a:solidFill>
-                      <a:srgbClr val="4EC9B0"/>
+                      <a:srgbClr val="1A478A"/>
                     </a:solidFill>
                   </a:tcPr>
                 </a:tc>
@@ -7089,7 +10097,7 @@
                       <a:pPr algn="ctr">
                         <a:defRPr sz="1400" b="1">
                           <a:solidFill>
-                            <a:srgbClr val="1B2A4A"/>
+                            <a:srgbClr val="FFFFFF"/>
                           </a:solidFill>
                           <a:latin typeface="Calibri"/>
                         </a:defRPr>
@@ -7102,7 +10110,7 @@
                       <a:pPr algn="ctr">
                         <a:defRPr sz="1400" b="1">
                           <a:solidFill>
-                            <a:srgbClr val="1B2A4A"/>
+                            <a:srgbClr val="FFFFFF"/>
                           </a:solidFill>
                           <a:latin typeface="Calibri"/>
                         </a:defRPr>
@@ -7114,7 +10122,7 @@
                   </a:txBody>
                   <a:tcPr>
                     <a:solidFill>
-                      <a:srgbClr val="4EC9B0"/>
+                      <a:srgbClr val="1A478A"/>
                     </a:solidFill>
                   </a:tcPr>
                 </a:tc>
@@ -7126,7 +10134,7 @@
                       <a:pPr algn="ctr">
                         <a:defRPr sz="1400" b="1">
                           <a:solidFill>
-                            <a:srgbClr val="1B2A4A"/>
+                            <a:srgbClr val="FFFFFF"/>
                           </a:solidFill>
                           <a:latin typeface="Calibri"/>
                         </a:defRPr>
@@ -7138,7 +10146,7 @@
                   </a:txBody>
                   <a:tcPr>
                     <a:solidFill>
-                      <a:srgbClr val="4EC9B0"/>
+                      <a:srgbClr val="1A478A"/>
                     </a:solidFill>
                   </a:tcPr>
                 </a:tc>
@@ -7150,7 +10158,7 @@
                       <a:pPr algn="ctr">
                         <a:defRPr sz="1400" b="1">
                           <a:solidFill>
-                            <a:srgbClr val="1B2A4A"/>
+                            <a:srgbClr val="FFFFFF"/>
                           </a:solidFill>
                           <a:latin typeface="Calibri"/>
                         </a:defRPr>
@@ -7162,7 +10170,7 @@
                   </a:txBody>
                   <a:tcPr>
                     <a:solidFill>
-                      <a:srgbClr val="4EC9B0"/>
+                      <a:srgbClr val="1A478A"/>
                     </a:solidFill>
                   </a:tcPr>
                 </a:tc>
@@ -7174,7 +10182,7 @@
                       <a:pPr algn="ctr">
                         <a:defRPr sz="1400" b="1">
                           <a:solidFill>
-                            <a:srgbClr val="1B2A4A"/>
+                            <a:srgbClr val="FFFFFF"/>
                           </a:solidFill>
                           <a:latin typeface="Calibri"/>
                         </a:defRPr>
@@ -7187,7 +10195,7 @@
                       <a:pPr algn="ctr">
                         <a:defRPr sz="1400" b="1">
                           <a:solidFill>
-                            <a:srgbClr val="1B2A4A"/>
+                            <a:srgbClr val="FFFFFF"/>
                           </a:solidFill>
                           <a:latin typeface="Calibri"/>
                         </a:defRPr>
@@ -7199,7 +10207,7 @@
                   </a:txBody>
                   <a:tcPr>
                     <a:solidFill>
-                      <a:srgbClr val="4EC9B0"/>
+                      <a:srgbClr val="1A478A"/>
                     </a:solidFill>
                   </a:tcPr>
                 </a:tc>
@@ -7211,7 +10219,7 @@
                       <a:pPr algn="ctr">
                         <a:defRPr sz="1400" b="1">
                           <a:solidFill>
-                            <a:srgbClr val="1B2A4A"/>
+                            <a:srgbClr val="FFFFFF"/>
                           </a:solidFill>
                           <a:latin typeface="Calibri"/>
                         </a:defRPr>
@@ -7223,12 +10231,12 @@
                   </a:txBody>
                   <a:tcPr>
                     <a:solidFill>
-                      <a:srgbClr val="4EC9B0"/>
+                      <a:srgbClr val="1A478A"/>
                     </a:solidFill>
                   </a:tcPr>
                 </a:tc>
               </a:tr>
-              <a:tr h="571500">
+              <a:tr h="594360">
                 <a:tc>
                   <a:txBody>
                     <a:bodyPr/>
@@ -7237,7 +10245,7 @@
                       <a:pPr algn="ctr">
                         <a:defRPr sz="1400">
                           <a:solidFill>
-                            <a:srgbClr val="E8E8E8"/>
+                            <a:srgbClr val="2D2D2D"/>
                           </a:solidFill>
                           <a:latin typeface="Calibri"/>
                         </a:defRPr>
@@ -7249,7 +10257,7 @@
                   </a:txBody>
                   <a:tcPr>
                     <a:solidFill>
-                      <a:srgbClr val="1F3355"/>
+                      <a:srgbClr val="F2F2F2"/>
                     </a:solidFill>
                   </a:tcPr>
                 </a:tc>
@@ -7261,7 +10269,7 @@
                       <a:pPr algn="ctr">
                         <a:defRPr sz="1400">
                           <a:solidFill>
-                            <a:srgbClr val="E8E8E8"/>
+                            <a:srgbClr val="2D2D2D"/>
                           </a:solidFill>
                           <a:latin typeface="Calibri"/>
                         </a:defRPr>
@@ -7273,7 +10281,7 @@
                   </a:txBody>
                   <a:tcPr>
                     <a:solidFill>
-                      <a:srgbClr val="1F3355"/>
+                      <a:srgbClr val="F2F2F2"/>
                     </a:solidFill>
                   </a:tcPr>
                 </a:tc>
@@ -7285,7 +10293,7 @@
                       <a:pPr algn="ctr">
                         <a:defRPr sz="1400">
                           <a:solidFill>
-                            <a:srgbClr val="E8E8E8"/>
+                            <a:srgbClr val="2D2D2D"/>
                           </a:solidFill>
                           <a:latin typeface="Calibri"/>
                         </a:defRPr>
@@ -7297,7 +10305,7 @@
                   </a:txBody>
                   <a:tcPr>
                     <a:solidFill>
-                      <a:srgbClr val="1F3355"/>
+                      <a:srgbClr val="F2F2F2"/>
                     </a:solidFill>
                   </a:tcPr>
                 </a:tc>
@@ -7309,7 +10317,7 @@
                       <a:pPr algn="ctr">
                         <a:defRPr sz="1400">
                           <a:solidFill>
-                            <a:srgbClr val="E8E8E8"/>
+                            <a:srgbClr val="2D2D2D"/>
                           </a:solidFill>
                           <a:latin typeface="Calibri"/>
                         </a:defRPr>
@@ -7321,7 +10329,7 @@
                   </a:txBody>
                   <a:tcPr>
                     <a:solidFill>
-                      <a:srgbClr val="1F3355"/>
+                      <a:srgbClr val="F2F2F2"/>
                     </a:solidFill>
                   </a:tcPr>
                 </a:tc>
@@ -7333,7 +10341,7 @@
                       <a:pPr algn="ctr">
                         <a:defRPr sz="1400">
                           <a:solidFill>
-                            <a:srgbClr val="E8E8E8"/>
+                            <a:srgbClr val="2D2D2D"/>
                           </a:solidFill>
                           <a:latin typeface="Calibri"/>
                         </a:defRPr>
@@ -7345,7 +10353,7 @@
                   </a:txBody>
                   <a:tcPr>
                     <a:solidFill>
-                      <a:srgbClr val="1F3355"/>
+                      <a:srgbClr val="F2F2F2"/>
                     </a:solidFill>
                   </a:tcPr>
                 </a:tc>
@@ -7357,7 +10365,7 @@
                       <a:pPr algn="ctr">
                         <a:defRPr sz="1400">
                           <a:solidFill>
-                            <a:srgbClr val="E8E8E8"/>
+                            <a:srgbClr val="2D2D2D"/>
                           </a:solidFill>
                           <a:latin typeface="Calibri"/>
                         </a:defRPr>
@@ -7369,7 +10377,7 @@
                   </a:txBody>
                   <a:tcPr>
                     <a:solidFill>
-                      <a:srgbClr val="1F3355"/>
+                      <a:srgbClr val="F2F2F2"/>
                     </a:solidFill>
                   </a:tcPr>
                 </a:tc>
@@ -7381,7 +10389,7 @@
                       <a:pPr algn="ctr">
                         <a:defRPr sz="1400">
                           <a:solidFill>
-                            <a:srgbClr val="E8E8E8"/>
+                            <a:srgbClr val="2D2D2D"/>
                           </a:solidFill>
                           <a:latin typeface="Calibri"/>
                         </a:defRPr>
@@ -7393,12 +10401,12 @@
                   </a:txBody>
                   <a:tcPr>
                     <a:solidFill>
-                      <a:srgbClr val="1F3355"/>
+                      <a:srgbClr val="F2F2F2"/>
                     </a:solidFill>
                   </a:tcPr>
                 </a:tc>
               </a:tr>
-              <a:tr h="571500">
+              <a:tr h="594360">
                 <a:tc>
                   <a:txBody>
                     <a:bodyPr/>
@@ -7407,7 +10415,7 @@
                       <a:pPr algn="ctr">
                         <a:defRPr sz="1400">
                           <a:solidFill>
-                            <a:srgbClr val="E8E8E8"/>
+                            <a:srgbClr val="2D2D2D"/>
                           </a:solidFill>
                           <a:latin typeface="Calibri"/>
                         </a:defRPr>
@@ -7419,7 +10427,7 @@
                   </a:txBody>
                   <a:tcPr>
                     <a:solidFill>
-                      <a:srgbClr val="223A5E"/>
+                      <a:srgbClr val="FFFFFF"/>
                     </a:solidFill>
                   </a:tcPr>
                 </a:tc>
@@ -7431,7 +10439,7 @@
                       <a:pPr algn="ctr">
                         <a:defRPr sz="1400">
                           <a:solidFill>
-                            <a:srgbClr val="E8E8E8"/>
+                            <a:srgbClr val="2D2D2D"/>
                           </a:solidFill>
                           <a:latin typeface="Calibri"/>
                         </a:defRPr>
@@ -7443,7 +10451,7 @@
                   </a:txBody>
                   <a:tcPr>
                     <a:solidFill>
-                      <a:srgbClr val="223A5E"/>
+                      <a:srgbClr val="FFFFFF"/>
                     </a:solidFill>
                   </a:tcPr>
                 </a:tc>
@@ -7455,7 +10463,7 @@
                       <a:pPr algn="ctr">
                         <a:defRPr sz="1400">
                           <a:solidFill>
-                            <a:srgbClr val="E8E8E8"/>
+                            <a:srgbClr val="2D2D2D"/>
                           </a:solidFill>
                           <a:latin typeface="Calibri"/>
                         </a:defRPr>
@@ -7467,7 +10475,7 @@
                   </a:txBody>
                   <a:tcPr>
                     <a:solidFill>
-                      <a:srgbClr val="223A5E"/>
+                      <a:srgbClr val="FFFFFF"/>
                     </a:solidFill>
                   </a:tcPr>
                 </a:tc>
@@ -7479,7 +10487,7 @@
                       <a:pPr algn="ctr">
                         <a:defRPr sz="1400">
                           <a:solidFill>
-                            <a:srgbClr val="E8E8E8"/>
+                            <a:srgbClr val="2D2D2D"/>
                           </a:solidFill>
                           <a:latin typeface="Calibri"/>
                         </a:defRPr>
@@ -7491,7 +10499,7 @@
                   </a:txBody>
                   <a:tcPr>
                     <a:solidFill>
-                      <a:srgbClr val="223A5E"/>
+                      <a:srgbClr val="FFFFFF"/>
                     </a:solidFill>
                   </a:tcPr>
                 </a:tc>
@@ -7503,7 +10511,7 @@
                       <a:pPr algn="ctr">
                         <a:defRPr sz="1400">
                           <a:solidFill>
-                            <a:srgbClr val="E8E8E8"/>
+                            <a:srgbClr val="2D2D2D"/>
                           </a:solidFill>
                           <a:latin typeface="Calibri"/>
                         </a:defRPr>
@@ -7515,7 +10523,7 @@
                   </a:txBody>
                   <a:tcPr>
                     <a:solidFill>
-                      <a:srgbClr val="223A5E"/>
+                      <a:srgbClr val="FFFFFF"/>
                     </a:solidFill>
                   </a:tcPr>
                 </a:tc>
@@ -7527,7 +10535,7 @@
                       <a:pPr algn="ctr">
                         <a:defRPr sz="1400">
                           <a:solidFill>
-                            <a:srgbClr val="E8E8E8"/>
+                            <a:srgbClr val="2D2D2D"/>
                           </a:solidFill>
                           <a:latin typeface="Calibri"/>
                         </a:defRPr>
@@ -7539,7 +10547,7 @@
                   </a:txBody>
                   <a:tcPr>
                     <a:solidFill>
-                      <a:srgbClr val="223A5E"/>
+                      <a:srgbClr val="FFFFFF"/>
                     </a:solidFill>
                   </a:tcPr>
                 </a:tc>
@@ -7551,7 +10559,7 @@
                       <a:pPr algn="ctr">
                         <a:defRPr sz="1400">
                           <a:solidFill>
-                            <a:srgbClr val="E8E8E8"/>
+                            <a:srgbClr val="2D2D2D"/>
                           </a:solidFill>
                           <a:latin typeface="Calibri"/>
                         </a:defRPr>
@@ -7563,12 +10571,12 @@
                   </a:txBody>
                   <a:tcPr>
                     <a:solidFill>
-                      <a:srgbClr val="223A5E"/>
+                      <a:srgbClr val="FFFFFF"/>
                     </a:solidFill>
                   </a:tcPr>
                 </a:tc>
               </a:tr>
-              <a:tr h="571500">
+              <a:tr h="594360">
                 <a:tc>
                   <a:txBody>
                     <a:bodyPr/>
@@ -7577,7 +10585,7 @@
                       <a:pPr algn="ctr">
                         <a:defRPr sz="1400">
                           <a:solidFill>
-                            <a:srgbClr val="E8E8E8"/>
+                            <a:srgbClr val="2D2D2D"/>
                           </a:solidFill>
                           <a:latin typeface="Calibri"/>
                         </a:defRPr>
@@ -7589,7 +10597,7 @@
                   </a:txBody>
                   <a:tcPr>
                     <a:solidFill>
-                      <a:srgbClr val="1F3355"/>
+                      <a:srgbClr val="F2F2F2"/>
                     </a:solidFill>
                   </a:tcPr>
                 </a:tc>
@@ -7601,7 +10609,7 @@
                       <a:pPr algn="ctr">
                         <a:defRPr sz="1400">
                           <a:solidFill>
-                            <a:srgbClr val="E8E8E8"/>
+                            <a:srgbClr val="2D2D2D"/>
                           </a:solidFill>
                           <a:latin typeface="Calibri"/>
                         </a:defRPr>
@@ -7613,7 +10621,7 @@
                   </a:txBody>
                   <a:tcPr>
                     <a:solidFill>
-                      <a:srgbClr val="1F3355"/>
+                      <a:srgbClr val="F2F2F2"/>
                     </a:solidFill>
                   </a:tcPr>
                 </a:tc>
@@ -7625,7 +10633,7 @@
                       <a:pPr algn="ctr">
                         <a:defRPr sz="1400">
                           <a:solidFill>
-                            <a:srgbClr val="E8E8E8"/>
+                            <a:srgbClr val="2D2D2D"/>
                           </a:solidFill>
                           <a:latin typeface="Calibri"/>
                         </a:defRPr>
@@ -7637,7 +10645,7 @@
                   </a:txBody>
                   <a:tcPr>
                     <a:solidFill>
-                      <a:srgbClr val="1F3355"/>
+                      <a:srgbClr val="F2F2F2"/>
                     </a:solidFill>
                   </a:tcPr>
                 </a:tc>
@@ -7649,7 +10657,7 @@
                       <a:pPr algn="ctr">
                         <a:defRPr sz="1400">
                           <a:solidFill>
-                            <a:srgbClr val="E8E8E8"/>
+                            <a:srgbClr val="2D2D2D"/>
                           </a:solidFill>
                           <a:latin typeface="Calibri"/>
                         </a:defRPr>
@@ -7661,7 +10669,7 @@
                   </a:txBody>
                   <a:tcPr>
                     <a:solidFill>
-                      <a:srgbClr val="1F3355"/>
+                      <a:srgbClr val="F2F2F2"/>
                     </a:solidFill>
                   </a:tcPr>
                 </a:tc>
@@ -7673,7 +10681,7 @@
                       <a:pPr algn="ctr">
                         <a:defRPr sz="1400">
                           <a:solidFill>
-                            <a:srgbClr val="E8E8E8"/>
+                            <a:srgbClr val="2D2D2D"/>
                           </a:solidFill>
                           <a:latin typeface="Calibri"/>
                         </a:defRPr>
@@ -7685,7 +10693,7 @@
                   </a:txBody>
                   <a:tcPr>
                     <a:solidFill>
-                      <a:srgbClr val="1F3355"/>
+                      <a:srgbClr val="F2F2F2"/>
                     </a:solidFill>
                   </a:tcPr>
                 </a:tc>
@@ -7697,7 +10705,7 @@
                       <a:pPr algn="ctr">
                         <a:defRPr sz="1400">
                           <a:solidFill>
-                            <a:srgbClr val="E8E8E8"/>
+                            <a:srgbClr val="2D2D2D"/>
                           </a:solidFill>
                           <a:latin typeface="Calibri"/>
                         </a:defRPr>
@@ -7709,7 +10717,7 @@
                   </a:txBody>
                   <a:tcPr>
                     <a:solidFill>
-                      <a:srgbClr val="1F3355"/>
+                      <a:srgbClr val="F2F2F2"/>
                     </a:solidFill>
                   </a:tcPr>
                 </a:tc>
@@ -7721,7 +10729,7 @@
                       <a:pPr algn="ctr">
                         <a:defRPr sz="1400">
                           <a:solidFill>
-                            <a:srgbClr val="E8E8E8"/>
+                            <a:srgbClr val="2D2D2D"/>
                           </a:solidFill>
                           <a:latin typeface="Calibri"/>
                         </a:defRPr>
@@ -7733,12 +10741,12 @@
                   </a:txBody>
                   <a:tcPr>
                     <a:solidFill>
-                      <a:srgbClr val="1F3355"/>
+                      <a:srgbClr val="F2F2F2"/>
                     </a:solidFill>
                   </a:tcPr>
                 </a:tc>
               </a:tr>
-              <a:tr h="571500">
+              <a:tr h="594360">
                 <a:tc>
                   <a:txBody>
                     <a:bodyPr/>
@@ -7747,7 +10755,7 @@
                       <a:pPr algn="ctr">
                         <a:defRPr sz="1400">
                           <a:solidFill>
-                            <a:srgbClr val="E8E8E8"/>
+                            <a:srgbClr val="2D2D2D"/>
                           </a:solidFill>
                           <a:latin typeface="Calibri"/>
                         </a:defRPr>
@@ -7759,7 +10767,7 @@
                   </a:txBody>
                   <a:tcPr>
                     <a:solidFill>
-                      <a:srgbClr val="223A5E"/>
+                      <a:srgbClr val="FFFFFF"/>
                     </a:solidFill>
                   </a:tcPr>
                 </a:tc>
@@ -7771,7 +10779,7 @@
                       <a:pPr algn="ctr">
                         <a:defRPr sz="1400">
                           <a:solidFill>
-                            <a:srgbClr val="E8E8E8"/>
+                            <a:srgbClr val="2D2D2D"/>
                           </a:solidFill>
                           <a:latin typeface="Calibri"/>
                         </a:defRPr>
@@ -7783,7 +10791,7 @@
                   </a:txBody>
                   <a:tcPr>
                     <a:solidFill>
-                      <a:srgbClr val="223A5E"/>
+                      <a:srgbClr val="FFFFFF"/>
                     </a:solidFill>
                   </a:tcPr>
                 </a:tc>
@@ -7795,7 +10803,7 @@
                       <a:pPr algn="ctr">
                         <a:defRPr sz="1400">
                           <a:solidFill>
-                            <a:srgbClr val="E8E8E8"/>
+                            <a:srgbClr val="2D2D2D"/>
                           </a:solidFill>
                           <a:latin typeface="Calibri"/>
                         </a:defRPr>
@@ -7807,7 +10815,7 @@
                   </a:txBody>
                   <a:tcPr>
                     <a:solidFill>
-                      <a:srgbClr val="223A5E"/>
+                      <a:srgbClr val="FFFFFF"/>
                     </a:solidFill>
                   </a:tcPr>
                 </a:tc>
@@ -7819,7 +10827,7 @@
                       <a:pPr algn="ctr">
                         <a:defRPr sz="1400">
                           <a:solidFill>
-                            <a:srgbClr val="E8E8E8"/>
+                            <a:srgbClr val="2D2D2D"/>
                           </a:solidFill>
                           <a:latin typeface="Calibri"/>
                         </a:defRPr>
@@ -7831,7 +10839,7 @@
                   </a:txBody>
                   <a:tcPr>
                     <a:solidFill>
-                      <a:srgbClr val="223A5E"/>
+                      <a:srgbClr val="FFFFFF"/>
                     </a:solidFill>
                   </a:tcPr>
                 </a:tc>
@@ -7843,7 +10851,7 @@
                       <a:pPr algn="ctr">
                         <a:defRPr sz="1400">
                           <a:solidFill>
-                            <a:srgbClr val="E8E8E8"/>
+                            <a:srgbClr val="2D2D2D"/>
                           </a:solidFill>
                           <a:latin typeface="Calibri"/>
                         </a:defRPr>
@@ -7855,7 +10863,7 @@
                   </a:txBody>
                   <a:tcPr>
                     <a:solidFill>
-                      <a:srgbClr val="223A5E"/>
+                      <a:srgbClr val="FFFFFF"/>
                     </a:solidFill>
                   </a:tcPr>
                 </a:tc>
@@ -7867,7 +10875,7 @@
                       <a:pPr algn="ctr">
                         <a:defRPr sz="1400">
                           <a:solidFill>
-                            <a:srgbClr val="E8E8E8"/>
+                            <a:srgbClr val="2D2D2D"/>
                           </a:solidFill>
                           <a:latin typeface="Calibri"/>
                         </a:defRPr>
@@ -7879,7 +10887,7 @@
                   </a:txBody>
                   <a:tcPr>
                     <a:solidFill>
-                      <a:srgbClr val="223A5E"/>
+                      <a:srgbClr val="FFFFFF"/>
                     </a:solidFill>
                   </a:tcPr>
                 </a:tc>
@@ -7891,7 +10899,7 @@
                       <a:pPr algn="ctr">
                         <a:defRPr sz="1400">
                           <a:solidFill>
-                            <a:srgbClr val="E8E8E8"/>
+                            <a:srgbClr val="2D2D2D"/>
                           </a:solidFill>
                           <a:latin typeface="Calibri"/>
                         </a:defRPr>
@@ -7903,12 +10911,12 @@
                   </a:txBody>
                   <a:tcPr>
                     <a:solidFill>
-                      <a:srgbClr val="223A5E"/>
+                      <a:srgbClr val="FFFFFF"/>
                     </a:solidFill>
                   </a:tcPr>
                 </a:tc>
               </a:tr>
-              <a:tr h="571500">
+              <a:tr h="594360">
                 <a:tc>
                   <a:txBody>
                     <a:bodyPr/>
@@ -7917,7 +10925,7 @@
                       <a:pPr algn="ctr">
                         <a:defRPr sz="1400">
                           <a:solidFill>
-                            <a:srgbClr val="E8E8E8"/>
+                            <a:srgbClr val="2D2D2D"/>
                           </a:solidFill>
                           <a:latin typeface="Calibri"/>
                         </a:defRPr>
@@ -7929,7 +10937,7 @@
                   </a:txBody>
                   <a:tcPr>
                     <a:solidFill>
-                      <a:srgbClr val="1F3355"/>
+                      <a:srgbClr val="F2F2F2"/>
                     </a:solidFill>
                   </a:tcPr>
                 </a:tc>
@@ -7941,7 +10949,7 @@
                       <a:pPr algn="ctr">
                         <a:defRPr sz="1400">
                           <a:solidFill>
-                            <a:srgbClr val="E8E8E8"/>
+                            <a:srgbClr val="2D2D2D"/>
                           </a:solidFill>
                           <a:latin typeface="Calibri"/>
                         </a:defRPr>
@@ -7953,7 +10961,7 @@
                   </a:txBody>
                   <a:tcPr>
                     <a:solidFill>
-                      <a:srgbClr val="1F3355"/>
+                      <a:srgbClr val="F2F2F2"/>
                     </a:solidFill>
                   </a:tcPr>
                 </a:tc>
@@ -7965,7 +10973,7 @@
                       <a:pPr algn="ctr">
                         <a:defRPr sz="1400">
                           <a:solidFill>
-                            <a:srgbClr val="E8E8E8"/>
+                            <a:srgbClr val="2D2D2D"/>
                           </a:solidFill>
                           <a:latin typeface="Calibri"/>
                         </a:defRPr>
@@ -7977,7 +10985,7 @@
                   </a:txBody>
                   <a:tcPr>
                     <a:solidFill>
-                      <a:srgbClr val="1F3355"/>
+                      <a:srgbClr val="F2F2F2"/>
                     </a:solidFill>
                   </a:tcPr>
                 </a:tc>
@@ -7989,7 +10997,7 @@
                       <a:pPr algn="ctr">
                         <a:defRPr sz="1400">
                           <a:solidFill>
-                            <a:srgbClr val="E8E8E8"/>
+                            <a:srgbClr val="2D2D2D"/>
                           </a:solidFill>
                           <a:latin typeface="Calibri"/>
                         </a:defRPr>
@@ -8001,7 +11009,7 @@
                   </a:txBody>
                   <a:tcPr>
                     <a:solidFill>
-                      <a:srgbClr val="1F3355"/>
+                      <a:srgbClr val="F2F2F2"/>
                     </a:solidFill>
                   </a:tcPr>
                 </a:tc>
@@ -8013,7 +11021,7 @@
                       <a:pPr algn="ctr">
                         <a:defRPr sz="1400">
                           <a:solidFill>
-                            <a:srgbClr val="E8E8E8"/>
+                            <a:srgbClr val="2D2D2D"/>
                           </a:solidFill>
                           <a:latin typeface="Calibri"/>
                         </a:defRPr>
@@ -8025,7 +11033,7 @@
                   </a:txBody>
                   <a:tcPr>
                     <a:solidFill>
-                      <a:srgbClr val="1F3355"/>
+                      <a:srgbClr val="F2F2F2"/>
                     </a:solidFill>
                   </a:tcPr>
                 </a:tc>
@@ -8037,7 +11045,7 @@
                       <a:pPr algn="ctr">
                         <a:defRPr sz="1400">
                           <a:solidFill>
-                            <a:srgbClr val="E8E8E8"/>
+                            <a:srgbClr val="2D2D2D"/>
                           </a:solidFill>
                           <a:latin typeface="Calibri"/>
                         </a:defRPr>
@@ -8049,7 +11057,7 @@
                   </a:txBody>
                   <a:tcPr>
                     <a:solidFill>
-                      <a:srgbClr val="1F3355"/>
+                      <a:srgbClr val="F2F2F2"/>
                     </a:solidFill>
                   </a:tcPr>
                 </a:tc>
@@ -8061,7 +11069,7 @@
                       <a:pPr algn="ctr">
                         <a:defRPr sz="1400">
                           <a:solidFill>
-                            <a:srgbClr val="E8E8E8"/>
+                            <a:srgbClr val="2D2D2D"/>
                           </a:solidFill>
                           <a:latin typeface="Calibri"/>
                         </a:defRPr>
@@ -8073,12 +11081,12 @@
                   </a:txBody>
                   <a:tcPr>
                     <a:solidFill>
-                      <a:srgbClr val="1F3355"/>
+                      <a:srgbClr val="F2F2F2"/>
                     </a:solidFill>
                   </a:tcPr>
                 </a:tc>
               </a:tr>
-              <a:tr h="571500">
+              <a:tr h="594360">
                 <a:tc>
                   <a:txBody>
                     <a:bodyPr/>
@@ -8087,7 +11095,7 @@
                       <a:pPr algn="ctr">
                         <a:defRPr sz="1400">
                           <a:solidFill>
-                            <a:srgbClr val="E8E8E8"/>
+                            <a:srgbClr val="2D2D2D"/>
                           </a:solidFill>
                           <a:latin typeface="Calibri"/>
                         </a:defRPr>
@@ -8099,7 +11107,7 @@
                   </a:txBody>
                   <a:tcPr>
                     <a:solidFill>
-                      <a:srgbClr val="223A5E"/>
+                      <a:srgbClr val="FFFFFF"/>
                     </a:solidFill>
                   </a:tcPr>
                 </a:tc>
@@ -8111,7 +11119,7 @@
                       <a:pPr algn="ctr">
                         <a:defRPr sz="1400">
                           <a:solidFill>
-                            <a:srgbClr val="E8E8E8"/>
+                            <a:srgbClr val="2D2D2D"/>
                           </a:solidFill>
                           <a:latin typeface="Calibri"/>
                         </a:defRPr>
@@ -8123,7 +11131,7 @@
                   </a:txBody>
                   <a:tcPr>
                     <a:solidFill>
-                      <a:srgbClr val="223A5E"/>
+                      <a:srgbClr val="FFFFFF"/>
                     </a:solidFill>
                   </a:tcPr>
                 </a:tc>
@@ -8135,7 +11143,7 @@
                       <a:pPr algn="ctr">
                         <a:defRPr sz="1400">
                           <a:solidFill>
-                            <a:srgbClr val="E8E8E8"/>
+                            <a:srgbClr val="2D2D2D"/>
                           </a:solidFill>
                           <a:latin typeface="Calibri"/>
                         </a:defRPr>
@@ -8147,7 +11155,7 @@
                   </a:txBody>
                   <a:tcPr>
                     <a:solidFill>
-                      <a:srgbClr val="223A5E"/>
+                      <a:srgbClr val="FFFFFF"/>
                     </a:solidFill>
                   </a:tcPr>
                 </a:tc>
@@ -8159,7 +11167,7 @@
                       <a:pPr algn="ctr">
                         <a:defRPr sz="1400">
                           <a:solidFill>
-                            <a:srgbClr val="E8E8E8"/>
+                            <a:srgbClr val="2D2D2D"/>
                           </a:solidFill>
                           <a:latin typeface="Calibri"/>
                         </a:defRPr>
@@ -8171,7 +11179,7 @@
                   </a:txBody>
                   <a:tcPr>
                     <a:solidFill>
-                      <a:srgbClr val="223A5E"/>
+                      <a:srgbClr val="FFFFFF"/>
                     </a:solidFill>
                   </a:tcPr>
                 </a:tc>
@@ -8183,7 +11191,7 @@
                       <a:pPr algn="ctr">
                         <a:defRPr sz="1400">
                           <a:solidFill>
-                            <a:srgbClr val="E8E8E8"/>
+                            <a:srgbClr val="2D2D2D"/>
                           </a:solidFill>
                           <a:latin typeface="Calibri"/>
                         </a:defRPr>
@@ -8195,7 +11203,7 @@
                   </a:txBody>
                   <a:tcPr>
                     <a:solidFill>
-                      <a:srgbClr val="223A5E"/>
+                      <a:srgbClr val="FFFFFF"/>
                     </a:solidFill>
                   </a:tcPr>
                 </a:tc>
@@ -8207,7 +11215,7 @@
                       <a:pPr algn="ctr">
                         <a:defRPr sz="1400">
                           <a:solidFill>
-                            <a:srgbClr val="E8E8E8"/>
+                            <a:srgbClr val="2D2D2D"/>
                           </a:solidFill>
                           <a:latin typeface="Calibri"/>
                         </a:defRPr>
@@ -8219,7 +11227,7 @@
                   </a:txBody>
                   <a:tcPr>
                     <a:solidFill>
-                      <a:srgbClr val="223A5E"/>
+                      <a:srgbClr val="FFFFFF"/>
                     </a:solidFill>
                   </a:tcPr>
                 </a:tc>
@@ -8231,7 +11239,7 @@
                       <a:pPr algn="ctr">
                         <a:defRPr sz="1400">
                           <a:solidFill>
-                            <a:srgbClr val="E8E8E8"/>
+                            <a:srgbClr val="2D2D2D"/>
                           </a:solidFill>
                           <a:latin typeface="Calibri"/>
                         </a:defRPr>
@@ -8243,12 +11251,12 @@
                   </a:txBody>
                   <a:tcPr>
                     <a:solidFill>
-                      <a:srgbClr val="223A5E"/>
+                      <a:srgbClr val="FFFFFF"/>
                     </a:solidFill>
                   </a:tcPr>
                 </a:tc>
               </a:tr>
-              <a:tr h="571500">
+              <a:tr h="594360">
                 <a:tc>
                   <a:txBody>
                     <a:bodyPr/>
@@ -8257,7 +11265,7 @@
                       <a:pPr algn="ctr">
                         <a:defRPr sz="1400">
                           <a:solidFill>
-                            <a:srgbClr val="E8E8E8"/>
+                            <a:srgbClr val="2D2D2D"/>
                           </a:solidFill>
                           <a:latin typeface="Calibri"/>
                         </a:defRPr>
@@ -8269,7 +11277,7 @@
                   </a:txBody>
                   <a:tcPr>
                     <a:solidFill>
-                      <a:srgbClr val="1F3355"/>
+                      <a:srgbClr val="F2F2F2"/>
                     </a:solidFill>
                   </a:tcPr>
                 </a:tc>
@@ -8281,7 +11289,7 @@
                       <a:pPr algn="ctr">
                         <a:defRPr sz="1400">
                           <a:solidFill>
-                            <a:srgbClr val="E8E8E8"/>
+                            <a:srgbClr val="2D2D2D"/>
                           </a:solidFill>
                           <a:latin typeface="Calibri"/>
                         </a:defRPr>
@@ -8293,7 +11301,7 @@
                   </a:txBody>
                   <a:tcPr>
                     <a:solidFill>
-                      <a:srgbClr val="1F3355"/>
+                      <a:srgbClr val="F2F2F2"/>
                     </a:solidFill>
                   </a:tcPr>
                 </a:tc>
@@ -8305,7 +11313,7 @@
                       <a:pPr algn="ctr">
                         <a:defRPr sz="1400">
                           <a:solidFill>
-                            <a:srgbClr val="E8E8E8"/>
+                            <a:srgbClr val="2D2D2D"/>
                           </a:solidFill>
                           <a:latin typeface="Calibri"/>
                         </a:defRPr>
@@ -8317,7 +11325,7 @@
                   </a:txBody>
                   <a:tcPr>
                     <a:solidFill>
-                      <a:srgbClr val="1F3355"/>
+                      <a:srgbClr val="F2F2F2"/>
                     </a:solidFill>
                   </a:tcPr>
                 </a:tc>
@@ -8329,7 +11337,7 @@
                       <a:pPr algn="ctr">
                         <a:defRPr sz="1400">
                           <a:solidFill>
-                            <a:srgbClr val="E8E8E8"/>
+                            <a:srgbClr val="2D2D2D"/>
                           </a:solidFill>
                           <a:latin typeface="Calibri"/>
                         </a:defRPr>
@@ -8341,7 +11349,7 @@
                   </a:txBody>
                   <a:tcPr>
                     <a:solidFill>
-                      <a:srgbClr val="1F3355"/>
+                      <a:srgbClr val="F2F2F2"/>
                     </a:solidFill>
                   </a:tcPr>
                 </a:tc>
@@ -8353,7 +11361,7 @@
                       <a:pPr algn="ctr">
                         <a:defRPr sz="1400">
                           <a:solidFill>
-                            <a:srgbClr val="E8E8E8"/>
+                            <a:srgbClr val="2D2D2D"/>
                           </a:solidFill>
                           <a:latin typeface="Calibri"/>
                         </a:defRPr>
@@ -8365,7 +11373,7 @@
                   </a:txBody>
                   <a:tcPr>
                     <a:solidFill>
-                      <a:srgbClr val="1F3355"/>
+                      <a:srgbClr val="F2F2F2"/>
                     </a:solidFill>
                   </a:tcPr>
                 </a:tc>
@@ -8377,7 +11385,7 @@
                       <a:pPr algn="ctr">
                         <a:defRPr sz="1400">
                           <a:solidFill>
-                            <a:srgbClr val="E8E8E8"/>
+                            <a:srgbClr val="2D2D2D"/>
                           </a:solidFill>
                           <a:latin typeface="Calibri"/>
                         </a:defRPr>
@@ -8389,7 +11397,7 @@
                   </a:txBody>
                   <a:tcPr>
                     <a:solidFill>
-                      <a:srgbClr val="1F3355"/>
+                      <a:srgbClr val="F2F2F2"/>
                     </a:solidFill>
                   </a:tcPr>
                 </a:tc>
@@ -8401,7 +11409,7 @@
                       <a:pPr algn="ctr">
                         <a:defRPr sz="1400">
                           <a:solidFill>
-                            <a:srgbClr val="E8E8E8"/>
+                            <a:srgbClr val="2D2D2D"/>
                           </a:solidFill>
                           <a:latin typeface="Calibri"/>
                         </a:defRPr>
@@ -8413,7 +11421,7 @@
                   </a:txBody>
                   <a:tcPr>
                     <a:solidFill>
-                      <a:srgbClr val="1F3355"/>
+                      <a:srgbClr val="F2F2F2"/>
                     </a:solidFill>
                   </a:tcPr>
                 </a:tc>
@@ -8424,14 +11432,14 @@
       </p:graphicFrame>
       <p:sp>
         <p:nvSpPr>
-          <p:cNvPr id="5" name="TextBox 4"/>
+          <p:cNvPr id="7" name="TextBox 6"/>
           <p:cNvSpPr txBox="1"/>
           <p:nvPr/>
         </p:nvSpPr>
         <p:spPr>
           <a:xfrm>
-            <a:off x="731520" y="6126480"/>
-            <a:ext cx="10698480" cy="457200"/>
+            <a:off x="731520" y="6080760"/>
+            <a:ext cx="10698480" cy="320040"/>
           </a:xfrm>
           <a:prstGeom prst="rect">
             <a:avLst/>
@@ -8445,51 +11453,15 @@
           <a:lstStyle/>
           <a:p>
             <a:pPr algn="ctr">
-              <a:defRPr sz="1400" b="0">
-                <a:solidFill>
-                  <a:srgbClr val="8888AA"/>
+              <a:defRPr sz="1300" b="0">
+                <a:solidFill>
+                  <a:srgbClr val="666666"/>
                 </a:solidFill>
                 <a:latin typeface="Calibri"/>
               </a:defRPr>
             </a:pPr>
             <a:r>
               <a:t>Н — низкая    С — средняя    В — высокая</a:t>
-            </a:r>
-          </a:p>
-        </p:txBody>
-      </p:sp>
-      <p:sp>
-        <p:nvSpPr>
-          <p:cNvPr id="6" name="TextBox 5"/>
-          <p:cNvSpPr txBox="1"/>
-          <p:nvPr/>
-        </p:nvSpPr>
-        <p:spPr>
-          <a:xfrm>
-            <a:off x="11430000" y="6400800"/>
-            <a:ext cx="640080" cy="365760"/>
-          </a:xfrm>
-          <a:prstGeom prst="rect">
-            <a:avLst/>
-          </a:prstGeom>
-          <a:noFill/>
-        </p:spPr>
-        <p:txBody>
-          <a:bodyPr wrap="none">
-            <a:spAutoFit/>
-          </a:bodyPr>
-          <a:lstStyle/>
-          <a:p>
-            <a:pPr algn="r">
-              <a:defRPr sz="1200">
-                <a:solidFill>
-                  <a:srgbClr val="8888AA"/>
-                </a:solidFill>
-                <a:latin typeface="Calibri"/>
-              </a:defRPr>
-            </a:pPr>
-            <a:r>
-              <a:t>9</a:t>
             </a:r>
           </a:p>
         </p:txBody>
